--- a/Sentinel_Presentation.pptx
+++ b/Sentinel_Presentation.pptx
@@ -3435,7 +3435,7 @@
                 </a:solidFill>
                 <a:latin typeface="Segoe UI"/>
               </a:rPr>
-              <a:t>Project Author:  Nikunj Rameshbhai Maheshwari</a:t>
+              <a:t>Team:  Nikunj Maheshwari  ·  Dhurvi Thakkar</a:t>
             </a:r>
           </a:p>
         </p:txBody>
@@ -3525,24 +3525,20 @@
           <a:noFill/>
         </p:spPr>
         <p:txBody>
-          <a:bodyPr wrap="square" anchor="t">
-            <a:spAutoFit/>
-          </a:bodyPr>
-          <a:lstStyle/>
-          <a:p>
-            <a:pPr algn="l">
-              <a:lnSpc>
-                <a:spcPct val="105000"/>
-              </a:lnSpc>
-            </a:pPr>
-            <a:r>
-              <a:rPr sz="1300" b="1" i="0">
+          <a:bodyPr wrap="square">
+            <a:spAutoFit/>
+          </a:bodyPr>
+          <a:lstStyle/>
+          <a:p>
+            <a:pPr algn="l"/>
+            <a:r>
+              <a:rPr sz="1300" b="1">
                 <a:solidFill>
                   <a:srgbClr val="25D8F0"/>
                 </a:solidFill>
                 <a:latin typeface="Segoe UI"/>
               </a:rPr>
-              <a:t>THE SCALE BREAKTHROUGH</a:t>
+              <a:t>AUTONOMOUS DRONE DISPATCH</a:t>
             </a:r>
           </a:p>
         </p:txBody>
@@ -3564,24 +3560,20 @@
           <a:noFill/>
         </p:spPr>
         <p:txBody>
-          <a:bodyPr wrap="square" anchor="t">
-            <a:spAutoFit/>
-          </a:bodyPr>
-          <a:lstStyle/>
-          <a:p>
-            <a:pPr algn="l">
-              <a:lnSpc>
-                <a:spcPct val="105000"/>
-              </a:lnSpc>
-            </a:pPr>
-            <a:r>
-              <a:rPr sz="2800" b="1" i="0">
+          <a:bodyPr wrap="square">
+            <a:spAutoFit/>
+          </a:bodyPr>
+          <a:lstStyle/>
+          <a:p>
+            <a:pPr algn="l"/>
+            <a:r>
+              <a:rPr sz="2600" b="1">
                 <a:solidFill>
                   <a:srgbClr val="EAF1FA"/>
                 </a:solidFill>
                 <a:latin typeface="Segoe UI"/>
               </a:rPr>
-              <a:t>Why Sentinel reaches 80,000 cameras</a:t>
+              <a:t>From alert to interception — a drone in the loop, not just a camera</a:t>
             </a:r>
           </a:p>
         </p:txBody>
@@ -3594,14 +3586,14 @@
         </p:nvSpPr>
         <p:spPr>
           <a:xfrm>
-            <a:off x="1097280" y="2011680"/>
-            <a:ext cx="4480560" cy="2377440"/>
+            <a:off x="1089507" y="2194560"/>
+            <a:ext cx="1783080" cy="1691640"/>
           </a:xfrm>
           <a:prstGeom prst="roundRect">
             <a:avLst/>
           </a:prstGeom>
           <a:solidFill>
-            <a:srgbClr val="14223A"/>
+            <a:srgbClr val="182C4C"/>
           </a:solidFill>
           <a:ln w="12700">
             <a:solidFill>
@@ -3640,33 +3632,29 @@
         </p:nvSpPr>
         <p:spPr>
           <a:xfrm>
-            <a:off x="1097280" y="2331720"/>
-            <a:ext cx="4480560" cy="1005840"/>
-          </a:xfrm>
-          <a:prstGeom prst="rect">
-            <a:avLst/>
-          </a:prstGeom>
-          <a:noFill/>
-        </p:spPr>
-        <p:txBody>
-          <a:bodyPr wrap="square" anchor="t">
-            <a:spAutoFit/>
-          </a:bodyPr>
-          <a:lstStyle/>
-          <a:p>
-            <a:pPr algn="ctr">
-              <a:lnSpc>
-                <a:spcPct val="105000"/>
-              </a:lnSpc>
-            </a:pPr>
-            <a:r>
-              <a:rPr sz="5400" b="1" i="0">
+            <a:off x="1089507" y="2331720"/>
+            <a:ext cx="1783080" cy="502920"/>
+          </a:xfrm>
+          <a:prstGeom prst="rect">
+            <a:avLst/>
+          </a:prstGeom>
+          <a:noFill/>
+        </p:spPr>
+        <p:txBody>
+          <a:bodyPr wrap="square">
+            <a:spAutoFit/>
+          </a:bodyPr>
+          <a:lstStyle/>
+          <a:p>
+            <a:pPr algn="ctr"/>
+            <a:r>
+              <a:rPr sz="2600" b="0">
                 <a:solidFill>
                   <a:srgbClr val="FF3B5C"/>
                 </a:solidFill>
                 <a:latin typeface="Segoe UI"/>
               </a:rPr>
-              <a:t>160 Gbps</a:t>
+              <a:t>🚨</a:t>
             </a:r>
           </a:p>
         </p:txBody>
@@ -3679,47 +3667,78 @@
         </p:nvSpPr>
         <p:spPr>
           <a:xfrm>
-            <a:off x="1097280" y="3474720"/>
-            <a:ext cx="4480560" cy="548640"/>
-          </a:xfrm>
-          <a:prstGeom prst="rect">
-            <a:avLst/>
-          </a:prstGeom>
-          <a:noFill/>
-        </p:spPr>
-        <p:txBody>
-          <a:bodyPr wrap="square" anchor="t">
-            <a:spAutoFit/>
-          </a:bodyPr>
-          <a:lstStyle/>
-          <a:p>
-            <a:pPr algn="ctr">
-              <a:lnSpc>
-                <a:spcPct val="105000"/>
-              </a:lnSpc>
-            </a:pPr>
-            <a:r>
-              <a:rPr sz="1500" b="0" i="0">
+            <a:off x="1180947" y="2926080"/>
+            <a:ext cx="1600200" cy="502920"/>
+          </a:xfrm>
+          <a:prstGeom prst="rect">
+            <a:avLst/>
+          </a:prstGeom>
+          <a:noFill/>
+        </p:spPr>
+        <p:txBody>
+          <a:bodyPr wrap="square">
+            <a:spAutoFit/>
+          </a:bodyPr>
+          <a:lstStyle/>
+          <a:p>
+            <a:pPr algn="ctr"/>
+            <a:r>
+              <a:rPr sz="1250" b="1">
+                <a:solidFill>
+                  <a:srgbClr val="EAF1FA"/>
+                </a:solidFill>
+                <a:latin typeface="Segoe UI"/>
+              </a:rPr>
+              <a:t>Alert Triggered</a:t>
+            </a:r>
+          </a:p>
+        </p:txBody>
+      </p:sp>
+      <p:sp>
+        <p:nvSpPr>
+          <p:cNvPr id="7" name="TextBox 6"/>
+          <p:cNvSpPr txBox="1"/>
+          <p:nvPr/>
+        </p:nvSpPr>
+        <p:spPr>
+          <a:xfrm>
+            <a:off x="1180947" y="3383280"/>
+            <a:ext cx="1600200" cy="411480"/>
+          </a:xfrm>
+          <a:prstGeom prst="rect">
+            <a:avLst/>
+          </a:prstGeom>
+          <a:noFill/>
+        </p:spPr>
+        <p:txBody>
+          <a:bodyPr wrap="square">
+            <a:spAutoFit/>
+          </a:bodyPr>
+          <a:lstStyle/>
+          <a:p>
+            <a:pPr algn="ctr"/>
+            <a:r>
+              <a:rPr sz="1050" b="0">
                 <a:solidFill>
                   <a:srgbClr val="93A9C2"/>
                 </a:solidFill>
                 <a:latin typeface="Segoe UI"/>
               </a:rPr>
-              <a:t>Centralising all video — impossible</a:t>
-            </a:r>
-          </a:p>
-        </p:txBody>
-      </p:sp>
-      <p:sp>
-        <p:nvSpPr>
-          <p:cNvPr id="7" name="Right Arrow 6"/>
+              <a:t>Stolen vehicle / wanted person</a:t>
+            </a:r>
+          </a:p>
+        </p:txBody>
+      </p:sp>
+      <p:sp>
+        <p:nvSpPr>
+          <p:cNvPr id="8" name="Right Arrow 7"/>
           <p:cNvSpPr/>
           <p:nvPr/>
         </p:nvSpPr>
         <p:spPr>
           <a:xfrm>
-            <a:off x="5715000" y="2971800"/>
-            <a:ext cx="777240" cy="457200"/>
+            <a:off x="2872587" y="2948940"/>
+            <a:ext cx="274320" cy="182880"/>
           </a:xfrm>
           <a:prstGeom prst="rightArrow">
             <a:avLst/>
@@ -3756,20 +3775,215 @@
       </p:sp>
       <p:sp>
         <p:nvSpPr>
-          <p:cNvPr id="8" name="Rounded Rectangle 7"/>
+          <p:cNvPr id="9" name="Rounded Rectangle 8"/>
           <p:cNvSpPr/>
           <p:nvPr/>
         </p:nvSpPr>
         <p:spPr>
           <a:xfrm>
-            <a:off x="6629400" y="2011680"/>
-            <a:ext cx="4480560" cy="2377440"/>
+            <a:off x="3146907" y="2194560"/>
+            <a:ext cx="1783080" cy="1691640"/>
           </a:xfrm>
           <a:prstGeom prst="roundRect">
             <a:avLst/>
           </a:prstGeom>
           <a:solidFill>
-            <a:srgbClr val="14223A"/>
+            <a:srgbClr val="182C4C"/>
+          </a:solidFill>
+          <a:ln w="12700">
+            <a:solidFill>
+              <a:srgbClr val="F5B638"/>
+            </a:solidFill>
+          </a:ln>
+          <a:effectLst/>
+        </p:spPr>
+        <p:style>
+          <a:lnRef idx="1">
+            <a:schemeClr val="accent1"/>
+          </a:lnRef>
+          <a:fillRef idx="3">
+            <a:schemeClr val="accent1"/>
+          </a:fillRef>
+          <a:effectRef idx="2">
+            <a:schemeClr val="accent1"/>
+          </a:effectRef>
+          <a:fontRef idx="minor">
+            <a:schemeClr val="lt1"/>
+          </a:fontRef>
+        </p:style>
+        <p:txBody>
+          <a:bodyPr rtlCol="0" anchor="ctr"/>
+          <a:lstStyle/>
+          <a:p>
+            <a:pPr algn="ctr"/>
+          </a:p>
+        </p:txBody>
+      </p:sp>
+      <p:sp>
+        <p:nvSpPr>
+          <p:cNvPr id="10" name="TextBox 9"/>
+          <p:cNvSpPr txBox="1"/>
+          <p:nvPr/>
+        </p:nvSpPr>
+        <p:spPr>
+          <a:xfrm>
+            <a:off x="3146907" y="2331720"/>
+            <a:ext cx="1783080" cy="502920"/>
+          </a:xfrm>
+          <a:prstGeom prst="rect">
+            <a:avLst/>
+          </a:prstGeom>
+          <a:noFill/>
+        </p:spPr>
+        <p:txBody>
+          <a:bodyPr wrap="square">
+            <a:spAutoFit/>
+          </a:bodyPr>
+          <a:lstStyle/>
+          <a:p>
+            <a:pPr algn="ctr"/>
+            <a:r>
+              <a:rPr sz="2600" b="0">
+                <a:solidFill>
+                  <a:srgbClr val="F5B638"/>
+                </a:solidFill>
+                <a:latin typeface="Segoe UI"/>
+              </a:rPr>
+              <a:t>🧭</a:t>
+            </a:r>
+          </a:p>
+        </p:txBody>
+      </p:sp>
+      <p:sp>
+        <p:nvSpPr>
+          <p:cNvPr id="11" name="TextBox 10"/>
+          <p:cNvSpPr txBox="1"/>
+          <p:nvPr/>
+        </p:nvSpPr>
+        <p:spPr>
+          <a:xfrm>
+            <a:off x="3238347" y="2926080"/>
+            <a:ext cx="1600200" cy="502920"/>
+          </a:xfrm>
+          <a:prstGeom prst="rect">
+            <a:avLst/>
+          </a:prstGeom>
+          <a:noFill/>
+        </p:spPr>
+        <p:txBody>
+          <a:bodyPr wrap="square">
+            <a:spAutoFit/>
+          </a:bodyPr>
+          <a:lstStyle/>
+          <a:p>
+            <a:pPr algn="ctr"/>
+            <a:r>
+              <a:rPr sz="1250" b="1">
+                <a:solidFill>
+                  <a:srgbClr val="EAF1FA"/>
+                </a:solidFill>
+                <a:latin typeface="Segoe UI"/>
+              </a:rPr>
+              <a:t>Next Camera Predicted</a:t>
+            </a:r>
+          </a:p>
+        </p:txBody>
+      </p:sp>
+      <p:sp>
+        <p:nvSpPr>
+          <p:cNvPr id="12" name="TextBox 11"/>
+          <p:cNvSpPr txBox="1"/>
+          <p:nvPr/>
+        </p:nvSpPr>
+        <p:spPr>
+          <a:xfrm>
+            <a:off x="3238347" y="3383280"/>
+            <a:ext cx="1600200" cy="411480"/>
+          </a:xfrm>
+          <a:prstGeom prst="rect">
+            <a:avLst/>
+          </a:prstGeom>
+          <a:noFill/>
+        </p:spPr>
+        <p:txBody>
+          <a:bodyPr wrap="square">
+            <a:spAutoFit/>
+          </a:bodyPr>
+          <a:lstStyle/>
+          <a:p>
+            <a:pPr algn="ctr"/>
+            <a:r>
+              <a:rPr sz="1050" b="0">
+                <a:solidFill>
+                  <a:srgbClr val="93A9C2"/>
+                </a:solidFill>
+                <a:latin typeface="Segoe UI"/>
+              </a:rPr>
+              <a:t>Bearing + distance scoring</a:t>
+            </a:r>
+          </a:p>
+        </p:txBody>
+      </p:sp>
+      <p:sp>
+        <p:nvSpPr>
+          <p:cNvPr id="13" name="Right Arrow 12"/>
+          <p:cNvSpPr/>
+          <p:nvPr/>
+        </p:nvSpPr>
+        <p:spPr>
+          <a:xfrm>
+            <a:off x="4929987" y="2948940"/>
+            <a:ext cx="274320" cy="182880"/>
+          </a:xfrm>
+          <a:prstGeom prst="rightArrow">
+            <a:avLst/>
+          </a:prstGeom>
+          <a:solidFill>
+            <a:srgbClr val="25D8F0"/>
+          </a:solidFill>
+          <a:ln>
+            <a:noFill/>
+          </a:ln>
+          <a:effectLst/>
+        </p:spPr>
+        <p:style>
+          <a:lnRef idx="1">
+            <a:schemeClr val="accent1"/>
+          </a:lnRef>
+          <a:fillRef idx="3">
+            <a:schemeClr val="accent1"/>
+          </a:fillRef>
+          <a:effectRef idx="2">
+            <a:schemeClr val="accent1"/>
+          </a:effectRef>
+          <a:fontRef idx="minor">
+            <a:schemeClr val="lt1"/>
+          </a:fontRef>
+        </p:style>
+        <p:txBody>
+          <a:bodyPr rtlCol="0" anchor="ctr"/>
+          <a:lstStyle/>
+          <a:p>
+            <a:pPr algn="ctr"/>
+          </a:p>
+        </p:txBody>
+      </p:sp>
+      <p:sp>
+        <p:nvSpPr>
+          <p:cNvPr id="14" name="Rounded Rectangle 13"/>
+          <p:cNvSpPr/>
+          <p:nvPr/>
+        </p:nvSpPr>
+        <p:spPr>
+          <a:xfrm>
+            <a:off x="5204307" y="2194560"/>
+            <a:ext cx="1783080" cy="1691640"/>
+          </a:xfrm>
+          <a:prstGeom prst="roundRect">
+            <a:avLst/>
+          </a:prstGeom>
+          <a:solidFill>
+            <a:srgbClr val="182C4C"/>
           </a:solidFill>
           <a:ln w="12700">
             <a:solidFill>
@@ -3802,92 +4016,358 @@
       </p:sp>
       <p:sp>
         <p:nvSpPr>
-          <p:cNvPr id="9" name="TextBox 8"/>
-          <p:cNvSpPr txBox="1"/>
-          <p:nvPr/>
-        </p:nvSpPr>
-        <p:spPr>
-          <a:xfrm>
-            <a:off x="6629400" y="2331720"/>
-            <a:ext cx="4480560" cy="1005840"/>
-          </a:xfrm>
-          <a:prstGeom prst="rect">
-            <a:avLst/>
-          </a:prstGeom>
-          <a:noFill/>
-        </p:spPr>
-        <p:txBody>
-          <a:bodyPr wrap="square" anchor="t">
-            <a:spAutoFit/>
-          </a:bodyPr>
-          <a:lstStyle/>
-          <a:p>
-            <a:pPr algn="ctr">
-              <a:lnSpc>
-                <a:spcPct val="105000"/>
-              </a:lnSpc>
-            </a:pPr>
-            <a:r>
-              <a:rPr sz="5400" b="1" i="0">
+          <p:cNvPr id="15" name="TextBox 14"/>
+          <p:cNvSpPr txBox="1"/>
+          <p:nvPr/>
+        </p:nvSpPr>
+        <p:spPr>
+          <a:xfrm>
+            <a:off x="5204307" y="2331720"/>
+            <a:ext cx="1783080" cy="502920"/>
+          </a:xfrm>
+          <a:prstGeom prst="rect">
+            <a:avLst/>
+          </a:prstGeom>
+          <a:noFill/>
+        </p:spPr>
+        <p:txBody>
+          <a:bodyPr wrap="square">
+            <a:spAutoFit/>
+          </a:bodyPr>
+          <a:lstStyle/>
+          <a:p>
+            <a:pPr algn="ctr"/>
+            <a:r>
+              <a:rPr sz="2600" b="0">
                 <a:solidFill>
                   <a:srgbClr val="2AD477"/>
                 </a:solidFill>
                 <a:latin typeface="Segoe UI"/>
               </a:rPr>
-              <a:t>≈ 10 Gbps</a:t>
-            </a:r>
-          </a:p>
-        </p:txBody>
-      </p:sp>
-      <p:sp>
-        <p:nvSpPr>
-          <p:cNvPr id="10" name="TextBox 9"/>
-          <p:cNvSpPr txBox="1"/>
-          <p:nvPr/>
-        </p:nvSpPr>
-        <p:spPr>
-          <a:xfrm>
-            <a:off x="6629400" y="3474720"/>
-            <a:ext cx="4480560" cy="548640"/>
-          </a:xfrm>
-          <a:prstGeom prst="rect">
-            <a:avLst/>
-          </a:prstGeom>
-          <a:noFill/>
-        </p:spPr>
-        <p:txBody>
-          <a:bodyPr wrap="square" anchor="t">
-            <a:spAutoFit/>
-          </a:bodyPr>
-          <a:lstStyle/>
-          <a:p>
-            <a:pPr algn="ctr">
-              <a:lnSpc>
-                <a:spcPct val="105000"/>
-              </a:lnSpc>
-            </a:pPr>
-            <a:r>
-              <a:rPr sz="1500" b="0" i="0">
+              <a:t>🚁</a:t>
+            </a:r>
+          </a:p>
+        </p:txBody>
+      </p:sp>
+      <p:sp>
+        <p:nvSpPr>
+          <p:cNvPr id="16" name="TextBox 15"/>
+          <p:cNvSpPr txBox="1"/>
+          <p:nvPr/>
+        </p:nvSpPr>
+        <p:spPr>
+          <a:xfrm>
+            <a:off x="5295747" y="2926080"/>
+            <a:ext cx="1600200" cy="502920"/>
+          </a:xfrm>
+          <a:prstGeom prst="rect">
+            <a:avLst/>
+          </a:prstGeom>
+          <a:noFill/>
+        </p:spPr>
+        <p:txBody>
+          <a:bodyPr wrap="square">
+            <a:spAutoFit/>
+          </a:bodyPr>
+          <a:lstStyle/>
+          <a:p>
+            <a:pPr algn="ctr"/>
+            <a:r>
+              <a:rPr sz="1250" b="1">
+                <a:solidFill>
+                  <a:srgbClr val="EAF1FA"/>
+                </a:solidFill>
+                <a:latin typeface="Segoe UI"/>
+              </a:rPr>
+              <a:t>Drone Dispatched</a:t>
+            </a:r>
+          </a:p>
+        </p:txBody>
+      </p:sp>
+      <p:sp>
+        <p:nvSpPr>
+          <p:cNvPr id="17" name="TextBox 16"/>
+          <p:cNvSpPr txBox="1"/>
+          <p:nvPr/>
+        </p:nvSpPr>
+        <p:spPr>
+          <a:xfrm>
+            <a:off x="5295747" y="3383280"/>
+            <a:ext cx="1600200" cy="411480"/>
+          </a:xfrm>
+          <a:prstGeom prst="rect">
+            <a:avLst/>
+          </a:prstGeom>
+          <a:noFill/>
+        </p:spPr>
+        <p:txBody>
+          <a:bodyPr wrap="square">
+            <a:spAutoFit/>
+          </a:bodyPr>
+          <a:lstStyle/>
+          <a:p>
+            <a:pPr algn="ctr"/>
+            <a:r>
+              <a:rPr sz="1050" b="0">
                 <a:solidFill>
                   <a:srgbClr val="93A9C2"/>
                 </a:solidFill>
                 <a:latin typeface="Segoe UI"/>
               </a:rPr>
-              <a:t>Edge processing — 15× less, feasible</a:t>
-            </a:r>
-          </a:p>
-        </p:txBody>
-      </p:sp>
-      <p:sp>
-        <p:nvSpPr>
-          <p:cNvPr id="11" name="Rounded Rectangle 10"/>
+              <a:t>One click from the alert</a:t>
+            </a:r>
+          </a:p>
+        </p:txBody>
+      </p:sp>
+      <p:sp>
+        <p:nvSpPr>
+          <p:cNvPr id="18" name="Right Arrow 17"/>
           <p:cNvSpPr/>
           <p:nvPr/>
         </p:nvSpPr>
         <p:spPr>
           <a:xfrm>
-            <a:off x="1097280" y="4709160"/>
-            <a:ext cx="10012680" cy="1280160"/>
+            <a:off x="6987387" y="2948940"/>
+            <a:ext cx="274320" cy="182880"/>
+          </a:xfrm>
+          <a:prstGeom prst="rightArrow">
+            <a:avLst/>
+          </a:prstGeom>
+          <a:solidFill>
+            <a:srgbClr val="25D8F0"/>
+          </a:solidFill>
+          <a:ln>
+            <a:noFill/>
+          </a:ln>
+          <a:effectLst/>
+        </p:spPr>
+        <p:style>
+          <a:lnRef idx="1">
+            <a:schemeClr val="accent1"/>
+          </a:lnRef>
+          <a:fillRef idx="3">
+            <a:schemeClr val="accent1"/>
+          </a:fillRef>
+          <a:effectRef idx="2">
+            <a:schemeClr val="accent1"/>
+          </a:effectRef>
+          <a:fontRef idx="minor">
+            <a:schemeClr val="lt1"/>
+          </a:fontRef>
+        </p:style>
+        <p:txBody>
+          <a:bodyPr rtlCol="0" anchor="ctr"/>
+          <a:lstStyle/>
+          <a:p>
+            <a:pPr algn="ctr"/>
+          </a:p>
+        </p:txBody>
+      </p:sp>
+      <p:sp>
+        <p:nvSpPr>
+          <p:cNvPr id="19" name="Rounded Rectangle 18"/>
+          <p:cNvSpPr/>
+          <p:nvPr/>
+        </p:nvSpPr>
+        <p:spPr>
+          <a:xfrm>
+            <a:off x="7261707" y="2194560"/>
+            <a:ext cx="1783080" cy="1691640"/>
+          </a:xfrm>
+          <a:prstGeom prst="roundRect">
+            <a:avLst/>
+          </a:prstGeom>
+          <a:solidFill>
+            <a:srgbClr val="182C4C"/>
+          </a:solidFill>
+          <a:ln w="12700">
+            <a:solidFill>
+              <a:srgbClr val="2B8CFF"/>
+            </a:solidFill>
+          </a:ln>
+          <a:effectLst/>
+        </p:spPr>
+        <p:style>
+          <a:lnRef idx="1">
+            <a:schemeClr val="accent1"/>
+          </a:lnRef>
+          <a:fillRef idx="3">
+            <a:schemeClr val="accent1"/>
+          </a:fillRef>
+          <a:effectRef idx="2">
+            <a:schemeClr val="accent1"/>
+          </a:effectRef>
+          <a:fontRef idx="minor">
+            <a:schemeClr val="lt1"/>
+          </a:fontRef>
+        </p:style>
+        <p:txBody>
+          <a:bodyPr rtlCol="0" anchor="ctr"/>
+          <a:lstStyle/>
+          <a:p>
+            <a:pPr algn="ctr"/>
+          </a:p>
+        </p:txBody>
+      </p:sp>
+      <p:sp>
+        <p:nvSpPr>
+          <p:cNvPr id="20" name="TextBox 19"/>
+          <p:cNvSpPr txBox="1"/>
+          <p:nvPr/>
+        </p:nvSpPr>
+        <p:spPr>
+          <a:xfrm>
+            <a:off x="7261707" y="2331720"/>
+            <a:ext cx="1783080" cy="502920"/>
+          </a:xfrm>
+          <a:prstGeom prst="rect">
+            <a:avLst/>
+          </a:prstGeom>
+          <a:noFill/>
+        </p:spPr>
+        <p:txBody>
+          <a:bodyPr wrap="square">
+            <a:spAutoFit/>
+          </a:bodyPr>
+          <a:lstStyle/>
+          <a:p>
+            <a:pPr algn="ctr"/>
+            <a:r>
+              <a:rPr sz="2600" b="0">
+                <a:solidFill>
+                  <a:srgbClr val="2B8CFF"/>
+                </a:solidFill>
+                <a:latin typeface="Segoe UI"/>
+              </a:rPr>
+              <a:t>📡</a:t>
+            </a:r>
+          </a:p>
+        </p:txBody>
+      </p:sp>
+      <p:sp>
+        <p:nvSpPr>
+          <p:cNvPr id="21" name="TextBox 20"/>
+          <p:cNvSpPr txBox="1"/>
+          <p:nvPr/>
+        </p:nvSpPr>
+        <p:spPr>
+          <a:xfrm>
+            <a:off x="7353147" y="2926080"/>
+            <a:ext cx="1600200" cy="502920"/>
+          </a:xfrm>
+          <a:prstGeom prst="rect">
+            <a:avLst/>
+          </a:prstGeom>
+          <a:noFill/>
+        </p:spPr>
+        <p:txBody>
+          <a:bodyPr wrap="square">
+            <a:spAutoFit/>
+          </a:bodyPr>
+          <a:lstStyle/>
+          <a:p>
+            <a:pPr algn="ctr"/>
+            <a:r>
+              <a:rPr sz="1250" b="1">
+                <a:solidFill>
+                  <a:srgbClr val="EAF1FA"/>
+                </a:solidFill>
+                <a:latin typeface="Segoe UI"/>
+              </a:rPr>
+              <a:t>Live Telemetry</a:t>
+            </a:r>
+          </a:p>
+        </p:txBody>
+      </p:sp>
+      <p:sp>
+        <p:nvSpPr>
+          <p:cNvPr id="22" name="TextBox 21"/>
+          <p:cNvSpPr txBox="1"/>
+          <p:nvPr/>
+        </p:nvSpPr>
+        <p:spPr>
+          <a:xfrm>
+            <a:off x="7353147" y="3383280"/>
+            <a:ext cx="1600200" cy="411480"/>
+          </a:xfrm>
+          <a:prstGeom prst="rect">
+            <a:avLst/>
+          </a:prstGeom>
+          <a:noFill/>
+        </p:spPr>
+        <p:txBody>
+          <a:bodyPr wrap="square">
+            <a:spAutoFit/>
+          </a:bodyPr>
+          <a:lstStyle/>
+          <a:p>
+            <a:pPr algn="ctr"/>
+            <a:r>
+              <a:rPr sz="1050" b="0">
+                <a:solidFill>
+                  <a:srgbClr val="93A9C2"/>
+                </a:solidFill>
+                <a:latin typeface="Segoe UI"/>
+              </a:rPr>
+              <a:t>ETA, waypoint, trailing route</a:t>
+            </a:r>
+          </a:p>
+        </p:txBody>
+      </p:sp>
+      <p:sp>
+        <p:nvSpPr>
+          <p:cNvPr id="23" name="Right Arrow 22"/>
+          <p:cNvSpPr/>
+          <p:nvPr/>
+        </p:nvSpPr>
+        <p:spPr>
+          <a:xfrm>
+            <a:off x="9044787" y="2948940"/>
+            <a:ext cx="274320" cy="182880"/>
+          </a:xfrm>
+          <a:prstGeom prst="rightArrow">
+            <a:avLst/>
+          </a:prstGeom>
+          <a:solidFill>
+            <a:srgbClr val="25D8F0"/>
+          </a:solidFill>
+          <a:ln>
+            <a:noFill/>
+          </a:ln>
+          <a:effectLst/>
+        </p:spPr>
+        <p:style>
+          <a:lnRef idx="1">
+            <a:schemeClr val="accent1"/>
+          </a:lnRef>
+          <a:fillRef idx="3">
+            <a:schemeClr val="accent1"/>
+          </a:fillRef>
+          <a:effectRef idx="2">
+            <a:schemeClr val="accent1"/>
+          </a:effectRef>
+          <a:fontRef idx="minor">
+            <a:schemeClr val="lt1"/>
+          </a:fontRef>
+        </p:style>
+        <p:txBody>
+          <a:bodyPr rtlCol="0" anchor="ctr"/>
+          <a:lstStyle/>
+          <a:p>
+            <a:pPr algn="ctr"/>
+          </a:p>
+        </p:txBody>
+      </p:sp>
+      <p:sp>
+        <p:nvSpPr>
+          <p:cNvPr id="24" name="Rounded Rectangle 23"/>
+          <p:cNvSpPr/>
+          <p:nvPr/>
+        </p:nvSpPr>
+        <p:spPr>
+          <a:xfrm>
+            <a:off x="9319107" y="2194560"/>
+            <a:ext cx="1783080" cy="1691640"/>
           </a:xfrm>
           <a:prstGeom prst="roundRect">
             <a:avLst/>
@@ -3926,85 +4406,294 @@
       </p:sp>
       <p:sp>
         <p:nvSpPr>
-          <p:cNvPr id="12" name="TextBox 11"/>
-          <p:cNvSpPr txBox="1"/>
-          <p:nvPr/>
-        </p:nvSpPr>
-        <p:spPr>
-          <a:xfrm>
-            <a:off x="1188720" y="4846320"/>
-            <a:ext cx="9829800" cy="457200"/>
-          </a:xfrm>
-          <a:prstGeom prst="rect">
-            <a:avLst/>
-          </a:prstGeom>
-          <a:noFill/>
-        </p:spPr>
-        <p:txBody>
-          <a:bodyPr wrap="square" anchor="t">
-            <a:spAutoFit/>
-          </a:bodyPr>
-          <a:lstStyle/>
-          <a:p>
-            <a:pPr algn="ctr">
-              <a:lnSpc>
-                <a:spcPct val="105000"/>
-              </a:lnSpc>
-            </a:pPr>
-            <a:r>
-              <a:rPr sz="1700" b="1" i="0">
+          <p:cNvPr id="25" name="TextBox 24"/>
+          <p:cNvSpPr txBox="1"/>
+          <p:nvPr/>
+        </p:nvSpPr>
+        <p:spPr>
+          <a:xfrm>
+            <a:off x="9319107" y="2331720"/>
+            <a:ext cx="1783080" cy="502920"/>
+          </a:xfrm>
+          <a:prstGeom prst="rect">
+            <a:avLst/>
+          </a:prstGeom>
+          <a:noFill/>
+        </p:spPr>
+        <p:txBody>
+          <a:bodyPr wrap="square">
+            <a:spAutoFit/>
+          </a:bodyPr>
+          <a:lstStyle/>
+          <a:p>
+            <a:pPr algn="ctr"/>
+            <a:r>
+              <a:rPr sz="2600" b="0">
                 <a:solidFill>
                   <a:srgbClr val="25D8F0"/>
                 </a:solidFill>
                 <a:latin typeface="Segoe UI"/>
               </a:rPr>
-              <a:t>Process at the edge · send only metadata · run on ordinary Intel hardware</a:t>
-            </a:r>
-          </a:p>
-        </p:txBody>
-      </p:sp>
-      <p:sp>
-        <p:nvSpPr>
-          <p:cNvPr id="13" name="TextBox 12"/>
-          <p:cNvSpPr txBox="1"/>
-          <p:nvPr/>
-        </p:nvSpPr>
-        <p:spPr>
-          <a:xfrm>
-            <a:off x="1188720" y="5394960"/>
-            <a:ext cx="9829800" cy="457200"/>
-          </a:xfrm>
-          <a:prstGeom prst="rect">
-            <a:avLst/>
-          </a:prstGeom>
-          <a:noFill/>
-        </p:spPr>
-        <p:txBody>
-          <a:bodyPr wrap="square" anchor="t">
-            <a:spAutoFit/>
-          </a:bodyPr>
-          <a:lstStyle/>
-          <a:p>
-            <a:pPr algn="ctr">
-              <a:lnSpc>
-                <a:spcPct val="105000"/>
-              </a:lnSpc>
-            </a:pPr>
-            <a:r>
-              <a:rPr sz="1300" b="0" i="0">
+              <a:t>🎯</a:t>
+            </a:r>
+          </a:p>
+        </p:txBody>
+      </p:sp>
+      <p:sp>
+        <p:nvSpPr>
+          <p:cNvPr id="26" name="TextBox 25"/>
+          <p:cNvSpPr txBox="1"/>
+          <p:nvPr/>
+        </p:nvSpPr>
+        <p:spPr>
+          <a:xfrm>
+            <a:off x="9410547" y="2926080"/>
+            <a:ext cx="1600200" cy="502920"/>
+          </a:xfrm>
+          <a:prstGeom prst="rect">
+            <a:avLst/>
+          </a:prstGeom>
+          <a:noFill/>
+        </p:spPr>
+        <p:txBody>
+          <a:bodyPr wrap="square">
+            <a:spAutoFit/>
+          </a:bodyPr>
+          <a:lstStyle/>
+          <a:p>
+            <a:pPr algn="ctr"/>
+            <a:r>
+              <a:rPr sz="1250" b="1">
+                <a:solidFill>
+                  <a:srgbClr val="EAF1FA"/>
+                </a:solidFill>
+                <a:latin typeface="Segoe UI"/>
+              </a:rPr>
+              <a:t>Interception Point</a:t>
+            </a:r>
+          </a:p>
+        </p:txBody>
+      </p:sp>
+      <p:sp>
+        <p:nvSpPr>
+          <p:cNvPr id="27" name="TextBox 26"/>
+          <p:cNvSpPr txBox="1"/>
+          <p:nvPr/>
+        </p:nvSpPr>
+        <p:spPr>
+          <a:xfrm>
+            <a:off x="9410547" y="3383280"/>
+            <a:ext cx="1600200" cy="411480"/>
+          </a:xfrm>
+          <a:prstGeom prst="rect">
+            <a:avLst/>
+          </a:prstGeom>
+          <a:noFill/>
+        </p:spPr>
+        <p:txBody>
+          <a:bodyPr wrap="square">
+            <a:spAutoFit/>
+          </a:bodyPr>
+          <a:lstStyle/>
+          <a:p>
+            <a:pPr algn="ctr"/>
+            <a:r>
+              <a:rPr sz="1050" b="0">
                 <a:solidFill>
                   <a:srgbClr val="93A9C2"/>
                 </a:solidFill>
                 <a:latin typeface="Segoe UI"/>
               </a:rPr>
-              <a:t>15–50× lower bandwidth · central storage cut from petabytes to a fraction · no GPU required</a:t>
-            </a:r>
-          </a:p>
-        </p:txBody>
-      </p:sp>
-      <p:sp>
-        <p:nvSpPr>
-          <p:cNvPr id="14" name="TextBox 13"/>
+              <a:t>Ground units guided in</a:t>
+            </a:r>
+          </a:p>
+        </p:txBody>
+      </p:sp>
+      <p:sp>
+        <p:nvSpPr>
+          <p:cNvPr id="28" name="Rounded Rectangle 27"/>
+          <p:cNvSpPr/>
+          <p:nvPr/>
+        </p:nvSpPr>
+        <p:spPr>
+          <a:xfrm>
+            <a:off x="868680" y="4206240"/>
+            <a:ext cx="10424160" cy="1005840"/>
+          </a:xfrm>
+          <a:prstGeom prst="roundRect">
+            <a:avLst/>
+          </a:prstGeom>
+          <a:solidFill>
+            <a:srgbClr val="182C4C"/>
+          </a:solidFill>
+          <a:ln w="12700">
+            <a:solidFill>
+              <a:srgbClr val="2B8CFF"/>
+            </a:solidFill>
+          </a:ln>
+          <a:effectLst/>
+        </p:spPr>
+        <p:style>
+          <a:lnRef idx="1">
+            <a:schemeClr val="accent1"/>
+          </a:lnRef>
+          <a:fillRef idx="3">
+            <a:schemeClr val="accent1"/>
+          </a:fillRef>
+          <a:effectRef idx="2">
+            <a:schemeClr val="accent1"/>
+          </a:effectRef>
+          <a:fontRef idx="minor">
+            <a:schemeClr val="lt1"/>
+          </a:fontRef>
+        </p:style>
+        <p:txBody>
+          <a:bodyPr rtlCol="0" anchor="ctr"/>
+          <a:lstStyle/>
+          <a:p>
+            <a:pPr algn="ctr"/>
+          </a:p>
+        </p:txBody>
+      </p:sp>
+      <p:sp>
+        <p:nvSpPr>
+          <p:cNvPr id="29" name="TextBox 28"/>
+          <p:cNvSpPr txBox="1"/>
+          <p:nvPr/>
+        </p:nvSpPr>
+        <p:spPr>
+          <a:xfrm>
+            <a:off x="1143000" y="4343400"/>
+            <a:ext cx="9875520" cy="731520"/>
+          </a:xfrm>
+          <a:prstGeom prst="rect">
+            <a:avLst/>
+          </a:prstGeom>
+          <a:noFill/>
+        </p:spPr>
+        <p:txBody>
+          <a:bodyPr wrap="square">
+            <a:spAutoFit/>
+          </a:bodyPr>
+          <a:lstStyle/>
+          <a:p>
+            <a:pPr>
+              <a:spcAft>
+                <a:spcPts val="1000"/>
+              </a:spcAft>
+            </a:pPr>
+            <a:r>
+              <a:rPr sz="1350">
+                <a:solidFill>
+                  <a:srgbClr val="EAF1FA"/>
+                </a:solidFill>
+                <a:latin typeface="Segoe UI"/>
+              </a:rPr>
+              <a:t>•  Animated flight path with a live trailing route and a status panel (next waypoint, ETA, one-click recall)</a:t>
+            </a:r>
+          </a:p>
+          <a:p>
+            <a:pPr>
+              <a:spcAft>
+                <a:spcPts val="1000"/>
+              </a:spcAft>
+            </a:pPr>
+            <a:r>
+              <a:rPr sz="1350">
+                <a:solidFill>
+                  <a:srgbClr val="EAF1FA"/>
+                </a:solidFill>
+                <a:latin typeface="Segoe UI"/>
+              </a:rPr>
+              <a:t>•  Fully simulated today on the same map used for ANPR and face alerts — integration-ready for real hardware via MAVLink / DJI SDK</a:t>
+            </a:r>
+          </a:p>
+        </p:txBody>
+      </p:sp>
+      <p:sp>
+        <p:nvSpPr>
+          <p:cNvPr id="30" name="Rounded Rectangle 29"/>
+          <p:cNvSpPr/>
+          <p:nvPr/>
+        </p:nvSpPr>
+        <p:spPr>
+          <a:xfrm>
+            <a:off x="868680" y="5440680"/>
+            <a:ext cx="10424160" cy="365760"/>
+          </a:xfrm>
+          <a:prstGeom prst="roundRect">
+            <a:avLst/>
+          </a:prstGeom>
+          <a:solidFill>
+            <a:srgbClr val="182C4C"/>
+          </a:solidFill>
+          <a:ln w="12700">
+            <a:solidFill>
+              <a:srgbClr val="F5B638"/>
+            </a:solidFill>
+          </a:ln>
+          <a:effectLst/>
+        </p:spPr>
+        <p:style>
+          <a:lnRef idx="1">
+            <a:schemeClr val="accent1"/>
+          </a:lnRef>
+          <a:fillRef idx="3">
+            <a:schemeClr val="accent1"/>
+          </a:fillRef>
+          <a:effectRef idx="2">
+            <a:schemeClr val="accent1"/>
+          </a:effectRef>
+          <a:fontRef idx="minor">
+            <a:schemeClr val="lt1"/>
+          </a:fontRef>
+        </p:style>
+        <p:txBody>
+          <a:bodyPr rtlCol="0" anchor="ctr"/>
+          <a:lstStyle/>
+          <a:p>
+            <a:pPr algn="ctr"/>
+          </a:p>
+        </p:txBody>
+      </p:sp>
+      <p:sp>
+        <p:nvSpPr>
+          <p:cNvPr id="31" name="TextBox 30"/>
+          <p:cNvSpPr txBox="1"/>
+          <p:nvPr/>
+        </p:nvSpPr>
+        <p:spPr>
+          <a:xfrm>
+            <a:off x="868680" y="5440680"/>
+            <a:ext cx="10424160" cy="365760"/>
+          </a:xfrm>
+          <a:prstGeom prst="rect">
+            <a:avLst/>
+          </a:prstGeom>
+          <a:noFill/>
+        </p:spPr>
+        <p:txBody>
+          <a:bodyPr wrap="square">
+            <a:spAutoFit/>
+          </a:bodyPr>
+          <a:lstStyle/>
+          <a:p>
+            <a:pPr algn="ctr"/>
+            <a:r>
+              <a:rPr sz="1300" b="1">
+                <a:solidFill>
+                  <a:srgbClr val="F5B638"/>
+                </a:solidFill>
+                <a:latin typeface="Segoe UI"/>
+              </a:rPr>
+              <a:t>★  Same pipeline, faster response: detect → predict → dispatch → intercept, in seconds.</a:t>
+            </a:r>
+          </a:p>
+        </p:txBody>
+      </p:sp>
+      <p:sp>
+        <p:nvSpPr>
+          <p:cNvPr id="32" name="TextBox 31"/>
           <p:cNvSpPr txBox="1"/>
           <p:nvPr/>
         </p:nvSpPr>
@@ -4019,18 +4708,14 @@
           <a:noFill/>
         </p:spPr>
         <p:txBody>
-          <a:bodyPr wrap="square" anchor="t">
-            <a:spAutoFit/>
-          </a:bodyPr>
-          <a:lstStyle/>
-          <a:p>
-            <a:pPr algn="l">
-              <a:lnSpc>
-                <a:spcPct val="105000"/>
-              </a:lnSpc>
-            </a:pPr>
-            <a:r>
-              <a:rPr sz="1000" b="0" i="0">
+          <a:bodyPr wrap="square">
+            <a:spAutoFit/>
+          </a:bodyPr>
+          <a:lstStyle/>
+          <a:p>
+            <a:pPr algn="l"/>
+            <a:r>
+              <a:rPr sz="1000" b="0">
                 <a:solidFill>
                   <a:srgbClr val="93A9C2"/>
                 </a:solidFill>
@@ -4043,7 +4728,7 @@
       </p:sp>
       <p:sp>
         <p:nvSpPr>
-          <p:cNvPr id="15" name="TextBox 14"/>
+          <p:cNvPr id="33" name="TextBox 32"/>
           <p:cNvSpPr txBox="1"/>
           <p:nvPr/>
         </p:nvSpPr>
@@ -4058,24 +4743,20 @@
           <a:noFill/>
         </p:spPr>
         <p:txBody>
-          <a:bodyPr wrap="square" anchor="t">
-            <a:spAutoFit/>
-          </a:bodyPr>
-          <a:lstStyle/>
-          <a:p>
-            <a:pPr algn="r">
-              <a:lnSpc>
-                <a:spcPct val="105000"/>
-              </a:lnSpc>
-            </a:pPr>
-            <a:r>
-              <a:rPr sz="1000" b="0" i="0">
+          <a:bodyPr wrap="square">
+            <a:spAutoFit/>
+          </a:bodyPr>
+          <a:lstStyle/>
+          <a:p>
+            <a:pPr algn="r"/>
+            <a:r>
+              <a:rPr sz="1000" b="0">
                 <a:solidFill>
                   <a:srgbClr val="93A9C2"/>
                 </a:solidFill>
                 <a:latin typeface="Segoe UI"/>
               </a:rPr>
-              <a:t>12</a:t>
+              <a:t>10</a:t>
             </a:r>
           </a:p>
         </p:txBody>
@@ -4085,9 +4766,6 @@
   <p:clrMapOvr>
     <a:masterClrMapping/>
   </p:clrMapOvr>
-  <p:transition xmlns:p14="http://schemas.microsoft.com/office/powerpoint/2010/main" spd="med" p14:dur="900">
-    <p:fade/>
-  </p:transition>
 </p:sld>
 </file>
 
@@ -4126,24 +4804,20 @@
           <a:noFill/>
         </p:spPr>
         <p:txBody>
-          <a:bodyPr wrap="square" anchor="t">
-            <a:spAutoFit/>
-          </a:bodyPr>
-          <a:lstStyle/>
-          <a:p>
-            <a:pPr algn="l">
-              <a:lnSpc>
-                <a:spcPct val="105000"/>
-              </a:lnSpc>
-            </a:pPr>
-            <a:r>
-              <a:rPr sz="1300" b="1" i="0">
+          <a:bodyPr wrap="square">
+            <a:spAutoFit/>
+          </a:bodyPr>
+          <a:lstStyle/>
+          <a:p>
+            <a:pPr algn="l"/>
+            <a:r>
+              <a:rPr sz="1300" b="1">
                 <a:solidFill>
                   <a:srgbClr val="25D8F0"/>
                 </a:solidFill>
                 <a:latin typeface="Segoe UI"/>
               </a:rPr>
-              <a:t>COST &amp; IMPACT</a:t>
+              <a:t>PRODUCT IN ACTION</a:t>
             </a:r>
           </a:p>
         </p:txBody>
@@ -4165,48 +4839,42 @@
           <a:noFill/>
         </p:spPr>
         <p:txBody>
-          <a:bodyPr wrap="square" anchor="t">
-            <a:spAutoFit/>
-          </a:bodyPr>
-          <a:lstStyle/>
-          <a:p>
-            <a:pPr algn="l">
-              <a:lnSpc>
-                <a:spcPct val="105000"/>
-              </a:lnSpc>
-            </a:pPr>
-            <a:r>
-              <a:rPr sz="2800" b="1" i="0">
+          <a:bodyPr wrap="square">
+            <a:spAutoFit/>
+          </a:bodyPr>
+          <a:lstStyle/>
+          <a:p>
+            <a:pPr algn="l"/>
+            <a:r>
+              <a:rPr sz="2600" b="1">
                 <a:solidFill>
                   <a:srgbClr val="EAF1FA"/>
                 </a:solidFill>
                 <a:latin typeface="Segoe UI"/>
               </a:rPr>
-              <a:t>Measurable benefits at state scale</a:t>
-            </a:r>
-          </a:p>
-        </p:txBody>
-      </p:sp>
-      <p:sp>
-        <p:nvSpPr>
-          <p:cNvPr id="4" name="Rounded Rectangle 3"/>
+              <a:t>Real screens, real detections — captured from the running system</a:t>
+            </a:r>
+          </a:p>
+        </p:txBody>
+      </p:sp>
+      <p:sp>
+        <p:nvSpPr>
+          <p:cNvPr id="4" name="Rectangle 3"/>
           <p:cNvSpPr/>
           <p:nvPr/>
         </p:nvSpPr>
         <p:spPr>
           <a:xfrm>
-            <a:off x="1097280" y="1965960"/>
-            <a:ext cx="4480560" cy="1828800"/>
-          </a:xfrm>
-          <a:prstGeom prst="roundRect">
-            <a:avLst/>
-          </a:prstGeom>
-          <a:solidFill>
-            <a:srgbClr val="14223A"/>
-          </a:solidFill>
+            <a:off x="1261888" y="1628328"/>
+            <a:ext cx="4754864" cy="3579864"/>
+          </a:xfrm>
+          <a:prstGeom prst="rect">
+            <a:avLst/>
+          </a:prstGeom>
+          <a:noFill/>
           <a:ln w="12700">
             <a:solidFill>
-              <a:srgbClr val="FF3B5C"/>
+              <a:srgbClr val="182C4C"/>
             </a:solidFill>
           </a:ln>
           <a:effectLst/>
@@ -4235,101 +4903,23 @@
       </p:sp>
       <p:sp>
         <p:nvSpPr>
-          <p:cNvPr id="5" name="TextBox 4"/>
-          <p:cNvSpPr txBox="1"/>
-          <p:nvPr/>
-        </p:nvSpPr>
-        <p:spPr>
-          <a:xfrm>
-            <a:off x="1097280" y="2240280"/>
-            <a:ext cx="4480560" cy="822960"/>
-          </a:xfrm>
-          <a:prstGeom prst="rect">
-            <a:avLst/>
-          </a:prstGeom>
-          <a:noFill/>
-        </p:spPr>
-        <p:txBody>
-          <a:bodyPr wrap="square" anchor="t">
-            <a:spAutoFit/>
-          </a:bodyPr>
-          <a:lstStyle/>
-          <a:p>
-            <a:pPr algn="ctr">
-              <a:lnSpc>
-                <a:spcPct val="105000"/>
-              </a:lnSpc>
-            </a:pPr>
-            <a:r>
-              <a:rPr sz="4200" b="1" i="0">
-                <a:solidFill>
-                  <a:srgbClr val="FF3B5C"/>
-                </a:solidFill>
-                <a:latin typeface="Segoe UI"/>
-              </a:rPr>
-              <a:t>₹120 Cr / yr</a:t>
-            </a:r>
-          </a:p>
-        </p:txBody>
-      </p:sp>
-      <p:sp>
-        <p:nvSpPr>
-          <p:cNvPr id="6" name="TextBox 5"/>
-          <p:cNvSpPr txBox="1"/>
-          <p:nvPr/>
-        </p:nvSpPr>
-        <p:spPr>
-          <a:xfrm>
-            <a:off x="1097280" y="3063240"/>
-            <a:ext cx="4480560" cy="548640"/>
-          </a:xfrm>
-          <a:prstGeom prst="rect">
-            <a:avLst/>
-          </a:prstGeom>
-          <a:noFill/>
-        </p:spPr>
-        <p:txBody>
-          <a:bodyPr wrap="square" anchor="t">
-            <a:spAutoFit/>
-          </a:bodyPr>
-          <a:lstStyle/>
-          <a:p>
-            <a:pPr algn="ctr">
-              <a:lnSpc>
-                <a:spcPct val="105000"/>
-              </a:lnSpc>
-            </a:pPr>
-            <a:r>
-              <a:rPr sz="1300" b="0" i="0">
-                <a:solidFill>
-                  <a:srgbClr val="93A9C2"/>
-                </a:solidFill>
-                <a:latin typeface="Segoe UI"/>
-              </a:rPr>
-              <a:t>Commercial per-camera licensing (indicative)</a:t>
-            </a:r>
-          </a:p>
-        </p:txBody>
-      </p:sp>
-      <p:sp>
-        <p:nvSpPr>
-          <p:cNvPr id="7" name="Right Arrow 6"/>
+          <p:cNvPr id="5" name="Rectangle 4"/>
           <p:cNvSpPr/>
           <p:nvPr/>
         </p:nvSpPr>
         <p:spPr>
           <a:xfrm>
-            <a:off x="5715000" y="2606040"/>
-            <a:ext cx="777240" cy="457200"/>
-          </a:xfrm>
-          <a:prstGeom prst="rightArrow">
-            <a:avLst/>
-          </a:prstGeom>
-          <a:solidFill>
-            <a:srgbClr val="25D8F0"/>
-          </a:solidFill>
-          <a:ln>
-            <a:noFill/>
+            <a:off x="6144768" y="1628328"/>
+            <a:ext cx="4754864" cy="3579864"/>
+          </a:xfrm>
+          <a:prstGeom prst="rect">
+            <a:avLst/>
+          </a:prstGeom>
+          <a:noFill/>
+          <a:ln w="12700">
+            <a:solidFill>
+              <a:srgbClr val="182C4C"/>
+            </a:solidFill>
           </a:ln>
           <a:effectLst/>
         </p:spPr>
@@ -4355,22 +4945,140 @@
           </a:p>
         </p:txBody>
       </p:sp>
-      <p:sp>
-        <p:nvSpPr>
-          <p:cNvPr id="8" name="Rounded Rectangle 7"/>
+      <p:pic>
+        <p:nvPicPr>
+          <p:cNvPr id="6" name="Picture 5" descr="gis_route_crop.png"/>
+          <p:cNvPicPr>
+            <a:picLocks noChangeAspect="1"/>
+          </p:cNvPicPr>
+          <p:nvPr/>
+        </p:nvPicPr>
+        <p:blipFill>
+          <a:blip r:embed="rId2"/>
+          <a:stretch>
+            <a:fillRect/>
+          </a:stretch>
+        </p:blipFill>
+        <p:spPr>
+          <a:xfrm>
+            <a:off x="1289320" y="1655760"/>
+            <a:ext cx="4700000" cy="3525000"/>
+          </a:xfrm>
+          <a:prstGeom prst="rect">
+            <a:avLst/>
+          </a:prstGeom>
+        </p:spPr>
+      </p:pic>
+      <p:pic>
+        <p:nvPicPr>
+          <p:cNvPr id="7" name="Picture 6" descr="predict_drone_crop.png"/>
+          <p:cNvPicPr>
+            <a:picLocks noChangeAspect="1"/>
+          </p:cNvPicPr>
+          <p:nvPr/>
+        </p:nvPicPr>
+        <p:blipFill>
+          <a:blip r:embed="rId3"/>
+          <a:stretch>
+            <a:fillRect/>
+          </a:stretch>
+        </p:blipFill>
+        <p:spPr>
+          <a:xfrm>
+            <a:off x="6172200" y="1655760"/>
+            <a:ext cx="4700000" cy="3525000"/>
+          </a:xfrm>
+          <a:prstGeom prst="rect">
+            <a:avLst/>
+          </a:prstGeom>
+        </p:spPr>
+      </p:pic>
+      <p:sp>
+        <p:nvSpPr>
+          <p:cNvPr id="8" name="TextBox 7"/>
+          <p:cNvSpPr txBox="1"/>
+          <p:nvPr/>
+        </p:nvSpPr>
+        <p:spPr>
+          <a:xfrm>
+            <a:off x="1289320" y="5272200"/>
+            <a:ext cx="4700000" cy="365760"/>
+          </a:xfrm>
+          <a:prstGeom prst="rect">
+            <a:avLst/>
+          </a:prstGeom>
+          <a:noFill/>
+        </p:spPr>
+        <p:txBody>
+          <a:bodyPr wrap="square">
+            <a:spAutoFit/>
+          </a:bodyPr>
+          <a:lstStyle/>
+          <a:p>
+            <a:pPr algn="ctr"/>
+            <a:r>
+              <a:rPr sz="1300" b="1">
+                <a:solidFill>
+                  <a:srgbClr val="25D8F0"/>
+                </a:solidFill>
+                <a:latin typeface="Segoe UI"/>
+              </a:rPr>
+              <a:t>Cross-camera alert + automatic route reconstruction</a:t>
+            </a:r>
+          </a:p>
+        </p:txBody>
+      </p:sp>
+      <p:sp>
+        <p:nvSpPr>
+          <p:cNvPr id="9" name="TextBox 8"/>
+          <p:cNvSpPr txBox="1"/>
+          <p:nvPr/>
+        </p:nvSpPr>
+        <p:spPr>
+          <a:xfrm>
+            <a:off x="6172200" y="5272200"/>
+            <a:ext cx="4700000" cy="365760"/>
+          </a:xfrm>
+          <a:prstGeom prst="rect">
+            <a:avLst/>
+          </a:prstGeom>
+          <a:noFill/>
+        </p:spPr>
+        <p:txBody>
+          <a:bodyPr wrap="square">
+            <a:spAutoFit/>
+          </a:bodyPr>
+          <a:lstStyle/>
+          <a:p>
+            <a:pPr algn="ctr"/>
+            <a:r>
+              <a:rPr sz="1300" b="1">
+                <a:solidFill>
+                  <a:srgbClr val="25D8F0"/>
+                </a:solidFill>
+                <a:latin typeface="Segoe UI"/>
+              </a:rPr>
+              <a:t>Predictive next-camera + one-click drone dispatch</a:t>
+            </a:r>
+          </a:p>
+        </p:txBody>
+      </p:sp>
+      <p:sp>
+        <p:nvSpPr>
+          <p:cNvPr id="10" name="Rounded Rectangle 9"/>
           <p:cNvSpPr/>
           <p:nvPr/>
         </p:nvSpPr>
         <p:spPr>
           <a:xfrm>
-            <a:off x="6629400" y="1965960"/>
-            <a:ext cx="4480560" cy="1828800"/>
+            <a:off x="868680" y="5775120"/>
+            <a:ext cx="10424160" cy="548640"/>
           </a:xfrm>
           <a:prstGeom prst="roundRect">
             <a:avLst/>
           </a:prstGeom>
           <a:solidFill>
-            <a:srgbClr val="14223A"/>
+            <a:srgbClr val="182C4C"/>
           </a:solidFill>
           <a:ln w="12700">
             <a:solidFill>
@@ -4403,505 +5111,42 @@
       </p:sp>
       <p:sp>
         <p:nvSpPr>
-          <p:cNvPr id="9" name="TextBox 8"/>
-          <p:cNvSpPr txBox="1"/>
-          <p:nvPr/>
-        </p:nvSpPr>
-        <p:spPr>
-          <a:xfrm>
-            <a:off x="6629400" y="2240280"/>
-            <a:ext cx="4480560" cy="822960"/>
-          </a:xfrm>
-          <a:prstGeom prst="rect">
-            <a:avLst/>
-          </a:prstGeom>
-          <a:noFill/>
-        </p:spPr>
-        <p:txBody>
-          <a:bodyPr wrap="square" anchor="t">
-            <a:spAutoFit/>
-          </a:bodyPr>
-          <a:lstStyle/>
-          <a:p>
-            <a:pPr algn="ctr">
-              <a:lnSpc>
-                <a:spcPct val="105000"/>
-              </a:lnSpc>
-            </a:pPr>
-            <a:r>
-              <a:rPr sz="4200" b="1" i="0">
+          <p:cNvPr id="11" name="TextBox 10"/>
+          <p:cNvSpPr txBox="1"/>
+          <p:nvPr/>
+        </p:nvSpPr>
+        <p:spPr>
+          <a:xfrm>
+            <a:off x="868680" y="5775120"/>
+            <a:ext cx="10424160" cy="548640"/>
+          </a:xfrm>
+          <a:prstGeom prst="rect">
+            <a:avLst/>
+          </a:prstGeom>
+          <a:noFill/>
+        </p:spPr>
+        <p:txBody>
+          <a:bodyPr wrap="square">
+            <a:spAutoFit/>
+          </a:bodyPr>
+          <a:lstStyle/>
+          <a:p>
+            <a:pPr algn="ctr"/>
+            <a:r>
+              <a:rPr sz="1300" b="1">
                 <a:solidFill>
                   <a:srgbClr val="2AD477"/>
                 </a:solidFill>
                 <a:latin typeface="Segoe UI"/>
               </a:rPr>
-              <a:t>₹0</a:t>
-            </a:r>
-          </a:p>
-        </p:txBody>
-      </p:sp>
-      <p:sp>
-        <p:nvSpPr>
-          <p:cNvPr id="10" name="TextBox 9"/>
-          <p:cNvSpPr txBox="1"/>
-          <p:nvPr/>
-        </p:nvSpPr>
-        <p:spPr>
-          <a:xfrm>
-            <a:off x="6629400" y="3063240"/>
-            <a:ext cx="4480560" cy="548640"/>
-          </a:xfrm>
-          <a:prstGeom prst="rect">
-            <a:avLst/>
-          </a:prstGeom>
-          <a:noFill/>
-        </p:spPr>
-        <p:txBody>
-          <a:bodyPr wrap="square" anchor="t">
-            <a:spAutoFit/>
-          </a:bodyPr>
-          <a:lstStyle/>
-          <a:p>
-            <a:pPr algn="ctr">
-              <a:lnSpc>
-                <a:spcPct val="105000"/>
-              </a:lnSpc>
-            </a:pPr>
-            <a:r>
-              <a:rPr sz="1300" b="0" i="0">
-                <a:solidFill>
-                  <a:srgbClr val="93A9C2"/>
-                </a:solidFill>
-                <a:latin typeface="Segoe UI"/>
-              </a:rPr>
-              <a:t>Sentinel licensing — open-source</a:t>
-            </a:r>
-          </a:p>
-        </p:txBody>
-      </p:sp>
-      <p:sp>
-        <p:nvSpPr>
-          <p:cNvPr id="11" name="Rounded Rectangle 10"/>
-          <p:cNvSpPr/>
-          <p:nvPr/>
-        </p:nvSpPr>
-        <p:spPr>
-          <a:xfrm>
-            <a:off x="1097280" y="4069080"/>
-            <a:ext cx="3200400" cy="1828800"/>
-          </a:xfrm>
-          <a:prstGeom prst="roundRect">
-            <a:avLst/>
-          </a:prstGeom>
-          <a:solidFill>
-            <a:srgbClr val="14223A"/>
-          </a:solidFill>
-          <a:ln w="12700">
-            <a:solidFill>
-              <a:srgbClr val="182C4C"/>
-            </a:solidFill>
-          </a:ln>
-          <a:effectLst/>
-        </p:spPr>
-        <p:style>
-          <a:lnRef idx="1">
-            <a:schemeClr val="accent1"/>
-          </a:lnRef>
-          <a:fillRef idx="3">
-            <a:schemeClr val="accent1"/>
-          </a:fillRef>
-          <a:effectRef idx="2">
-            <a:schemeClr val="accent1"/>
-          </a:effectRef>
-          <a:fontRef idx="minor">
-            <a:schemeClr val="lt1"/>
-          </a:fontRef>
-        </p:style>
-        <p:txBody>
-          <a:bodyPr rtlCol="0" anchor="ctr"/>
-          <a:lstStyle/>
-          <a:p>
-            <a:pPr algn="ctr"/>
+              <a:t>Also live on the same dashboard: natural-language video search across every camera, and a full camera registry with live health status.</a:t>
+            </a:r>
           </a:p>
         </p:txBody>
       </p:sp>
       <p:sp>
         <p:nvSpPr>
           <p:cNvPr id="12" name="TextBox 11"/>
-          <p:cNvSpPr txBox="1"/>
-          <p:nvPr/>
-        </p:nvSpPr>
-        <p:spPr>
-          <a:xfrm>
-            <a:off x="1097280" y="4297680"/>
-            <a:ext cx="3200400" cy="731520"/>
-          </a:xfrm>
-          <a:prstGeom prst="rect">
-            <a:avLst/>
-          </a:prstGeom>
-          <a:noFill/>
-        </p:spPr>
-        <p:txBody>
-          <a:bodyPr wrap="square" anchor="t">
-            <a:spAutoFit/>
-          </a:bodyPr>
-          <a:lstStyle/>
-          <a:p>
-            <a:pPr algn="ctr">
-              <a:lnSpc>
-                <a:spcPct val="105000"/>
-              </a:lnSpc>
-            </a:pPr>
-            <a:r>
-              <a:rPr sz="3000" b="1" i="0">
-                <a:solidFill>
-                  <a:srgbClr val="25D8F0"/>
-                </a:solidFill>
-                <a:latin typeface="Segoe UI"/>
-              </a:rPr>
-              <a:t>~1–2 sec</a:t>
-            </a:r>
-          </a:p>
-        </p:txBody>
-      </p:sp>
-      <p:sp>
-        <p:nvSpPr>
-          <p:cNvPr id="13" name="TextBox 12"/>
-          <p:cNvSpPr txBox="1"/>
-          <p:nvPr/>
-        </p:nvSpPr>
-        <p:spPr>
-          <a:xfrm>
-            <a:off x="1097280" y="5074920"/>
-            <a:ext cx="3200400" cy="731520"/>
-          </a:xfrm>
-          <a:prstGeom prst="rect">
-            <a:avLst/>
-          </a:prstGeom>
-          <a:noFill/>
-        </p:spPr>
-        <p:txBody>
-          <a:bodyPr wrap="square" anchor="t">
-            <a:spAutoFit/>
-          </a:bodyPr>
-          <a:lstStyle/>
-          <a:p>
-            <a:pPr algn="ctr">
-              <a:lnSpc>
-                <a:spcPct val="105000"/>
-              </a:lnSpc>
-            </a:pPr>
-            <a:r>
-              <a:rPr sz="1300" b="0" i="0">
-                <a:solidFill>
-                  <a:srgbClr val="93A9C2"/>
-                </a:solidFill>
-                <a:latin typeface="Segoe UI"/>
-              </a:rPr>
-              <a:t>detection-to-alert</a:t>
-            </a:r>
-          </a:p>
-          <a:p>
-            <a:pPr algn="ctr">
-              <a:lnSpc>
-                <a:spcPct val="105000"/>
-              </a:lnSpc>
-            </a:pPr>
-            <a:r>
-              <a:rPr sz="1300" b="0" i="0">
-                <a:solidFill>
-                  <a:srgbClr val="93A9C2"/>
-                </a:solidFill>
-                <a:latin typeface="Segoe UI"/>
-              </a:rPr>
-              <a:t>(vs hours of manual review)</a:t>
-            </a:r>
-          </a:p>
-        </p:txBody>
-      </p:sp>
-      <p:sp>
-        <p:nvSpPr>
-          <p:cNvPr id="14" name="Rounded Rectangle 13"/>
-          <p:cNvSpPr/>
-          <p:nvPr/>
-        </p:nvSpPr>
-        <p:spPr>
-          <a:xfrm>
-            <a:off x="4498848" y="4069080"/>
-            <a:ext cx="3200400" cy="1828800"/>
-          </a:xfrm>
-          <a:prstGeom prst="roundRect">
-            <a:avLst/>
-          </a:prstGeom>
-          <a:solidFill>
-            <a:srgbClr val="14223A"/>
-          </a:solidFill>
-          <a:ln w="12700">
-            <a:solidFill>
-              <a:srgbClr val="182C4C"/>
-            </a:solidFill>
-          </a:ln>
-          <a:effectLst/>
-        </p:spPr>
-        <p:style>
-          <a:lnRef idx="1">
-            <a:schemeClr val="accent1"/>
-          </a:lnRef>
-          <a:fillRef idx="3">
-            <a:schemeClr val="accent1"/>
-          </a:fillRef>
-          <a:effectRef idx="2">
-            <a:schemeClr val="accent1"/>
-          </a:effectRef>
-          <a:fontRef idx="minor">
-            <a:schemeClr val="lt1"/>
-          </a:fontRef>
-        </p:style>
-        <p:txBody>
-          <a:bodyPr rtlCol="0" anchor="ctr"/>
-          <a:lstStyle/>
-          <a:p>
-            <a:pPr algn="ctr"/>
-          </a:p>
-        </p:txBody>
-      </p:sp>
-      <p:sp>
-        <p:nvSpPr>
-          <p:cNvPr id="15" name="TextBox 14"/>
-          <p:cNvSpPr txBox="1"/>
-          <p:nvPr/>
-        </p:nvSpPr>
-        <p:spPr>
-          <a:xfrm>
-            <a:off x="4498848" y="4297680"/>
-            <a:ext cx="3200400" cy="731520"/>
-          </a:xfrm>
-          <a:prstGeom prst="rect">
-            <a:avLst/>
-          </a:prstGeom>
-          <a:noFill/>
-        </p:spPr>
-        <p:txBody>
-          <a:bodyPr wrap="square" anchor="t">
-            <a:spAutoFit/>
-          </a:bodyPr>
-          <a:lstStyle/>
-          <a:p>
-            <a:pPr algn="ctr">
-              <a:lnSpc>
-                <a:spcPct val="105000"/>
-              </a:lnSpc>
-            </a:pPr>
-            <a:r>
-              <a:rPr sz="3000" b="1" i="0">
-                <a:solidFill>
-                  <a:srgbClr val="25D8F0"/>
-                </a:solidFill>
-                <a:latin typeface="Segoe UI"/>
-              </a:rPr>
-              <a:t>80,000</a:t>
-            </a:r>
-          </a:p>
-        </p:txBody>
-      </p:sp>
-      <p:sp>
-        <p:nvSpPr>
-          <p:cNvPr id="16" name="TextBox 15"/>
-          <p:cNvSpPr txBox="1"/>
-          <p:nvPr/>
-        </p:nvSpPr>
-        <p:spPr>
-          <a:xfrm>
-            <a:off x="4498848" y="5074920"/>
-            <a:ext cx="3200400" cy="731520"/>
-          </a:xfrm>
-          <a:prstGeom prst="rect">
-            <a:avLst/>
-          </a:prstGeom>
-          <a:noFill/>
-        </p:spPr>
-        <p:txBody>
-          <a:bodyPr wrap="square" anchor="t">
-            <a:spAutoFit/>
-          </a:bodyPr>
-          <a:lstStyle/>
-          <a:p>
-            <a:pPr algn="ctr">
-              <a:lnSpc>
-                <a:spcPct val="105000"/>
-              </a:lnSpc>
-            </a:pPr>
-            <a:r>
-              <a:rPr sz="1300" b="0" i="0">
-                <a:solidFill>
-                  <a:srgbClr val="93A9C2"/>
-                </a:solidFill>
-                <a:latin typeface="Segoe UI"/>
-              </a:rPr>
-              <a:t>existing cameras activated</a:t>
-            </a:r>
-          </a:p>
-          <a:p>
-            <a:pPr algn="ctr">
-              <a:lnSpc>
-                <a:spcPct val="105000"/>
-              </a:lnSpc>
-            </a:pPr>
-            <a:r>
-              <a:rPr sz="1300" b="0" i="0">
-                <a:solidFill>
-                  <a:srgbClr val="93A9C2"/>
-                </a:solidFill>
-                <a:latin typeface="Segoe UI"/>
-              </a:rPr>
-              <a:t>as intelligent sensors</a:t>
-            </a:r>
-          </a:p>
-        </p:txBody>
-      </p:sp>
-      <p:sp>
-        <p:nvSpPr>
-          <p:cNvPr id="17" name="Rounded Rectangle 16"/>
-          <p:cNvSpPr/>
-          <p:nvPr/>
-        </p:nvSpPr>
-        <p:spPr>
-          <a:xfrm>
-            <a:off x="7900416" y="4069080"/>
-            <a:ext cx="3200400" cy="1828800"/>
-          </a:xfrm>
-          <a:prstGeom prst="roundRect">
-            <a:avLst/>
-          </a:prstGeom>
-          <a:solidFill>
-            <a:srgbClr val="14223A"/>
-          </a:solidFill>
-          <a:ln w="12700">
-            <a:solidFill>
-              <a:srgbClr val="182C4C"/>
-            </a:solidFill>
-          </a:ln>
-          <a:effectLst/>
-        </p:spPr>
-        <p:style>
-          <a:lnRef idx="1">
-            <a:schemeClr val="accent1"/>
-          </a:lnRef>
-          <a:fillRef idx="3">
-            <a:schemeClr val="accent1"/>
-          </a:fillRef>
-          <a:effectRef idx="2">
-            <a:schemeClr val="accent1"/>
-          </a:effectRef>
-          <a:fontRef idx="minor">
-            <a:schemeClr val="lt1"/>
-          </a:fontRef>
-        </p:style>
-        <p:txBody>
-          <a:bodyPr rtlCol="0" anchor="ctr"/>
-          <a:lstStyle/>
-          <a:p>
-            <a:pPr algn="ctr"/>
-          </a:p>
-        </p:txBody>
-      </p:sp>
-      <p:sp>
-        <p:nvSpPr>
-          <p:cNvPr id="18" name="TextBox 17"/>
-          <p:cNvSpPr txBox="1"/>
-          <p:nvPr/>
-        </p:nvSpPr>
-        <p:spPr>
-          <a:xfrm>
-            <a:off x="7900416" y="4297680"/>
-            <a:ext cx="3200400" cy="731520"/>
-          </a:xfrm>
-          <a:prstGeom prst="rect">
-            <a:avLst/>
-          </a:prstGeom>
-          <a:noFill/>
-        </p:spPr>
-        <p:txBody>
-          <a:bodyPr wrap="square" anchor="t">
-            <a:spAutoFit/>
-          </a:bodyPr>
-          <a:lstStyle/>
-          <a:p>
-            <a:pPr algn="ctr">
-              <a:lnSpc>
-                <a:spcPct val="105000"/>
-              </a:lnSpc>
-            </a:pPr>
-            <a:r>
-              <a:rPr sz="3000" b="1" i="0">
-                <a:solidFill>
-                  <a:srgbClr val="25D8F0"/>
-                </a:solidFill>
-                <a:latin typeface="Segoe UI"/>
-              </a:rPr>
-              <a:t>Zero</a:t>
-            </a:r>
-          </a:p>
-        </p:txBody>
-      </p:sp>
-      <p:sp>
-        <p:nvSpPr>
-          <p:cNvPr id="19" name="TextBox 18"/>
-          <p:cNvSpPr txBox="1"/>
-          <p:nvPr/>
-        </p:nvSpPr>
-        <p:spPr>
-          <a:xfrm>
-            <a:off x="7900416" y="5074920"/>
-            <a:ext cx="3200400" cy="731520"/>
-          </a:xfrm>
-          <a:prstGeom prst="rect">
-            <a:avLst/>
-          </a:prstGeom>
-          <a:noFill/>
-        </p:spPr>
-        <p:txBody>
-          <a:bodyPr wrap="square" anchor="t">
-            <a:spAutoFit/>
-          </a:bodyPr>
-          <a:lstStyle/>
-          <a:p>
-            <a:pPr algn="ctr">
-              <a:lnSpc>
-                <a:spcPct val="105000"/>
-              </a:lnSpc>
-            </a:pPr>
-            <a:r>
-              <a:rPr sz="1300" b="0" i="0">
-                <a:solidFill>
-                  <a:srgbClr val="93A9C2"/>
-                </a:solidFill>
-                <a:latin typeface="Segoe UI"/>
-              </a:rPr>
-              <a:t>new hardware —</a:t>
-            </a:r>
-          </a:p>
-          <a:p>
-            <a:pPr algn="ctr">
-              <a:lnSpc>
-                <a:spcPct val="105000"/>
-              </a:lnSpc>
-            </a:pPr>
-            <a:r>
-              <a:rPr sz="1300" b="0" i="0">
-                <a:solidFill>
-                  <a:srgbClr val="93A9C2"/>
-                </a:solidFill>
-                <a:latin typeface="Segoe UI"/>
-              </a:rPr>
-              <a:t>reuses existing cameras</a:t>
-            </a:r>
-          </a:p>
-        </p:txBody>
-      </p:sp>
-      <p:sp>
-        <p:nvSpPr>
-          <p:cNvPr id="20" name="TextBox 19"/>
           <p:cNvSpPr txBox="1"/>
           <p:nvPr/>
         </p:nvSpPr>
@@ -4916,18 +5161,14 @@
           <a:noFill/>
         </p:spPr>
         <p:txBody>
-          <a:bodyPr wrap="square" anchor="t">
-            <a:spAutoFit/>
-          </a:bodyPr>
-          <a:lstStyle/>
-          <a:p>
-            <a:pPr algn="l">
-              <a:lnSpc>
-                <a:spcPct val="105000"/>
-              </a:lnSpc>
-            </a:pPr>
-            <a:r>
-              <a:rPr sz="1000" b="0" i="0">
+          <a:bodyPr wrap="square">
+            <a:spAutoFit/>
+          </a:bodyPr>
+          <a:lstStyle/>
+          <a:p>
+            <a:pPr algn="l"/>
+            <a:r>
+              <a:rPr sz="1000" b="0">
                 <a:solidFill>
                   <a:srgbClr val="93A9C2"/>
                 </a:solidFill>
@@ -4940,7 +5181,7 @@
       </p:sp>
       <p:sp>
         <p:nvSpPr>
-          <p:cNvPr id="21" name="TextBox 20"/>
+          <p:cNvPr id="13" name="TextBox 12"/>
           <p:cNvSpPr txBox="1"/>
           <p:nvPr/>
         </p:nvSpPr>
@@ -4955,24 +5196,20 @@
           <a:noFill/>
         </p:spPr>
         <p:txBody>
-          <a:bodyPr wrap="square" anchor="t">
-            <a:spAutoFit/>
-          </a:bodyPr>
-          <a:lstStyle/>
-          <a:p>
-            <a:pPr algn="r">
-              <a:lnSpc>
-                <a:spcPct val="105000"/>
-              </a:lnSpc>
-            </a:pPr>
-            <a:r>
-              <a:rPr sz="1000" b="0" i="0">
+          <a:bodyPr wrap="square">
+            <a:spAutoFit/>
+          </a:bodyPr>
+          <a:lstStyle/>
+          <a:p>
+            <a:pPr algn="r"/>
+            <a:r>
+              <a:rPr sz="1000" b="0">
                 <a:solidFill>
                   <a:srgbClr val="93A9C2"/>
                 </a:solidFill>
                 <a:latin typeface="Segoe UI"/>
               </a:rPr>
-              <a:t>13</a:t>
+              <a:t>11</a:t>
             </a:r>
           </a:p>
         </p:txBody>
@@ -4982,9 +5219,6 @@
   <p:clrMapOvr>
     <a:masterClrMapping/>
   </p:clrMapOvr>
-  <p:transition xmlns:p14="http://schemas.microsoft.com/office/powerpoint/2010/main" spd="med" p14:dur="900">
-    <p:fade/>
-  </p:transition>
 </p:sld>
 </file>
 
@@ -5040,7 +5274,7 @@
                 </a:solidFill>
                 <a:latin typeface="Segoe UI"/>
               </a:rPr>
-              <a:t>SECURITY &amp; COMPLIANCE</a:t>
+              <a:t>THE SCALE BREAKTHROUGH</a:t>
             </a:r>
           </a:p>
         </p:txBody>
@@ -5079,7 +5313,7 @@
                 </a:solidFill>
                 <a:latin typeface="Segoe UI"/>
               </a:rPr>
-              <a:t>Government-grade by design</a:t>
+              <a:t>Why Sentinel reaches 80,000 cameras</a:t>
             </a:r>
           </a:p>
         </p:txBody>
@@ -5092,8 +5326,8 @@
         </p:nvSpPr>
         <p:spPr>
           <a:xfrm>
-            <a:off x="777240" y="2103120"/>
-            <a:ext cx="2606040" cy="2743200"/>
+            <a:off x="1097280" y="2011680"/>
+            <a:ext cx="4480560" cy="2377440"/>
           </a:xfrm>
           <a:prstGeom prst="roundRect">
             <a:avLst/>
@@ -5103,7 +5337,7 @@
           </a:solidFill>
           <a:ln w="12700">
             <a:solidFill>
-              <a:srgbClr val="182C4C"/>
+              <a:srgbClr val="FF3B5C"/>
             </a:solidFill>
           </a:ln>
           <a:effectLst/>
@@ -5138,8 +5372,8 @@
         </p:nvSpPr>
         <p:spPr>
           <a:xfrm>
-            <a:off x="777240" y="2331720"/>
-            <a:ext cx="2606040" cy="640080"/>
+            <a:off x="1097280" y="2331720"/>
+            <a:ext cx="4480560" cy="1005840"/>
           </a:xfrm>
           <a:prstGeom prst="rect">
             <a:avLst/>
@@ -5158,13 +5392,13 @@
               </a:lnSpc>
             </a:pPr>
             <a:r>
-              <a:rPr sz="3200" b="0" i="0">
-                <a:solidFill>
-                  <a:srgbClr val="25D8F0"/>
-                </a:solidFill>
-                <a:latin typeface="Segoe UI"/>
-              </a:rPr>
-              <a:t>🔐</a:t>
+              <a:rPr sz="5400" b="1" i="0">
+                <a:solidFill>
+                  <a:srgbClr val="FF3B5C"/>
+                </a:solidFill>
+                <a:latin typeface="Segoe UI"/>
+              </a:rPr>
+              <a:t>160 Gbps</a:t>
             </a:r>
           </a:p>
         </p:txBody>
@@ -5177,8 +5411,8 @@
         </p:nvSpPr>
         <p:spPr>
           <a:xfrm>
-            <a:off x="868680" y="3108960"/>
-            <a:ext cx="2423160" cy="548640"/>
+            <a:off x="1097280" y="3474720"/>
+            <a:ext cx="4480560" cy="548640"/>
           </a:xfrm>
           <a:prstGeom prst="rect">
             <a:avLst/>
@@ -5197,53 +5431,58 @@
               </a:lnSpc>
             </a:pPr>
             <a:r>
-              <a:rPr sz="1500" b="1" i="0">
-                <a:solidFill>
-                  <a:srgbClr val="EAF1FA"/>
-                </a:solidFill>
-                <a:latin typeface="Segoe UI"/>
-              </a:rPr>
-              <a:t>Role-Based Access</a:t>
-            </a:r>
-          </a:p>
-        </p:txBody>
-      </p:sp>
-      <p:sp>
-        <p:nvSpPr>
-          <p:cNvPr id="7" name="TextBox 6"/>
-          <p:cNvSpPr txBox="1"/>
-          <p:nvPr/>
-        </p:nvSpPr>
-        <p:spPr>
-          <a:xfrm>
-            <a:off x="914400" y="3657600"/>
-            <a:ext cx="2331720" cy="1097280"/>
-          </a:xfrm>
-          <a:prstGeom prst="rect">
-            <a:avLst/>
-          </a:prstGeom>
-          <a:noFill/>
-        </p:spPr>
-        <p:txBody>
-          <a:bodyPr wrap="square" anchor="t">
-            <a:spAutoFit/>
-          </a:bodyPr>
-          <a:lstStyle/>
-          <a:p>
-            <a:pPr algn="ctr">
-              <a:lnSpc>
-                <a:spcPct val="105000"/>
-              </a:lnSpc>
-            </a:pPr>
-            <a:r>
-              <a:rPr sz="1250" b="0" i="0">
+              <a:rPr sz="1500" b="0" i="0">
                 <a:solidFill>
                   <a:srgbClr val="93A9C2"/>
                 </a:solidFill>
                 <a:latin typeface="Segoe UI"/>
               </a:rPr>
-              <a:t>Admin / operator roles; every route and API gated</a:t>
-            </a:r>
+              <a:t>Centralising all video — impossible</a:t>
+            </a:r>
+          </a:p>
+        </p:txBody>
+      </p:sp>
+      <p:sp>
+        <p:nvSpPr>
+          <p:cNvPr id="7" name="Right Arrow 6"/>
+          <p:cNvSpPr/>
+          <p:nvPr/>
+        </p:nvSpPr>
+        <p:spPr>
+          <a:xfrm>
+            <a:off x="5715000" y="2971800"/>
+            <a:ext cx="777240" cy="457200"/>
+          </a:xfrm>
+          <a:prstGeom prst="rightArrow">
+            <a:avLst/>
+          </a:prstGeom>
+          <a:solidFill>
+            <a:srgbClr val="25D8F0"/>
+          </a:solidFill>
+          <a:ln>
+            <a:noFill/>
+          </a:ln>
+          <a:effectLst/>
+        </p:spPr>
+        <p:style>
+          <a:lnRef idx="1">
+            <a:schemeClr val="accent1"/>
+          </a:lnRef>
+          <a:fillRef idx="3">
+            <a:schemeClr val="accent1"/>
+          </a:fillRef>
+          <a:effectRef idx="2">
+            <a:schemeClr val="accent1"/>
+          </a:effectRef>
+          <a:fontRef idx="minor">
+            <a:schemeClr val="lt1"/>
+          </a:fontRef>
+        </p:style>
+        <p:txBody>
+          <a:bodyPr rtlCol="0" anchor="ctr"/>
+          <a:lstStyle/>
+          <a:p>
+            <a:pPr algn="ctr"/>
           </a:p>
         </p:txBody>
       </p:sp>
@@ -5255,8 +5494,8 @@
         </p:nvSpPr>
         <p:spPr>
           <a:xfrm>
-            <a:off x="3529584" y="2103120"/>
-            <a:ext cx="2606040" cy="2743200"/>
+            <a:off x="6629400" y="2011680"/>
+            <a:ext cx="4480560" cy="2377440"/>
           </a:xfrm>
           <a:prstGeom prst="roundRect">
             <a:avLst/>
@@ -5266,7 +5505,7 @@
           </a:solidFill>
           <a:ln w="12700">
             <a:solidFill>
-              <a:srgbClr val="182C4C"/>
+              <a:srgbClr val="2AD477"/>
             </a:solidFill>
           </a:ln>
           <a:effectLst/>
@@ -5301,8 +5540,8 @@
         </p:nvSpPr>
         <p:spPr>
           <a:xfrm>
-            <a:off x="3529584" y="2331720"/>
-            <a:ext cx="2606040" cy="640080"/>
+            <a:off x="6629400" y="2331720"/>
+            <a:ext cx="4480560" cy="1005840"/>
           </a:xfrm>
           <a:prstGeom prst="rect">
             <a:avLst/>
@@ -5321,13 +5560,13 @@
               </a:lnSpc>
             </a:pPr>
             <a:r>
-              <a:rPr sz="3200" b="0" i="0">
-                <a:solidFill>
-                  <a:srgbClr val="25D8F0"/>
-                </a:solidFill>
-                <a:latin typeface="Segoe UI"/>
-              </a:rPr>
-              <a:t>📜</a:t>
+              <a:rPr sz="5400" b="1" i="0">
+                <a:solidFill>
+                  <a:srgbClr val="2AD477"/>
+                </a:solidFill>
+                <a:latin typeface="Segoe UI"/>
+              </a:rPr>
+              <a:t>≈ 10 Gbps</a:t>
             </a:r>
           </a:p>
         </p:txBody>
@@ -5340,8 +5579,8 @@
         </p:nvSpPr>
         <p:spPr>
           <a:xfrm>
-            <a:off x="3621024" y="3108960"/>
-            <a:ext cx="2423160" cy="548640"/>
+            <a:off x="6629400" y="3474720"/>
+            <a:ext cx="4480560" cy="548640"/>
           </a:xfrm>
           <a:prstGeom prst="rect">
             <a:avLst/>
@@ -5360,76 +5599,37 @@
               </a:lnSpc>
             </a:pPr>
             <a:r>
-              <a:rPr sz="1500" b="1" i="0">
-                <a:solidFill>
-                  <a:srgbClr val="EAF1FA"/>
-                </a:solidFill>
-                <a:latin typeface="Segoe UI"/>
-              </a:rPr>
-              <a:t>Full Audit Trail</a:t>
-            </a:r>
-          </a:p>
-        </p:txBody>
-      </p:sp>
-      <p:sp>
-        <p:nvSpPr>
-          <p:cNvPr id="11" name="TextBox 10"/>
-          <p:cNvSpPr txBox="1"/>
-          <p:nvPr/>
-        </p:nvSpPr>
-        <p:spPr>
-          <a:xfrm>
-            <a:off x="3666744" y="3657600"/>
-            <a:ext cx="2331720" cy="1097280"/>
-          </a:xfrm>
-          <a:prstGeom prst="rect">
-            <a:avLst/>
-          </a:prstGeom>
-          <a:noFill/>
-        </p:spPr>
-        <p:txBody>
-          <a:bodyPr wrap="square" anchor="t">
-            <a:spAutoFit/>
-          </a:bodyPr>
-          <a:lstStyle/>
-          <a:p>
-            <a:pPr algn="ctr">
-              <a:lnSpc>
-                <a:spcPct val="105000"/>
-              </a:lnSpc>
-            </a:pPr>
-            <a:r>
-              <a:rPr sz="1250" b="0" i="0">
+              <a:rPr sz="1500" b="0" i="0">
                 <a:solidFill>
                   <a:srgbClr val="93A9C2"/>
                 </a:solidFill>
                 <a:latin typeface="Segoe UI"/>
               </a:rPr>
-              <a:t>Every login, action and dispatch logged</a:t>
-            </a:r>
-          </a:p>
-        </p:txBody>
-      </p:sp>
-      <p:sp>
-        <p:nvSpPr>
-          <p:cNvPr id="12" name="Rounded Rectangle 11"/>
+              <a:t>Edge processing — 15× less, feasible</a:t>
+            </a:r>
+          </a:p>
+        </p:txBody>
+      </p:sp>
+      <p:sp>
+        <p:nvSpPr>
+          <p:cNvPr id="11" name="Rounded Rectangle 10"/>
           <p:cNvSpPr/>
           <p:nvPr/>
         </p:nvSpPr>
         <p:spPr>
           <a:xfrm>
-            <a:off x="6281928" y="2103120"/>
-            <a:ext cx="2606040" cy="2743200"/>
+            <a:off x="1097280" y="4709160"/>
+            <a:ext cx="10012680" cy="1280160"/>
           </a:xfrm>
           <a:prstGeom prst="roundRect">
             <a:avLst/>
           </a:prstGeom>
           <a:solidFill>
-            <a:srgbClr val="14223A"/>
+            <a:srgbClr val="182C4C"/>
           </a:solidFill>
           <a:ln w="12700">
             <a:solidFill>
-              <a:srgbClr val="182C4C"/>
+              <a:srgbClr val="25D8F0"/>
             </a:solidFill>
           </a:ln>
           <a:effectLst/>
@@ -5458,14 +5658,53 @@
       </p:sp>
       <p:sp>
         <p:nvSpPr>
+          <p:cNvPr id="12" name="TextBox 11"/>
+          <p:cNvSpPr txBox="1"/>
+          <p:nvPr/>
+        </p:nvSpPr>
+        <p:spPr>
+          <a:xfrm>
+            <a:off x="1188720" y="4846320"/>
+            <a:ext cx="9829800" cy="457200"/>
+          </a:xfrm>
+          <a:prstGeom prst="rect">
+            <a:avLst/>
+          </a:prstGeom>
+          <a:noFill/>
+        </p:spPr>
+        <p:txBody>
+          <a:bodyPr wrap="square" anchor="t">
+            <a:spAutoFit/>
+          </a:bodyPr>
+          <a:lstStyle/>
+          <a:p>
+            <a:pPr algn="ctr">
+              <a:lnSpc>
+                <a:spcPct val="105000"/>
+              </a:lnSpc>
+            </a:pPr>
+            <a:r>
+              <a:rPr sz="1700" b="1" i="0">
+                <a:solidFill>
+                  <a:srgbClr val="25D8F0"/>
+                </a:solidFill>
+                <a:latin typeface="Segoe UI"/>
+              </a:rPr>
+              <a:t>Process at the edge · send only metadata · run on ordinary Intel hardware</a:t>
+            </a:r>
+          </a:p>
+        </p:txBody>
+      </p:sp>
+      <p:sp>
+        <p:nvSpPr>
           <p:cNvPr id="13" name="TextBox 12"/>
           <p:cNvSpPr txBox="1"/>
           <p:nvPr/>
         </p:nvSpPr>
         <p:spPr>
           <a:xfrm>
-            <a:off x="6281928" y="2331720"/>
-            <a:ext cx="2606040" cy="640080"/>
+            <a:off x="1188720" y="5394960"/>
+            <a:ext cx="9829800" cy="457200"/>
           </a:xfrm>
           <a:prstGeom prst="rect">
             <a:avLst/>
@@ -5484,13 +5723,13 @@
               </a:lnSpc>
             </a:pPr>
             <a:r>
-              <a:rPr sz="3200" b="0" i="0">
-                <a:solidFill>
-                  <a:srgbClr val="25D8F0"/>
-                </a:solidFill>
-                <a:latin typeface="Segoe UI"/>
-              </a:rPr>
-              <a:t>⚖️</a:t>
+              <a:rPr sz="1300" b="0" i="0">
+                <a:solidFill>
+                  <a:srgbClr val="93A9C2"/>
+                </a:solidFill>
+                <a:latin typeface="Segoe UI"/>
+              </a:rPr>
+              <a:t>15–50× lower bandwidth · central storage cut from petabytes to a fraction · no GPU required</a:t>
             </a:r>
           </a:p>
         </p:txBody>
@@ -5498,286 +5737,6 @@
       <p:sp>
         <p:nvSpPr>
           <p:cNvPr id="14" name="TextBox 13"/>
-          <p:cNvSpPr txBox="1"/>
-          <p:nvPr/>
-        </p:nvSpPr>
-        <p:spPr>
-          <a:xfrm>
-            <a:off x="6373368" y="3108960"/>
-            <a:ext cx="2423160" cy="548640"/>
-          </a:xfrm>
-          <a:prstGeom prst="rect">
-            <a:avLst/>
-          </a:prstGeom>
-          <a:noFill/>
-        </p:spPr>
-        <p:txBody>
-          <a:bodyPr wrap="square" anchor="t">
-            <a:spAutoFit/>
-          </a:bodyPr>
-          <a:lstStyle/>
-          <a:p>
-            <a:pPr algn="ctr">
-              <a:lnSpc>
-                <a:spcPct val="105000"/>
-              </a:lnSpc>
-            </a:pPr>
-            <a:r>
-              <a:rPr sz="1500" b="1" i="0">
-                <a:solidFill>
-                  <a:srgbClr val="EAF1FA"/>
-                </a:solidFill>
-                <a:latin typeface="Segoe UI"/>
-              </a:rPr>
-              <a:t>DPDP Act 2023</a:t>
-            </a:r>
-          </a:p>
-        </p:txBody>
-      </p:sp>
-      <p:sp>
-        <p:nvSpPr>
-          <p:cNvPr id="15" name="TextBox 14"/>
-          <p:cNvSpPr txBox="1"/>
-          <p:nvPr/>
-        </p:nvSpPr>
-        <p:spPr>
-          <a:xfrm>
-            <a:off x="6419088" y="3657600"/>
-            <a:ext cx="2331720" cy="1097280"/>
-          </a:xfrm>
-          <a:prstGeom prst="rect">
-            <a:avLst/>
-          </a:prstGeom>
-          <a:noFill/>
-        </p:spPr>
-        <p:txBody>
-          <a:bodyPr wrap="square" anchor="t">
-            <a:spAutoFit/>
-          </a:bodyPr>
-          <a:lstStyle/>
-          <a:p>
-            <a:pPr algn="ctr">
-              <a:lnSpc>
-                <a:spcPct val="105000"/>
-              </a:lnSpc>
-            </a:pPr>
-            <a:r>
-              <a:rPr sz="1250" b="0" i="0">
-                <a:solidFill>
-                  <a:srgbClr val="93A9C2"/>
-                </a:solidFill>
-                <a:latin typeface="Segoe UI"/>
-              </a:rPr>
-              <a:t>Purpose-limited, retention-bound, access-controlled PII</a:t>
-            </a:r>
-          </a:p>
-        </p:txBody>
-      </p:sp>
-      <p:sp>
-        <p:nvSpPr>
-          <p:cNvPr id="16" name="Rounded Rectangle 15"/>
-          <p:cNvSpPr/>
-          <p:nvPr/>
-        </p:nvSpPr>
-        <p:spPr>
-          <a:xfrm>
-            <a:off x="9034272" y="2103120"/>
-            <a:ext cx="2606040" cy="2743200"/>
-          </a:xfrm>
-          <a:prstGeom prst="roundRect">
-            <a:avLst/>
-          </a:prstGeom>
-          <a:solidFill>
-            <a:srgbClr val="14223A"/>
-          </a:solidFill>
-          <a:ln w="12700">
-            <a:solidFill>
-              <a:srgbClr val="182C4C"/>
-            </a:solidFill>
-          </a:ln>
-          <a:effectLst/>
-        </p:spPr>
-        <p:style>
-          <a:lnRef idx="1">
-            <a:schemeClr val="accent1"/>
-          </a:lnRef>
-          <a:fillRef idx="3">
-            <a:schemeClr val="accent1"/>
-          </a:fillRef>
-          <a:effectRef idx="2">
-            <a:schemeClr val="accent1"/>
-          </a:effectRef>
-          <a:fontRef idx="minor">
-            <a:schemeClr val="lt1"/>
-          </a:fontRef>
-        </p:style>
-        <p:txBody>
-          <a:bodyPr rtlCol="0" anchor="ctr"/>
-          <a:lstStyle/>
-          <a:p>
-            <a:pPr algn="ctr"/>
-          </a:p>
-        </p:txBody>
-      </p:sp>
-      <p:sp>
-        <p:nvSpPr>
-          <p:cNvPr id="17" name="TextBox 16"/>
-          <p:cNvSpPr txBox="1"/>
-          <p:nvPr/>
-        </p:nvSpPr>
-        <p:spPr>
-          <a:xfrm>
-            <a:off x="9034272" y="2331720"/>
-            <a:ext cx="2606040" cy="640080"/>
-          </a:xfrm>
-          <a:prstGeom prst="rect">
-            <a:avLst/>
-          </a:prstGeom>
-          <a:noFill/>
-        </p:spPr>
-        <p:txBody>
-          <a:bodyPr wrap="square" anchor="t">
-            <a:spAutoFit/>
-          </a:bodyPr>
-          <a:lstStyle/>
-          <a:p>
-            <a:pPr algn="ctr">
-              <a:lnSpc>
-                <a:spcPct val="105000"/>
-              </a:lnSpc>
-            </a:pPr>
-            <a:r>
-              <a:rPr sz="3200" b="0" i="0">
-                <a:solidFill>
-                  <a:srgbClr val="25D8F0"/>
-                </a:solidFill>
-                <a:latin typeface="Segoe UI"/>
-              </a:rPr>
-              <a:t>🛰️</a:t>
-            </a:r>
-          </a:p>
-        </p:txBody>
-      </p:sp>
-      <p:sp>
-        <p:nvSpPr>
-          <p:cNvPr id="18" name="TextBox 17"/>
-          <p:cNvSpPr txBox="1"/>
-          <p:nvPr/>
-        </p:nvSpPr>
-        <p:spPr>
-          <a:xfrm>
-            <a:off x="9125712" y="3108960"/>
-            <a:ext cx="2423160" cy="548640"/>
-          </a:xfrm>
-          <a:prstGeom prst="rect">
-            <a:avLst/>
-          </a:prstGeom>
-          <a:noFill/>
-        </p:spPr>
-        <p:txBody>
-          <a:bodyPr wrap="square" anchor="t">
-            <a:spAutoFit/>
-          </a:bodyPr>
-          <a:lstStyle/>
-          <a:p>
-            <a:pPr algn="ctr">
-              <a:lnSpc>
-                <a:spcPct val="105000"/>
-              </a:lnSpc>
-            </a:pPr>
-            <a:r>
-              <a:rPr sz="1500" b="1" i="0">
-                <a:solidFill>
-                  <a:srgbClr val="EAF1FA"/>
-                </a:solidFill>
-                <a:latin typeface="Segoe UI"/>
-              </a:rPr>
-              <a:t>Secure &amp; Isolated</a:t>
-            </a:r>
-          </a:p>
-        </p:txBody>
-      </p:sp>
-      <p:sp>
-        <p:nvSpPr>
-          <p:cNvPr id="19" name="TextBox 18"/>
-          <p:cNvSpPr txBox="1"/>
-          <p:nvPr/>
-        </p:nvSpPr>
-        <p:spPr>
-          <a:xfrm>
-            <a:off x="9171432" y="3657600"/>
-            <a:ext cx="2331720" cy="1097280"/>
-          </a:xfrm>
-          <a:prstGeom prst="rect">
-            <a:avLst/>
-          </a:prstGeom>
-          <a:noFill/>
-        </p:spPr>
-        <p:txBody>
-          <a:bodyPr wrap="square" anchor="t">
-            <a:spAutoFit/>
-          </a:bodyPr>
-          <a:lstStyle/>
-          <a:p>
-            <a:pPr algn="ctr">
-              <a:lnSpc>
-                <a:spcPct val="105000"/>
-              </a:lnSpc>
-            </a:pPr>
-            <a:r>
-              <a:rPr sz="1250" b="0" i="0">
-                <a:solidFill>
-                  <a:srgbClr val="93A9C2"/>
-                </a:solidFill>
-                <a:latin typeface="Segoe UI"/>
-              </a:rPr>
-              <a:t>TLS transport, tamper detection, department isolation</a:t>
-            </a:r>
-          </a:p>
-        </p:txBody>
-      </p:sp>
-      <p:sp>
-        <p:nvSpPr>
-          <p:cNvPr id="20" name="TextBox 19"/>
-          <p:cNvSpPr txBox="1"/>
-          <p:nvPr/>
-        </p:nvSpPr>
-        <p:spPr>
-          <a:xfrm>
-            <a:off x="822960" y="5120640"/>
-            <a:ext cx="10515600" cy="548640"/>
-          </a:xfrm>
-          <a:prstGeom prst="rect">
-            <a:avLst/>
-          </a:prstGeom>
-          <a:noFill/>
-        </p:spPr>
-        <p:txBody>
-          <a:bodyPr wrap="square" anchor="t">
-            <a:spAutoFit/>
-          </a:bodyPr>
-          <a:lstStyle/>
-          <a:p>
-            <a:pPr algn="ctr">
-              <a:lnSpc>
-                <a:spcPct val="105000"/>
-              </a:lnSpc>
-            </a:pPr>
-            <a:r>
-              <a:rPr sz="1500" b="0" i="1">
-                <a:solidFill>
-                  <a:srgbClr val="93A9C2"/>
-                </a:solidFill>
-                <a:latin typeface="Segoe UI"/>
-              </a:rPr>
-              <a:t>Cameras stay in their department networks — Sentinel federates with least-privilege, read-only access.</a:t>
-            </a:r>
-          </a:p>
-        </p:txBody>
-      </p:sp>
-      <p:sp>
-        <p:nvSpPr>
-          <p:cNvPr id="21" name="TextBox 20"/>
           <p:cNvSpPr txBox="1"/>
           <p:nvPr/>
         </p:nvSpPr>
@@ -5816,7 +5775,7 @@
       </p:sp>
       <p:sp>
         <p:nvSpPr>
-          <p:cNvPr id="22" name="TextBox 21"/>
+          <p:cNvPr id="15" name="TextBox 14"/>
           <p:cNvSpPr txBox="1"/>
           <p:nvPr/>
         </p:nvSpPr>
@@ -5848,7 +5807,7 @@
                 </a:solidFill>
                 <a:latin typeface="Segoe UI"/>
               </a:rPr>
-              <a:t>14</a:t>
+              <a:t>12</a:t>
             </a:r>
           </a:p>
         </p:txBody>
@@ -5916,7 +5875,7 @@
                 </a:solidFill>
                 <a:latin typeface="Segoe UI"/>
               </a:rPr>
-              <a:t>TECHNOLOGY &amp; INTEGRATION</a:t>
+              <a:t>COST &amp; IMPACT</a:t>
             </a:r>
           </a:p>
         </p:txBody>
@@ -5949,13 +5908,13 @@
               </a:lnSpc>
             </a:pPr>
             <a:r>
-              <a:rPr sz="2600" b="1" i="0">
+              <a:rPr sz="2800" b="1" i="0">
                 <a:solidFill>
                   <a:srgbClr val="EAF1FA"/>
                 </a:solidFill>
                 <a:latin typeface="Segoe UI"/>
               </a:rPr>
-              <a:t>Production-credible stack — easy camera integration</a:t>
+              <a:t>Measurable benefits at state scale</a:t>
             </a:r>
           </a:p>
         </p:txBody>
@@ -5968,8 +5927,300 @@
         </p:nvSpPr>
         <p:spPr>
           <a:xfrm>
-            <a:off x="777240" y="1920240"/>
-            <a:ext cx="5212080" cy="3840480"/>
+            <a:off x="1097280" y="1965960"/>
+            <a:ext cx="4480560" cy="1828800"/>
+          </a:xfrm>
+          <a:prstGeom prst="roundRect">
+            <a:avLst/>
+          </a:prstGeom>
+          <a:solidFill>
+            <a:srgbClr val="14223A"/>
+          </a:solidFill>
+          <a:ln w="12700">
+            <a:solidFill>
+              <a:srgbClr val="FF3B5C"/>
+            </a:solidFill>
+          </a:ln>
+          <a:effectLst/>
+        </p:spPr>
+        <p:style>
+          <a:lnRef idx="1">
+            <a:schemeClr val="accent1"/>
+          </a:lnRef>
+          <a:fillRef idx="3">
+            <a:schemeClr val="accent1"/>
+          </a:fillRef>
+          <a:effectRef idx="2">
+            <a:schemeClr val="accent1"/>
+          </a:effectRef>
+          <a:fontRef idx="minor">
+            <a:schemeClr val="lt1"/>
+          </a:fontRef>
+        </p:style>
+        <p:txBody>
+          <a:bodyPr rtlCol="0" anchor="ctr"/>
+          <a:lstStyle/>
+          <a:p>
+            <a:pPr algn="ctr"/>
+          </a:p>
+        </p:txBody>
+      </p:sp>
+      <p:sp>
+        <p:nvSpPr>
+          <p:cNvPr id="5" name="TextBox 4"/>
+          <p:cNvSpPr txBox="1"/>
+          <p:nvPr/>
+        </p:nvSpPr>
+        <p:spPr>
+          <a:xfrm>
+            <a:off x="1097280" y="2240280"/>
+            <a:ext cx="4480560" cy="822960"/>
+          </a:xfrm>
+          <a:prstGeom prst="rect">
+            <a:avLst/>
+          </a:prstGeom>
+          <a:noFill/>
+        </p:spPr>
+        <p:txBody>
+          <a:bodyPr wrap="square" anchor="t">
+            <a:spAutoFit/>
+          </a:bodyPr>
+          <a:lstStyle/>
+          <a:p>
+            <a:pPr algn="ctr">
+              <a:lnSpc>
+                <a:spcPct val="105000"/>
+              </a:lnSpc>
+            </a:pPr>
+            <a:r>
+              <a:rPr sz="4200" b="1" i="0">
+                <a:solidFill>
+                  <a:srgbClr val="FF3B5C"/>
+                </a:solidFill>
+                <a:latin typeface="Segoe UI"/>
+              </a:rPr>
+              <a:t>₹120 Cr / yr</a:t>
+            </a:r>
+          </a:p>
+        </p:txBody>
+      </p:sp>
+      <p:sp>
+        <p:nvSpPr>
+          <p:cNvPr id="6" name="TextBox 5"/>
+          <p:cNvSpPr txBox="1"/>
+          <p:nvPr/>
+        </p:nvSpPr>
+        <p:spPr>
+          <a:xfrm>
+            <a:off x="1097280" y="3063240"/>
+            <a:ext cx="4480560" cy="548640"/>
+          </a:xfrm>
+          <a:prstGeom prst="rect">
+            <a:avLst/>
+          </a:prstGeom>
+          <a:noFill/>
+        </p:spPr>
+        <p:txBody>
+          <a:bodyPr wrap="square" anchor="t">
+            <a:spAutoFit/>
+          </a:bodyPr>
+          <a:lstStyle/>
+          <a:p>
+            <a:pPr algn="ctr">
+              <a:lnSpc>
+                <a:spcPct val="105000"/>
+              </a:lnSpc>
+            </a:pPr>
+            <a:r>
+              <a:rPr sz="1300" b="0" i="0">
+                <a:solidFill>
+                  <a:srgbClr val="93A9C2"/>
+                </a:solidFill>
+                <a:latin typeface="Segoe UI"/>
+              </a:rPr>
+              <a:t>Commercial per-camera licensing (indicative)</a:t>
+            </a:r>
+          </a:p>
+        </p:txBody>
+      </p:sp>
+      <p:sp>
+        <p:nvSpPr>
+          <p:cNvPr id="7" name="Right Arrow 6"/>
+          <p:cNvSpPr/>
+          <p:nvPr/>
+        </p:nvSpPr>
+        <p:spPr>
+          <a:xfrm>
+            <a:off x="5715000" y="2606040"/>
+            <a:ext cx="777240" cy="457200"/>
+          </a:xfrm>
+          <a:prstGeom prst="rightArrow">
+            <a:avLst/>
+          </a:prstGeom>
+          <a:solidFill>
+            <a:srgbClr val="25D8F0"/>
+          </a:solidFill>
+          <a:ln>
+            <a:noFill/>
+          </a:ln>
+          <a:effectLst/>
+        </p:spPr>
+        <p:style>
+          <a:lnRef idx="1">
+            <a:schemeClr val="accent1"/>
+          </a:lnRef>
+          <a:fillRef idx="3">
+            <a:schemeClr val="accent1"/>
+          </a:fillRef>
+          <a:effectRef idx="2">
+            <a:schemeClr val="accent1"/>
+          </a:effectRef>
+          <a:fontRef idx="minor">
+            <a:schemeClr val="lt1"/>
+          </a:fontRef>
+        </p:style>
+        <p:txBody>
+          <a:bodyPr rtlCol="0" anchor="ctr"/>
+          <a:lstStyle/>
+          <a:p>
+            <a:pPr algn="ctr"/>
+          </a:p>
+        </p:txBody>
+      </p:sp>
+      <p:sp>
+        <p:nvSpPr>
+          <p:cNvPr id="8" name="Rounded Rectangle 7"/>
+          <p:cNvSpPr/>
+          <p:nvPr/>
+        </p:nvSpPr>
+        <p:spPr>
+          <a:xfrm>
+            <a:off x="6629400" y="1965960"/>
+            <a:ext cx="4480560" cy="1828800"/>
+          </a:xfrm>
+          <a:prstGeom prst="roundRect">
+            <a:avLst/>
+          </a:prstGeom>
+          <a:solidFill>
+            <a:srgbClr val="14223A"/>
+          </a:solidFill>
+          <a:ln w="12700">
+            <a:solidFill>
+              <a:srgbClr val="2AD477"/>
+            </a:solidFill>
+          </a:ln>
+          <a:effectLst/>
+        </p:spPr>
+        <p:style>
+          <a:lnRef idx="1">
+            <a:schemeClr val="accent1"/>
+          </a:lnRef>
+          <a:fillRef idx="3">
+            <a:schemeClr val="accent1"/>
+          </a:fillRef>
+          <a:effectRef idx="2">
+            <a:schemeClr val="accent1"/>
+          </a:effectRef>
+          <a:fontRef idx="minor">
+            <a:schemeClr val="lt1"/>
+          </a:fontRef>
+        </p:style>
+        <p:txBody>
+          <a:bodyPr rtlCol="0" anchor="ctr"/>
+          <a:lstStyle/>
+          <a:p>
+            <a:pPr algn="ctr"/>
+          </a:p>
+        </p:txBody>
+      </p:sp>
+      <p:sp>
+        <p:nvSpPr>
+          <p:cNvPr id="9" name="TextBox 8"/>
+          <p:cNvSpPr txBox="1"/>
+          <p:nvPr/>
+        </p:nvSpPr>
+        <p:spPr>
+          <a:xfrm>
+            <a:off x="6629400" y="2240280"/>
+            <a:ext cx="4480560" cy="822960"/>
+          </a:xfrm>
+          <a:prstGeom prst="rect">
+            <a:avLst/>
+          </a:prstGeom>
+          <a:noFill/>
+        </p:spPr>
+        <p:txBody>
+          <a:bodyPr wrap="square" anchor="t">
+            <a:spAutoFit/>
+          </a:bodyPr>
+          <a:lstStyle/>
+          <a:p>
+            <a:pPr algn="ctr">
+              <a:lnSpc>
+                <a:spcPct val="105000"/>
+              </a:lnSpc>
+            </a:pPr>
+            <a:r>
+              <a:rPr sz="4200" b="1" i="0">
+                <a:solidFill>
+                  <a:srgbClr val="2AD477"/>
+                </a:solidFill>
+                <a:latin typeface="Segoe UI"/>
+              </a:rPr>
+              <a:t>₹0</a:t>
+            </a:r>
+          </a:p>
+        </p:txBody>
+      </p:sp>
+      <p:sp>
+        <p:nvSpPr>
+          <p:cNvPr id="10" name="TextBox 9"/>
+          <p:cNvSpPr txBox="1"/>
+          <p:nvPr/>
+        </p:nvSpPr>
+        <p:spPr>
+          <a:xfrm>
+            <a:off x="6629400" y="3063240"/>
+            <a:ext cx="4480560" cy="548640"/>
+          </a:xfrm>
+          <a:prstGeom prst="rect">
+            <a:avLst/>
+          </a:prstGeom>
+          <a:noFill/>
+        </p:spPr>
+        <p:txBody>
+          <a:bodyPr wrap="square" anchor="t">
+            <a:spAutoFit/>
+          </a:bodyPr>
+          <a:lstStyle/>
+          <a:p>
+            <a:pPr algn="ctr">
+              <a:lnSpc>
+                <a:spcPct val="105000"/>
+              </a:lnSpc>
+            </a:pPr>
+            <a:r>
+              <a:rPr sz="1300" b="0" i="0">
+                <a:solidFill>
+                  <a:srgbClr val="93A9C2"/>
+                </a:solidFill>
+                <a:latin typeface="Segoe UI"/>
+              </a:rPr>
+              <a:t>Sentinel licensing — open-source</a:t>
+            </a:r>
+          </a:p>
+        </p:txBody>
+      </p:sp>
+      <p:sp>
+        <p:nvSpPr>
+          <p:cNvPr id="11" name="Rounded Rectangle 10"/>
+          <p:cNvSpPr/>
+          <p:nvPr/>
+        </p:nvSpPr>
+        <p:spPr>
+          <a:xfrm>
+            <a:off x="1097280" y="4069080"/>
+            <a:ext cx="3200400" cy="1828800"/>
           </a:xfrm>
           <a:prstGeom prst="roundRect">
             <a:avLst/>
@@ -6008,14 +6259,14 @@
       </p:sp>
       <p:sp>
         <p:nvSpPr>
-          <p:cNvPr id="5" name="TextBox 4"/>
-          <p:cNvSpPr txBox="1"/>
-          <p:nvPr/>
-        </p:nvSpPr>
-        <p:spPr>
-          <a:xfrm>
-            <a:off x="1005840" y="2103120"/>
-            <a:ext cx="4754880" cy="365760"/>
+          <p:cNvPr id="12" name="TextBox 11"/>
+          <p:cNvSpPr txBox="1"/>
+          <p:nvPr/>
+        </p:nvSpPr>
+        <p:spPr>
+          <a:xfrm>
+            <a:off x="1097280" y="4297680"/>
+            <a:ext cx="3200400" cy="731520"/>
           </a:xfrm>
           <a:prstGeom prst="rect">
             <a:avLst/>
@@ -6028,33 +6279,33 @@
           </a:bodyPr>
           <a:lstStyle/>
           <a:p>
-            <a:pPr algn="l">
-              <a:lnSpc>
-                <a:spcPct val="105000"/>
-              </a:lnSpc>
-            </a:pPr>
-            <a:r>
-              <a:rPr sz="1400" b="1" i="0">
+            <a:pPr algn="ctr">
+              <a:lnSpc>
+                <a:spcPct val="105000"/>
+              </a:lnSpc>
+            </a:pPr>
+            <a:r>
+              <a:rPr sz="3000" b="1" i="0">
                 <a:solidFill>
                   <a:srgbClr val="25D8F0"/>
                 </a:solidFill>
                 <a:latin typeface="Segoe UI"/>
               </a:rPr>
-              <a:t>TECHNOLOGY STACK</a:t>
-            </a:r>
-          </a:p>
-        </p:txBody>
-      </p:sp>
-      <p:sp>
-        <p:nvSpPr>
-          <p:cNvPr id="6" name="TextBox 5"/>
-          <p:cNvSpPr txBox="1"/>
-          <p:nvPr/>
-        </p:nvSpPr>
-        <p:spPr>
-          <a:xfrm>
-            <a:off x="1005840" y="2560320"/>
-            <a:ext cx="4754880" cy="3017520"/>
+              <a:t>~1–2 sec</a:t>
+            </a:r>
+          </a:p>
+        </p:txBody>
+      </p:sp>
+      <p:sp>
+        <p:nvSpPr>
+          <p:cNvPr id="13" name="TextBox 12"/>
+          <p:cNvSpPr txBox="1"/>
+          <p:nvPr/>
+        </p:nvSpPr>
+        <p:spPr>
+          <a:xfrm>
+            <a:off x="1097280" y="5074920"/>
+            <a:ext cx="3200400" cy="731520"/>
           </a:xfrm>
           <a:prstGeom prst="rect">
             <a:avLst/>
@@ -6067,129 +6318,49 @@
           </a:bodyPr>
           <a:lstStyle/>
           <a:p>
-            <a:pPr algn="l">
-              <a:lnSpc>
-                <a:spcPct val="115000"/>
-              </a:lnSpc>
-            </a:pPr>
-            <a:r>
-              <a:rPr sz="1400" b="0" i="0">
-                <a:solidFill>
-                  <a:srgbClr val="EAF1FA"/>
-                </a:solidFill>
-                <a:latin typeface="Segoe UI"/>
-              </a:rPr>
-              <a:t>AI/Edge:  Intel OpenVINO · YOLOv8 · fast-plate-ocr · InsightFace · CLIP</a:t>
-            </a:r>
-          </a:p>
-          <a:p>
-            <a:pPr algn="l">
-              <a:lnSpc>
-                <a:spcPct val="115000"/>
-              </a:lnSpc>
-            </a:pPr>
-            <a:r>
-              <a:rPr sz="1400" b="0" i="0">
-                <a:solidFill>
-                  <a:srgbClr val="EAF1FA"/>
-                </a:solidFill>
-                <a:latin typeface="Segoe UI"/>
-              </a:rPr>
-              <a:t/>
-            </a:r>
-          </a:p>
-          <a:p>
-            <a:pPr algn="l">
-              <a:lnSpc>
-                <a:spcPct val="115000"/>
-              </a:lnSpc>
-            </a:pPr>
-            <a:r>
-              <a:rPr sz="1400" b="0" i="0">
-                <a:solidFill>
-                  <a:srgbClr val="EAF1FA"/>
-                </a:solidFill>
-                <a:latin typeface="Segoe UI"/>
-              </a:rPr>
-              <a:t>Data:  PostgreSQL + PostGIS · Qdrant (vector DB)</a:t>
-            </a:r>
-          </a:p>
-          <a:p>
-            <a:pPr algn="l">
-              <a:lnSpc>
-                <a:spcPct val="115000"/>
-              </a:lnSpc>
-            </a:pPr>
-            <a:r>
-              <a:rPr sz="1400" b="0" i="0">
-                <a:solidFill>
-                  <a:srgbClr val="EAF1FA"/>
-                </a:solidFill>
-                <a:latin typeface="Segoe UI"/>
-              </a:rPr>
-              <a:t/>
-            </a:r>
-          </a:p>
-          <a:p>
-            <a:pPr algn="l">
-              <a:lnSpc>
-                <a:spcPct val="115000"/>
-              </a:lnSpc>
-            </a:pPr>
-            <a:r>
-              <a:rPr sz="1400" b="0" i="0">
-                <a:solidFill>
-                  <a:srgbClr val="EAF1FA"/>
-                </a:solidFill>
-                <a:latin typeface="Segoe UI"/>
-              </a:rPr>
-              <a:t>Backbone:  MQTT (Mosquitto) · MediaMTX · FFmpeg</a:t>
-            </a:r>
-          </a:p>
-          <a:p>
-            <a:pPr algn="l">
-              <a:lnSpc>
-                <a:spcPct val="115000"/>
-              </a:lnSpc>
-            </a:pPr>
-            <a:r>
-              <a:rPr sz="1400" b="0" i="0">
-                <a:solidFill>
-                  <a:srgbClr val="EAF1FA"/>
-                </a:solidFill>
-                <a:latin typeface="Segoe UI"/>
-              </a:rPr>
-              <a:t/>
-            </a:r>
-          </a:p>
-          <a:p>
-            <a:pPr algn="l">
-              <a:lnSpc>
-                <a:spcPct val="115000"/>
-              </a:lnSpc>
-            </a:pPr>
-            <a:r>
-              <a:rPr sz="1400" b="0" i="0">
-                <a:solidFill>
-                  <a:srgbClr val="EAF1FA"/>
-                </a:solidFill>
-                <a:latin typeface="Segoe UI"/>
-              </a:rPr>
-              <a:t>App:  FastAPI · Leaflet GIS · Docker</a:t>
-            </a:r>
-          </a:p>
-        </p:txBody>
-      </p:sp>
-      <p:sp>
-        <p:nvSpPr>
-          <p:cNvPr id="7" name="Rounded Rectangle 6"/>
+            <a:pPr algn="ctr">
+              <a:lnSpc>
+                <a:spcPct val="105000"/>
+              </a:lnSpc>
+            </a:pPr>
+            <a:r>
+              <a:rPr sz="1300" b="0" i="0">
+                <a:solidFill>
+                  <a:srgbClr val="93A9C2"/>
+                </a:solidFill>
+                <a:latin typeface="Segoe UI"/>
+              </a:rPr>
+              <a:t>detection-to-alert</a:t>
+            </a:r>
+          </a:p>
+          <a:p>
+            <a:pPr algn="ctr">
+              <a:lnSpc>
+                <a:spcPct val="105000"/>
+              </a:lnSpc>
+            </a:pPr>
+            <a:r>
+              <a:rPr sz="1300" b="0" i="0">
+                <a:solidFill>
+                  <a:srgbClr val="93A9C2"/>
+                </a:solidFill>
+                <a:latin typeface="Segoe UI"/>
+              </a:rPr>
+              <a:t>(vs hours of manual review)</a:t>
+            </a:r>
+          </a:p>
+        </p:txBody>
+      </p:sp>
+      <p:sp>
+        <p:nvSpPr>
+          <p:cNvPr id="14" name="Rounded Rectangle 13"/>
           <p:cNvSpPr/>
           <p:nvPr/>
         </p:nvSpPr>
         <p:spPr>
           <a:xfrm>
-            <a:off x="6172200" y="1920240"/>
-            <a:ext cx="5212080" cy="3840480"/>
+            <a:off x="4498848" y="4069080"/>
+            <a:ext cx="3200400" cy="1828800"/>
           </a:xfrm>
           <a:prstGeom prst="roundRect">
             <a:avLst/>
@@ -6228,14 +6399,14 @@
       </p:sp>
       <p:sp>
         <p:nvSpPr>
-          <p:cNvPr id="8" name="TextBox 7"/>
-          <p:cNvSpPr txBox="1"/>
-          <p:nvPr/>
-        </p:nvSpPr>
-        <p:spPr>
-          <a:xfrm>
-            <a:off x="6400800" y="2103120"/>
-            <a:ext cx="4754880" cy="365760"/>
+          <p:cNvPr id="15" name="TextBox 14"/>
+          <p:cNvSpPr txBox="1"/>
+          <p:nvPr/>
+        </p:nvSpPr>
+        <p:spPr>
+          <a:xfrm>
+            <a:off x="4498848" y="4297680"/>
+            <a:ext cx="3200400" cy="731520"/>
           </a:xfrm>
           <a:prstGeom prst="rect">
             <a:avLst/>
@@ -6248,33 +6419,33 @@
           </a:bodyPr>
           <a:lstStyle/>
           <a:p>
-            <a:pPr algn="l">
-              <a:lnSpc>
-                <a:spcPct val="105000"/>
-              </a:lnSpc>
-            </a:pPr>
-            <a:r>
-              <a:rPr sz="1400" b="1" i="0">
-                <a:solidFill>
-                  <a:srgbClr val="2AD477"/>
-                </a:solidFill>
-                <a:latin typeface="Segoe UI"/>
-              </a:rPr>
-              <a:t>CAMERA INTEGRATION</a:t>
-            </a:r>
-          </a:p>
-        </p:txBody>
-      </p:sp>
-      <p:sp>
-        <p:nvSpPr>
-          <p:cNvPr id="9" name="TextBox 8"/>
-          <p:cNvSpPr txBox="1"/>
-          <p:nvPr/>
-        </p:nvSpPr>
-        <p:spPr>
-          <a:xfrm>
-            <a:off x="6400800" y="2560320"/>
-            <a:ext cx="4754880" cy="3017520"/>
+            <a:pPr algn="ctr">
+              <a:lnSpc>
+                <a:spcPct val="105000"/>
+              </a:lnSpc>
+            </a:pPr>
+            <a:r>
+              <a:rPr sz="3000" b="1" i="0">
+                <a:solidFill>
+                  <a:srgbClr val="25D8F0"/>
+                </a:solidFill>
+                <a:latin typeface="Segoe UI"/>
+              </a:rPr>
+              <a:t>80,000</a:t>
+            </a:r>
+          </a:p>
+        </p:txBody>
+      </p:sp>
+      <p:sp>
+        <p:nvSpPr>
+          <p:cNvPr id="16" name="TextBox 15"/>
+          <p:cNvSpPr txBox="1"/>
+          <p:nvPr/>
+        </p:nvSpPr>
+        <p:spPr>
+          <a:xfrm>
+            <a:off x="4498848" y="5074920"/>
+            <a:ext cx="3200400" cy="731520"/>
           </a:xfrm>
           <a:prstGeom prst="rect">
             <a:avLst/>
@@ -6287,122 +6458,182 @@
           </a:bodyPr>
           <a:lstStyle/>
           <a:p>
-            <a:pPr algn="l">
-              <a:lnSpc>
-                <a:spcPct val="120000"/>
-              </a:lnSpc>
-            </a:pPr>
-            <a:r>
-              <a:rPr sz="1400" b="0" i="0">
-                <a:solidFill>
-                  <a:srgbClr val="EAF1FA"/>
-                </a:solidFill>
-                <a:latin typeface="Segoe UI"/>
-              </a:rPr>
-              <a:t>IP cameras — Easy:</a:t>
-            </a:r>
-          </a:p>
-          <a:p>
-            <a:pPr algn="l">
-              <a:lnSpc>
-                <a:spcPct val="120000"/>
-              </a:lnSpc>
-            </a:pPr>
-            <a:r>
-              <a:rPr sz="1400" b="0" i="0">
-                <a:solidFill>
-                  <a:srgbClr val="EAF1FA"/>
-                </a:solidFill>
-                <a:latin typeface="Segoe UI"/>
-              </a:rPr>
-              <a:t>Drop-in via RTSP / ONVIF. Point the gateway at the URL.</a:t>
-            </a:r>
-          </a:p>
-          <a:p>
-            <a:pPr algn="l">
-              <a:lnSpc>
-                <a:spcPct val="120000"/>
-              </a:lnSpc>
-            </a:pPr>
-            <a:r>
-              <a:rPr sz="1400" b="0" i="0">
-                <a:solidFill>
-                  <a:srgbClr val="EAF1FA"/>
-                </a:solidFill>
-                <a:latin typeface="Segoe UI"/>
-              </a:rPr>
-              <a:t/>
-            </a:r>
-          </a:p>
-          <a:p>
-            <a:pPr algn="l">
-              <a:lnSpc>
-                <a:spcPct val="120000"/>
-              </a:lnSpc>
-            </a:pPr>
-            <a:r>
-              <a:rPr sz="1400" b="0" i="0">
-                <a:solidFill>
-                  <a:srgbClr val="EAF1FA"/>
-                </a:solidFill>
-                <a:latin typeface="Segoe UI"/>
-              </a:rPr>
-              <a:t>Analog cameras — via DVR:</a:t>
-            </a:r>
-          </a:p>
-          <a:p>
-            <a:pPr algn="l">
-              <a:lnSpc>
-                <a:spcPct val="120000"/>
-              </a:lnSpc>
-            </a:pPr>
-            <a:r>
-              <a:rPr sz="1400" b="0" i="0">
-                <a:solidFill>
-                  <a:srgbClr val="EAF1FA"/>
-                </a:solidFill>
-                <a:latin typeface="Segoe UI"/>
-              </a:rPr>
-              <a:t>Use the DVR/NVR RTSP output, or an analog-to-IP encoder.</a:t>
-            </a:r>
-          </a:p>
-          <a:p>
-            <a:pPr algn="l">
-              <a:lnSpc>
-                <a:spcPct val="120000"/>
-              </a:lnSpc>
-            </a:pPr>
-            <a:r>
-              <a:rPr sz="1400" b="0" i="0">
-                <a:solidFill>
-                  <a:srgbClr val="EAF1FA"/>
-                </a:solidFill>
-                <a:latin typeface="Segoe UI"/>
-              </a:rPr>
-              <a:t/>
-            </a:r>
-          </a:p>
-          <a:p>
-            <a:pPr algn="l">
-              <a:lnSpc>
-                <a:spcPct val="120000"/>
-              </a:lnSpc>
-            </a:pPr>
-            <a:r>
-              <a:rPr sz="1400" b="0" i="0">
-                <a:solidFill>
-                  <a:srgbClr val="EAF1FA"/>
-                </a:solidFill>
-                <a:latin typeface="Segoe UI"/>
-              </a:rPr>
-              <a:t>Everything normalises to one RTSP URL per camera — exactly the hackathon feed model.</a:t>
-            </a:r>
-          </a:p>
-        </p:txBody>
-      </p:sp>
-      <p:sp>
-        <p:nvSpPr>
-          <p:cNvPr id="10" name="TextBox 9"/>
+            <a:pPr algn="ctr">
+              <a:lnSpc>
+                <a:spcPct val="105000"/>
+              </a:lnSpc>
+            </a:pPr>
+            <a:r>
+              <a:rPr sz="1300" b="0" i="0">
+                <a:solidFill>
+                  <a:srgbClr val="93A9C2"/>
+                </a:solidFill>
+                <a:latin typeface="Segoe UI"/>
+              </a:rPr>
+              <a:t>existing cameras activated</a:t>
+            </a:r>
+          </a:p>
+          <a:p>
+            <a:pPr algn="ctr">
+              <a:lnSpc>
+                <a:spcPct val="105000"/>
+              </a:lnSpc>
+            </a:pPr>
+            <a:r>
+              <a:rPr sz="1300" b="0" i="0">
+                <a:solidFill>
+                  <a:srgbClr val="93A9C2"/>
+                </a:solidFill>
+                <a:latin typeface="Segoe UI"/>
+              </a:rPr>
+              <a:t>as intelligent sensors</a:t>
+            </a:r>
+          </a:p>
+        </p:txBody>
+      </p:sp>
+      <p:sp>
+        <p:nvSpPr>
+          <p:cNvPr id="17" name="Rounded Rectangle 16"/>
+          <p:cNvSpPr/>
+          <p:nvPr/>
+        </p:nvSpPr>
+        <p:spPr>
+          <a:xfrm>
+            <a:off x="7900416" y="4069080"/>
+            <a:ext cx="3200400" cy="1828800"/>
+          </a:xfrm>
+          <a:prstGeom prst="roundRect">
+            <a:avLst/>
+          </a:prstGeom>
+          <a:solidFill>
+            <a:srgbClr val="14223A"/>
+          </a:solidFill>
+          <a:ln w="12700">
+            <a:solidFill>
+              <a:srgbClr val="182C4C"/>
+            </a:solidFill>
+          </a:ln>
+          <a:effectLst/>
+        </p:spPr>
+        <p:style>
+          <a:lnRef idx="1">
+            <a:schemeClr val="accent1"/>
+          </a:lnRef>
+          <a:fillRef idx="3">
+            <a:schemeClr val="accent1"/>
+          </a:fillRef>
+          <a:effectRef idx="2">
+            <a:schemeClr val="accent1"/>
+          </a:effectRef>
+          <a:fontRef idx="minor">
+            <a:schemeClr val="lt1"/>
+          </a:fontRef>
+        </p:style>
+        <p:txBody>
+          <a:bodyPr rtlCol="0" anchor="ctr"/>
+          <a:lstStyle/>
+          <a:p>
+            <a:pPr algn="ctr"/>
+          </a:p>
+        </p:txBody>
+      </p:sp>
+      <p:sp>
+        <p:nvSpPr>
+          <p:cNvPr id="18" name="TextBox 17"/>
+          <p:cNvSpPr txBox="1"/>
+          <p:nvPr/>
+        </p:nvSpPr>
+        <p:spPr>
+          <a:xfrm>
+            <a:off x="7900416" y="4297680"/>
+            <a:ext cx="3200400" cy="731520"/>
+          </a:xfrm>
+          <a:prstGeom prst="rect">
+            <a:avLst/>
+          </a:prstGeom>
+          <a:noFill/>
+        </p:spPr>
+        <p:txBody>
+          <a:bodyPr wrap="square" anchor="t">
+            <a:spAutoFit/>
+          </a:bodyPr>
+          <a:lstStyle/>
+          <a:p>
+            <a:pPr algn="ctr">
+              <a:lnSpc>
+                <a:spcPct val="105000"/>
+              </a:lnSpc>
+            </a:pPr>
+            <a:r>
+              <a:rPr sz="3000" b="1" i="0">
+                <a:solidFill>
+                  <a:srgbClr val="25D8F0"/>
+                </a:solidFill>
+                <a:latin typeface="Segoe UI"/>
+              </a:rPr>
+              <a:t>Zero</a:t>
+            </a:r>
+          </a:p>
+        </p:txBody>
+      </p:sp>
+      <p:sp>
+        <p:nvSpPr>
+          <p:cNvPr id="19" name="TextBox 18"/>
+          <p:cNvSpPr txBox="1"/>
+          <p:nvPr/>
+        </p:nvSpPr>
+        <p:spPr>
+          <a:xfrm>
+            <a:off x="7900416" y="5074920"/>
+            <a:ext cx="3200400" cy="731520"/>
+          </a:xfrm>
+          <a:prstGeom prst="rect">
+            <a:avLst/>
+          </a:prstGeom>
+          <a:noFill/>
+        </p:spPr>
+        <p:txBody>
+          <a:bodyPr wrap="square" anchor="t">
+            <a:spAutoFit/>
+          </a:bodyPr>
+          <a:lstStyle/>
+          <a:p>
+            <a:pPr algn="ctr">
+              <a:lnSpc>
+                <a:spcPct val="105000"/>
+              </a:lnSpc>
+            </a:pPr>
+            <a:r>
+              <a:rPr sz="1300" b="0" i="0">
+                <a:solidFill>
+                  <a:srgbClr val="93A9C2"/>
+                </a:solidFill>
+                <a:latin typeface="Segoe UI"/>
+              </a:rPr>
+              <a:t>new hardware —</a:t>
+            </a:r>
+          </a:p>
+          <a:p>
+            <a:pPr algn="ctr">
+              <a:lnSpc>
+                <a:spcPct val="105000"/>
+              </a:lnSpc>
+            </a:pPr>
+            <a:r>
+              <a:rPr sz="1300" b="0" i="0">
+                <a:solidFill>
+                  <a:srgbClr val="93A9C2"/>
+                </a:solidFill>
+                <a:latin typeface="Segoe UI"/>
+              </a:rPr>
+              <a:t>reuses existing cameras</a:t>
+            </a:r>
+          </a:p>
+        </p:txBody>
+      </p:sp>
+      <p:sp>
+        <p:nvSpPr>
+          <p:cNvPr id="20" name="TextBox 19"/>
           <p:cNvSpPr txBox="1"/>
           <p:nvPr/>
         </p:nvSpPr>
@@ -6441,7 +6672,7 @@
       </p:sp>
       <p:sp>
         <p:nvSpPr>
-          <p:cNvPr id="11" name="TextBox 10"/>
+          <p:cNvPr id="21" name="TextBox 20"/>
           <p:cNvSpPr txBox="1"/>
           <p:nvPr/>
         </p:nvSpPr>
@@ -6473,7 +6704,7 @@
                 </a:solidFill>
                 <a:latin typeface="Segoe UI"/>
               </a:rPr>
-              <a:t>15</a:t>
+              <a:t>13</a:t>
             </a:r>
           </a:p>
         </p:txBody>
@@ -6509,23 +6740,103 @@
       <p:grpSpPr/>
       <p:sp>
         <p:nvSpPr>
-          <p:cNvPr id="2" name="Rectangle 1"/>
+          <p:cNvPr id="2" name="TextBox 1"/>
+          <p:cNvSpPr txBox="1"/>
+          <p:nvPr/>
+        </p:nvSpPr>
+        <p:spPr>
+          <a:xfrm>
+            <a:off x="822960" y="502920"/>
+            <a:ext cx="10058400" cy="365760"/>
+          </a:xfrm>
+          <a:prstGeom prst="rect">
+            <a:avLst/>
+          </a:prstGeom>
+          <a:noFill/>
+        </p:spPr>
+        <p:txBody>
+          <a:bodyPr wrap="square" anchor="t">
+            <a:spAutoFit/>
+          </a:bodyPr>
+          <a:lstStyle/>
+          <a:p>
+            <a:pPr algn="l">
+              <a:lnSpc>
+                <a:spcPct val="105000"/>
+              </a:lnSpc>
+            </a:pPr>
+            <a:r>
+              <a:rPr sz="1300" b="1" i="0">
+                <a:solidFill>
+                  <a:srgbClr val="25D8F0"/>
+                </a:solidFill>
+                <a:latin typeface="Segoe UI"/>
+              </a:rPr>
+              <a:t>SECURITY &amp; COMPLIANCE</a:t>
+            </a:r>
+          </a:p>
+        </p:txBody>
+      </p:sp>
+      <p:sp>
+        <p:nvSpPr>
+          <p:cNvPr id="3" name="TextBox 2"/>
+          <p:cNvSpPr txBox="1"/>
+          <p:nvPr/>
+        </p:nvSpPr>
+        <p:spPr>
+          <a:xfrm>
+            <a:off x="822960" y="914400"/>
+            <a:ext cx="10515600" cy="640080"/>
+          </a:xfrm>
+          <a:prstGeom prst="rect">
+            <a:avLst/>
+          </a:prstGeom>
+          <a:noFill/>
+        </p:spPr>
+        <p:txBody>
+          <a:bodyPr wrap="square" anchor="t">
+            <a:spAutoFit/>
+          </a:bodyPr>
+          <a:lstStyle/>
+          <a:p>
+            <a:pPr algn="l">
+              <a:lnSpc>
+                <a:spcPct val="105000"/>
+              </a:lnSpc>
+            </a:pPr>
+            <a:r>
+              <a:rPr sz="2800" b="1" i="0">
+                <a:solidFill>
+                  <a:srgbClr val="EAF1FA"/>
+                </a:solidFill>
+                <a:latin typeface="Segoe UI"/>
+              </a:rPr>
+              <a:t>Government-grade by design</a:t>
+            </a:r>
+          </a:p>
+        </p:txBody>
+      </p:sp>
+      <p:sp>
+        <p:nvSpPr>
+          <p:cNvPr id="4" name="Rounded Rectangle 3"/>
           <p:cNvSpPr/>
           <p:nvPr/>
         </p:nvSpPr>
         <p:spPr>
           <a:xfrm>
-            <a:off x="0" y="0"/>
-            <a:ext cx="12191695" cy="6858000"/>
-          </a:xfrm>
-          <a:prstGeom prst="rect">
+            <a:off x="777240" y="2103120"/>
+            <a:ext cx="2606040" cy="2743200"/>
+          </a:xfrm>
+          <a:prstGeom prst="roundRect">
             <a:avLst/>
           </a:prstGeom>
           <a:solidFill>
-            <a:srgbClr val="0F1A30"/>
+            <a:srgbClr val="14223A"/>
           </a:solidFill>
-          <a:ln>
-            <a:noFill/>
+          <a:ln w="12700">
+            <a:solidFill>
+              <a:srgbClr val="182C4C"/>
+            </a:solidFill>
           </a:ln>
           <a:effectLst/>
         </p:spPr>
@@ -6553,23 +6864,142 @@
       </p:sp>
       <p:sp>
         <p:nvSpPr>
-          <p:cNvPr id="3" name="Rectangle 2"/>
+          <p:cNvPr id="5" name="TextBox 4"/>
+          <p:cNvSpPr txBox="1"/>
+          <p:nvPr/>
+        </p:nvSpPr>
+        <p:spPr>
+          <a:xfrm>
+            <a:off x="777240" y="2331720"/>
+            <a:ext cx="2606040" cy="640080"/>
+          </a:xfrm>
+          <a:prstGeom prst="rect">
+            <a:avLst/>
+          </a:prstGeom>
+          <a:noFill/>
+        </p:spPr>
+        <p:txBody>
+          <a:bodyPr wrap="square" anchor="t">
+            <a:spAutoFit/>
+          </a:bodyPr>
+          <a:lstStyle/>
+          <a:p>
+            <a:pPr algn="ctr">
+              <a:lnSpc>
+                <a:spcPct val="105000"/>
+              </a:lnSpc>
+            </a:pPr>
+            <a:r>
+              <a:rPr sz="3200" b="0" i="0">
+                <a:solidFill>
+                  <a:srgbClr val="25D8F0"/>
+                </a:solidFill>
+                <a:latin typeface="Segoe UI"/>
+              </a:rPr>
+              <a:t>🔐</a:t>
+            </a:r>
+          </a:p>
+        </p:txBody>
+      </p:sp>
+      <p:sp>
+        <p:nvSpPr>
+          <p:cNvPr id="6" name="TextBox 5"/>
+          <p:cNvSpPr txBox="1"/>
+          <p:nvPr/>
+        </p:nvSpPr>
+        <p:spPr>
+          <a:xfrm>
+            <a:off x="868680" y="3108960"/>
+            <a:ext cx="2423160" cy="548640"/>
+          </a:xfrm>
+          <a:prstGeom prst="rect">
+            <a:avLst/>
+          </a:prstGeom>
+          <a:noFill/>
+        </p:spPr>
+        <p:txBody>
+          <a:bodyPr wrap="square" anchor="t">
+            <a:spAutoFit/>
+          </a:bodyPr>
+          <a:lstStyle/>
+          <a:p>
+            <a:pPr algn="ctr">
+              <a:lnSpc>
+                <a:spcPct val="105000"/>
+              </a:lnSpc>
+            </a:pPr>
+            <a:r>
+              <a:rPr sz="1500" b="1" i="0">
+                <a:solidFill>
+                  <a:srgbClr val="EAF1FA"/>
+                </a:solidFill>
+                <a:latin typeface="Segoe UI"/>
+              </a:rPr>
+              <a:t>Role-Based Access</a:t>
+            </a:r>
+          </a:p>
+        </p:txBody>
+      </p:sp>
+      <p:sp>
+        <p:nvSpPr>
+          <p:cNvPr id="7" name="TextBox 6"/>
+          <p:cNvSpPr txBox="1"/>
+          <p:nvPr/>
+        </p:nvSpPr>
+        <p:spPr>
+          <a:xfrm>
+            <a:off x="914400" y="3657600"/>
+            <a:ext cx="2331720" cy="1097280"/>
+          </a:xfrm>
+          <a:prstGeom prst="rect">
+            <a:avLst/>
+          </a:prstGeom>
+          <a:noFill/>
+        </p:spPr>
+        <p:txBody>
+          <a:bodyPr wrap="square" anchor="t">
+            <a:spAutoFit/>
+          </a:bodyPr>
+          <a:lstStyle/>
+          <a:p>
+            <a:pPr algn="ctr">
+              <a:lnSpc>
+                <a:spcPct val="105000"/>
+              </a:lnSpc>
+            </a:pPr>
+            <a:r>
+              <a:rPr sz="1250" b="0" i="0">
+                <a:solidFill>
+                  <a:srgbClr val="93A9C2"/>
+                </a:solidFill>
+                <a:latin typeface="Segoe UI"/>
+              </a:rPr>
+              <a:t>Admin / operator roles; every route and API gated</a:t>
+            </a:r>
+          </a:p>
+        </p:txBody>
+      </p:sp>
+      <p:sp>
+        <p:nvSpPr>
+          <p:cNvPr id="8" name="Rounded Rectangle 7"/>
           <p:cNvSpPr/>
           <p:nvPr/>
         </p:nvSpPr>
         <p:spPr>
           <a:xfrm>
-            <a:off x="0" y="0"/>
-            <a:ext cx="12191695" cy="146304"/>
-          </a:xfrm>
-          <a:prstGeom prst="rect">
+            <a:off x="3529584" y="2103120"/>
+            <a:ext cx="2606040" cy="2743200"/>
+          </a:xfrm>
+          <a:prstGeom prst="roundRect">
             <a:avLst/>
           </a:prstGeom>
           <a:solidFill>
-            <a:srgbClr val="25D8F0"/>
+            <a:srgbClr val="14223A"/>
           </a:solidFill>
-          <a:ln>
-            <a:noFill/>
+          <a:ln w="12700">
+            <a:solidFill>
+              <a:srgbClr val="182C4C"/>
+            </a:solidFill>
           </a:ln>
           <a:effectLst/>
         </p:spPr>
@@ -6597,14 +7027,14 @@
       </p:sp>
       <p:sp>
         <p:nvSpPr>
-          <p:cNvPr id="4" name="TextBox 3"/>
-          <p:cNvSpPr txBox="1"/>
-          <p:nvPr/>
-        </p:nvSpPr>
-        <p:spPr>
-          <a:xfrm>
-            <a:off x="822960" y="457200"/>
-            <a:ext cx="10058400" cy="365760"/>
+          <p:cNvPr id="9" name="TextBox 8"/>
+          <p:cNvSpPr txBox="1"/>
+          <p:nvPr/>
+        </p:nvSpPr>
+        <p:spPr>
+          <a:xfrm>
+            <a:off x="3529584" y="2331720"/>
+            <a:ext cx="2606040" cy="640080"/>
           </a:xfrm>
           <a:prstGeom prst="rect">
             <a:avLst/>
@@ -6617,33 +7047,33 @@
           </a:bodyPr>
           <a:lstStyle/>
           <a:p>
-            <a:pPr algn="l">
-              <a:lnSpc>
-                <a:spcPct val="105000"/>
-              </a:lnSpc>
-            </a:pPr>
-            <a:r>
-              <a:rPr sz="1300" b="1" i="0">
+            <a:pPr algn="ctr">
+              <a:lnSpc>
+                <a:spcPct val="105000"/>
+              </a:lnSpc>
+            </a:pPr>
+            <a:r>
+              <a:rPr sz="3200" b="0" i="0">
                 <a:solidFill>
                   <a:srgbClr val="25D8F0"/>
                 </a:solidFill>
                 <a:latin typeface="Segoe UI"/>
               </a:rPr>
-              <a:t>ROADMAP &amp; VISION</a:t>
-            </a:r>
-          </a:p>
-        </p:txBody>
-      </p:sp>
-      <p:sp>
-        <p:nvSpPr>
-          <p:cNvPr id="5" name="TextBox 4"/>
-          <p:cNvSpPr txBox="1"/>
-          <p:nvPr/>
-        </p:nvSpPr>
-        <p:spPr>
-          <a:xfrm>
-            <a:off x="822960" y="868680"/>
-            <a:ext cx="10515600" cy="640080"/>
+              <a:t>📜</a:t>
+            </a:r>
+          </a:p>
+        </p:txBody>
+      </p:sp>
+      <p:sp>
+        <p:nvSpPr>
+          <p:cNvPr id="10" name="TextBox 9"/>
+          <p:cNvSpPr txBox="1"/>
+          <p:nvPr/>
+        </p:nvSpPr>
+        <p:spPr>
+          <a:xfrm>
+            <a:off x="3621024" y="3108960"/>
+            <a:ext cx="2423160" cy="548640"/>
           </a:xfrm>
           <a:prstGeom prst="rect">
             <a:avLst/>
@@ -6656,33 +7086,72 @@
           </a:bodyPr>
           <a:lstStyle/>
           <a:p>
-            <a:pPr algn="l">
-              <a:lnSpc>
-                <a:spcPct val="105000"/>
-              </a:lnSpc>
-            </a:pPr>
-            <a:r>
-              <a:rPr sz="2600" b="1" i="0">
+            <a:pPr algn="ctr">
+              <a:lnSpc>
+                <a:spcPct val="105000"/>
+              </a:lnSpc>
+            </a:pPr>
+            <a:r>
+              <a:rPr sz="1500" b="1" i="0">
                 <a:solidFill>
                   <a:srgbClr val="EAF1FA"/>
                 </a:solidFill>
                 <a:latin typeface="Segoe UI"/>
               </a:rPr>
-              <a:t>From working prototype to statewide deployment</a:t>
-            </a:r>
-          </a:p>
-        </p:txBody>
-      </p:sp>
-      <p:sp>
-        <p:nvSpPr>
-          <p:cNvPr id="6" name="Rounded Rectangle 5"/>
+              <a:t>Full Audit Trail</a:t>
+            </a:r>
+          </a:p>
+        </p:txBody>
+      </p:sp>
+      <p:sp>
+        <p:nvSpPr>
+          <p:cNvPr id="11" name="TextBox 10"/>
+          <p:cNvSpPr txBox="1"/>
+          <p:nvPr/>
+        </p:nvSpPr>
+        <p:spPr>
+          <a:xfrm>
+            <a:off x="3666744" y="3657600"/>
+            <a:ext cx="2331720" cy="1097280"/>
+          </a:xfrm>
+          <a:prstGeom prst="rect">
+            <a:avLst/>
+          </a:prstGeom>
+          <a:noFill/>
+        </p:spPr>
+        <p:txBody>
+          <a:bodyPr wrap="square" anchor="t">
+            <a:spAutoFit/>
+          </a:bodyPr>
+          <a:lstStyle/>
+          <a:p>
+            <a:pPr algn="ctr">
+              <a:lnSpc>
+                <a:spcPct val="105000"/>
+              </a:lnSpc>
+            </a:pPr>
+            <a:r>
+              <a:rPr sz="1250" b="0" i="0">
+                <a:solidFill>
+                  <a:srgbClr val="93A9C2"/>
+                </a:solidFill>
+                <a:latin typeface="Segoe UI"/>
+              </a:rPr>
+              <a:t>Every login, action and dispatch logged</a:t>
+            </a:r>
+          </a:p>
+        </p:txBody>
+      </p:sp>
+      <p:sp>
+        <p:nvSpPr>
+          <p:cNvPr id="12" name="Rounded Rectangle 11"/>
           <p:cNvSpPr/>
           <p:nvPr/>
         </p:nvSpPr>
         <p:spPr>
           <a:xfrm>
-            <a:off x="777240" y="1874519"/>
-            <a:ext cx="3429000" cy="2011680"/>
+            <a:off x="6281928" y="2103120"/>
+            <a:ext cx="2606040" cy="2743200"/>
           </a:xfrm>
           <a:prstGeom prst="roundRect">
             <a:avLst/>
@@ -6692,7 +7161,7 @@
           </a:solidFill>
           <a:ln w="12700">
             <a:solidFill>
-              <a:srgbClr val="2B8CFF"/>
+              <a:srgbClr val="182C4C"/>
             </a:solidFill>
           </a:ln>
           <a:effectLst/>
@@ -6721,14 +7190,14 @@
       </p:sp>
       <p:sp>
         <p:nvSpPr>
-          <p:cNvPr id="7" name="TextBox 6"/>
-          <p:cNvSpPr txBox="1"/>
-          <p:nvPr/>
-        </p:nvSpPr>
-        <p:spPr>
-          <a:xfrm>
-            <a:off x="777240" y="2057400"/>
-            <a:ext cx="3429000" cy="457200"/>
+          <p:cNvPr id="13" name="TextBox 12"/>
+          <p:cNvSpPr txBox="1"/>
+          <p:nvPr/>
+        </p:nvSpPr>
+        <p:spPr>
+          <a:xfrm>
+            <a:off x="6281928" y="2331720"/>
+            <a:ext cx="2606040" cy="640080"/>
           </a:xfrm>
           <a:prstGeom prst="rect">
             <a:avLst/>
@@ -6747,27 +7216,27 @@
               </a:lnSpc>
             </a:pPr>
             <a:r>
-              <a:rPr sz="1700" b="1" i="0">
-                <a:solidFill>
-                  <a:srgbClr val="2B8CFF"/>
-                </a:solidFill>
-                <a:latin typeface="Segoe UI"/>
-              </a:rPr>
-              <a:t>PILOT</a:t>
-            </a:r>
-          </a:p>
-        </p:txBody>
-      </p:sp>
-      <p:sp>
-        <p:nvSpPr>
-          <p:cNvPr id="8" name="TextBox 7"/>
-          <p:cNvSpPr txBox="1"/>
-          <p:nvPr/>
-        </p:nvSpPr>
-        <p:spPr>
-          <a:xfrm>
-            <a:off x="777240" y="2514600"/>
-            <a:ext cx="3429000" cy="411480"/>
+              <a:rPr sz="3200" b="0" i="0">
+                <a:solidFill>
+                  <a:srgbClr val="25D8F0"/>
+                </a:solidFill>
+                <a:latin typeface="Segoe UI"/>
+              </a:rPr>
+              <a:t>⚖️</a:t>
+            </a:r>
+          </a:p>
+        </p:txBody>
+      </p:sp>
+      <p:sp>
+        <p:nvSpPr>
+          <p:cNvPr id="14" name="TextBox 13"/>
+          <p:cNvSpPr txBox="1"/>
+          <p:nvPr/>
+        </p:nvSpPr>
+        <p:spPr>
+          <a:xfrm>
+            <a:off x="6373368" y="3108960"/>
+            <a:ext cx="2423160" cy="548640"/>
           </a:xfrm>
           <a:prstGeom prst="rect">
             <a:avLst/>
@@ -6786,27 +7255,27 @@
               </a:lnSpc>
             </a:pPr>
             <a:r>
-              <a:rPr sz="1400" b="1" i="0">
+              <a:rPr sz="1500" b="1" i="0">
                 <a:solidFill>
                   <a:srgbClr val="EAF1FA"/>
                 </a:solidFill>
                 <a:latin typeface="Segoe UI"/>
               </a:rPr>
-              <a:t>1 district</a:t>
-            </a:r>
-          </a:p>
-        </p:txBody>
-      </p:sp>
-      <p:sp>
-        <p:nvSpPr>
-          <p:cNvPr id="9" name="TextBox 8"/>
-          <p:cNvSpPr txBox="1"/>
-          <p:nvPr/>
-        </p:nvSpPr>
-        <p:spPr>
-          <a:xfrm>
-            <a:off x="914400" y="2971800"/>
-            <a:ext cx="3154680" cy="822960"/>
+              <a:t>DPDP Act 2023</a:t>
+            </a:r>
+          </a:p>
+        </p:txBody>
+      </p:sp>
+      <p:sp>
+        <p:nvSpPr>
+          <p:cNvPr id="15" name="TextBox 14"/>
+          <p:cNvSpPr txBox="1"/>
+          <p:nvPr/>
+        </p:nvSpPr>
+        <p:spPr>
+          <a:xfrm>
+            <a:off x="6419088" y="3657600"/>
+            <a:ext cx="2331720" cy="1097280"/>
           </a:xfrm>
           <a:prstGeom prst="rect">
             <a:avLst/>
@@ -6831,30 +7300,32 @@
                 </a:solidFill>
                 <a:latin typeface="Segoe UI"/>
               </a:rPr>
-              <a:t>Registry + GIS, ANPR + face, validate on real cameras</a:t>
-            </a:r>
-          </a:p>
-        </p:txBody>
-      </p:sp>
-      <p:sp>
-        <p:nvSpPr>
-          <p:cNvPr id="10" name="Right Arrow 9"/>
+              <a:t>Purpose-limited, retention-bound, access-controlled PII</a:t>
+            </a:r>
+          </a:p>
+        </p:txBody>
+      </p:sp>
+      <p:sp>
+        <p:nvSpPr>
+          <p:cNvPr id="16" name="Rounded Rectangle 15"/>
           <p:cNvSpPr/>
           <p:nvPr/>
         </p:nvSpPr>
         <p:spPr>
           <a:xfrm>
-            <a:off x="4224527" y="2743200"/>
-            <a:ext cx="146304" cy="292608"/>
-          </a:xfrm>
-          <a:prstGeom prst="rightArrow">
+            <a:off x="9034272" y="2103120"/>
+            <a:ext cx="2606040" cy="2743200"/>
+          </a:xfrm>
+          <a:prstGeom prst="roundRect">
             <a:avLst/>
           </a:prstGeom>
           <a:solidFill>
-            <a:srgbClr val="2B8CFF"/>
+            <a:srgbClr val="14223A"/>
           </a:solidFill>
-          <a:ln>
-            <a:noFill/>
+          <a:ln w="12700">
+            <a:solidFill>
+              <a:srgbClr val="182C4C"/>
+            </a:solidFill>
           </a:ln>
           <a:effectLst/>
         </p:spPr>
@@ -6882,60 +7353,14 @@
       </p:sp>
       <p:sp>
         <p:nvSpPr>
-          <p:cNvPr id="11" name="Rounded Rectangle 10"/>
-          <p:cNvSpPr/>
-          <p:nvPr/>
-        </p:nvSpPr>
-        <p:spPr>
-          <a:xfrm>
-            <a:off x="4389120" y="1874519"/>
-            <a:ext cx="3429000" cy="2011680"/>
-          </a:xfrm>
-          <a:prstGeom prst="roundRect">
-            <a:avLst/>
-          </a:prstGeom>
-          <a:solidFill>
-            <a:srgbClr val="14223A"/>
-          </a:solidFill>
-          <a:ln w="12700">
-            <a:solidFill>
-              <a:srgbClr val="25D8F0"/>
-            </a:solidFill>
-          </a:ln>
-          <a:effectLst/>
-        </p:spPr>
-        <p:style>
-          <a:lnRef idx="1">
-            <a:schemeClr val="accent1"/>
-          </a:lnRef>
-          <a:fillRef idx="3">
-            <a:schemeClr val="accent1"/>
-          </a:fillRef>
-          <a:effectRef idx="2">
-            <a:schemeClr val="accent1"/>
-          </a:effectRef>
-          <a:fontRef idx="minor">
-            <a:schemeClr val="lt1"/>
-          </a:fontRef>
-        </p:style>
-        <p:txBody>
-          <a:bodyPr rtlCol="0" anchor="ctr"/>
-          <a:lstStyle/>
-          <a:p>
-            <a:pPr algn="ctr"/>
-          </a:p>
-        </p:txBody>
-      </p:sp>
-      <p:sp>
-        <p:nvSpPr>
-          <p:cNvPr id="12" name="TextBox 11"/>
-          <p:cNvSpPr txBox="1"/>
-          <p:nvPr/>
-        </p:nvSpPr>
-        <p:spPr>
-          <a:xfrm>
-            <a:off x="4389120" y="2057400"/>
-            <a:ext cx="3429000" cy="457200"/>
+          <p:cNvPr id="17" name="TextBox 16"/>
+          <p:cNvSpPr txBox="1"/>
+          <p:nvPr/>
+        </p:nvSpPr>
+        <p:spPr>
+          <a:xfrm>
+            <a:off x="9034272" y="2331720"/>
+            <a:ext cx="2606040" cy="640080"/>
           </a:xfrm>
           <a:prstGeom prst="rect">
             <a:avLst/>
@@ -6954,27 +7379,27 @@
               </a:lnSpc>
             </a:pPr>
             <a:r>
-              <a:rPr sz="1700" b="1" i="0">
+              <a:rPr sz="3200" b="0" i="0">
                 <a:solidFill>
                   <a:srgbClr val="25D8F0"/>
                 </a:solidFill>
                 <a:latin typeface="Segoe UI"/>
               </a:rPr>
-              <a:t>REGIONAL</a:t>
-            </a:r>
-          </a:p>
-        </p:txBody>
-      </p:sp>
-      <p:sp>
-        <p:nvSpPr>
-          <p:cNvPr id="13" name="TextBox 12"/>
-          <p:cNvSpPr txBox="1"/>
-          <p:nvPr/>
-        </p:nvSpPr>
-        <p:spPr>
-          <a:xfrm>
-            <a:off x="4389120" y="2514600"/>
-            <a:ext cx="3429000" cy="411480"/>
+              <a:t>🛰️</a:t>
+            </a:r>
+          </a:p>
+        </p:txBody>
+      </p:sp>
+      <p:sp>
+        <p:nvSpPr>
+          <p:cNvPr id="18" name="TextBox 17"/>
+          <p:cNvSpPr txBox="1"/>
+          <p:nvPr/>
+        </p:nvSpPr>
+        <p:spPr>
+          <a:xfrm>
+            <a:off x="9125712" y="3108960"/>
+            <a:ext cx="2423160" cy="548640"/>
           </a:xfrm>
           <a:prstGeom prst="rect">
             <a:avLst/>
@@ -6993,27 +7418,27 @@
               </a:lnSpc>
             </a:pPr>
             <a:r>
-              <a:rPr sz="1400" b="1" i="0">
+              <a:rPr sz="1500" b="1" i="0">
                 <a:solidFill>
                   <a:srgbClr val="EAF1FA"/>
                 </a:solidFill>
                 <a:latin typeface="Segoe UI"/>
               </a:rPr>
-              <a:t>1 zone</a:t>
-            </a:r>
-          </a:p>
-        </p:txBody>
-      </p:sp>
-      <p:sp>
-        <p:nvSpPr>
-          <p:cNvPr id="14" name="TextBox 13"/>
-          <p:cNvSpPr txBox="1"/>
-          <p:nvPr/>
-        </p:nvSpPr>
-        <p:spPr>
-          <a:xfrm>
-            <a:off x="4526280" y="2971800"/>
-            <a:ext cx="3154680" cy="822960"/>
+              <a:t>Secure &amp; Isolated</a:t>
+            </a:r>
+          </a:p>
+        </p:txBody>
+      </p:sp>
+      <p:sp>
+        <p:nvSpPr>
+          <p:cNvPr id="19" name="TextBox 18"/>
+          <p:cNvSpPr txBox="1"/>
+          <p:nvPr/>
+        </p:nvSpPr>
+        <p:spPr>
+          <a:xfrm>
+            <a:off x="9171432" y="3657600"/>
+            <a:ext cx="2331720" cy="1097280"/>
           </a:xfrm>
           <a:prstGeom prst="rect">
             <a:avLst/>
@@ -7038,111 +7463,21 @@
                 </a:solidFill>
                 <a:latin typeface="Segoe UI"/>
               </a:rPr>
-              <a:t>HA/DR, live VAHAN &amp; eGujCop, production SSO + audit</a:t>
-            </a:r>
-          </a:p>
-        </p:txBody>
-      </p:sp>
-      <p:sp>
-        <p:nvSpPr>
-          <p:cNvPr id="15" name="Right Arrow 14"/>
-          <p:cNvSpPr/>
-          <p:nvPr/>
-        </p:nvSpPr>
-        <p:spPr>
-          <a:xfrm>
-            <a:off x="7836408" y="2743200"/>
-            <a:ext cx="146304" cy="292608"/>
-          </a:xfrm>
-          <a:prstGeom prst="rightArrow">
-            <a:avLst/>
-          </a:prstGeom>
-          <a:solidFill>
-            <a:srgbClr val="25D8F0"/>
-          </a:solidFill>
-          <a:ln>
-            <a:noFill/>
-          </a:ln>
-          <a:effectLst/>
-        </p:spPr>
-        <p:style>
-          <a:lnRef idx="1">
-            <a:schemeClr val="accent1"/>
-          </a:lnRef>
-          <a:fillRef idx="3">
-            <a:schemeClr val="accent1"/>
-          </a:fillRef>
-          <a:effectRef idx="2">
-            <a:schemeClr val="accent1"/>
-          </a:effectRef>
-          <a:fontRef idx="minor">
-            <a:schemeClr val="lt1"/>
-          </a:fontRef>
-        </p:style>
-        <p:txBody>
-          <a:bodyPr rtlCol="0" anchor="ctr"/>
-          <a:lstStyle/>
-          <a:p>
-            <a:pPr algn="ctr"/>
-          </a:p>
-        </p:txBody>
-      </p:sp>
-      <p:sp>
-        <p:nvSpPr>
-          <p:cNvPr id="16" name="Rounded Rectangle 15"/>
-          <p:cNvSpPr/>
-          <p:nvPr/>
-        </p:nvSpPr>
-        <p:spPr>
-          <a:xfrm>
-            <a:off x="8001000" y="1874519"/>
-            <a:ext cx="3429000" cy="2011680"/>
-          </a:xfrm>
-          <a:prstGeom prst="roundRect">
-            <a:avLst/>
-          </a:prstGeom>
-          <a:solidFill>
-            <a:srgbClr val="14223A"/>
-          </a:solidFill>
-          <a:ln w="12700">
-            <a:solidFill>
-              <a:srgbClr val="2AD477"/>
-            </a:solidFill>
-          </a:ln>
-          <a:effectLst/>
-        </p:spPr>
-        <p:style>
-          <a:lnRef idx="1">
-            <a:schemeClr val="accent1"/>
-          </a:lnRef>
-          <a:fillRef idx="3">
-            <a:schemeClr val="accent1"/>
-          </a:fillRef>
-          <a:effectRef idx="2">
-            <a:schemeClr val="accent1"/>
-          </a:effectRef>
-          <a:fontRef idx="minor">
-            <a:schemeClr val="lt1"/>
-          </a:fontRef>
-        </p:style>
-        <p:txBody>
-          <a:bodyPr rtlCol="0" anchor="ctr"/>
-          <a:lstStyle/>
-          <a:p>
-            <a:pPr algn="ctr"/>
-          </a:p>
-        </p:txBody>
-      </p:sp>
-      <p:sp>
-        <p:nvSpPr>
-          <p:cNvPr id="17" name="TextBox 16"/>
-          <p:cNvSpPr txBox="1"/>
-          <p:nvPr/>
-        </p:nvSpPr>
-        <p:spPr>
-          <a:xfrm>
-            <a:off x="8001000" y="2057400"/>
-            <a:ext cx="3429000" cy="457200"/>
+              <a:t>TLS transport, tamper detection, department isolation</a:t>
+            </a:r>
+          </a:p>
+        </p:txBody>
+      </p:sp>
+      <p:sp>
+        <p:nvSpPr>
+          <p:cNvPr id="20" name="TextBox 19"/>
+          <p:cNvSpPr txBox="1"/>
+          <p:nvPr/>
+        </p:nvSpPr>
+        <p:spPr>
+          <a:xfrm>
+            <a:off x="822960" y="5120640"/>
+            <a:ext cx="10515600" cy="548640"/>
           </a:xfrm>
           <a:prstGeom prst="rect">
             <a:avLst/>
@@ -7161,27 +7496,27 @@
               </a:lnSpc>
             </a:pPr>
             <a:r>
-              <a:rPr sz="1700" b="1" i="0">
-                <a:solidFill>
-                  <a:srgbClr val="2AD477"/>
-                </a:solidFill>
-                <a:latin typeface="Segoe UI"/>
-              </a:rPr>
-              <a:t>STATEWIDE</a:t>
-            </a:r>
-          </a:p>
-        </p:txBody>
-      </p:sp>
-      <p:sp>
-        <p:nvSpPr>
-          <p:cNvPr id="18" name="TextBox 17"/>
-          <p:cNvSpPr txBox="1"/>
-          <p:nvPr/>
-        </p:nvSpPr>
-        <p:spPr>
-          <a:xfrm>
-            <a:off x="8001000" y="2514600"/>
-            <a:ext cx="3429000" cy="411480"/>
+              <a:rPr sz="1500" b="0" i="1">
+                <a:solidFill>
+                  <a:srgbClr val="93A9C2"/>
+                </a:solidFill>
+                <a:latin typeface="Segoe UI"/>
+              </a:rPr>
+              <a:t>Cameras stay in their department networks — Sentinel federates with least-privilege, read-only access.</a:t>
+            </a:r>
+          </a:p>
+        </p:txBody>
+      </p:sp>
+      <p:sp>
+        <p:nvSpPr>
+          <p:cNvPr id="21" name="TextBox 20"/>
+          <p:cNvSpPr txBox="1"/>
+          <p:nvPr/>
+        </p:nvSpPr>
+        <p:spPr>
+          <a:xfrm>
+            <a:off x="822960" y="6419088"/>
+            <a:ext cx="7315200" cy="320040"/>
           </a:xfrm>
           <a:prstGeom prst="rect">
             <a:avLst/>
@@ -7194,33 +7529,33 @@
           </a:bodyPr>
           <a:lstStyle/>
           <a:p>
-            <a:pPr algn="ctr">
-              <a:lnSpc>
-                <a:spcPct val="105000"/>
-              </a:lnSpc>
-            </a:pPr>
-            <a:r>
-              <a:rPr sz="1400" b="1" i="0">
-                <a:solidFill>
-                  <a:srgbClr val="EAF1FA"/>
-                </a:solidFill>
-                <a:latin typeface="Segoe UI"/>
-              </a:rPr>
-              <a:t>~80,000 cams</a:t>
-            </a:r>
-          </a:p>
-        </p:txBody>
-      </p:sp>
-      <p:sp>
-        <p:nvSpPr>
-          <p:cNvPr id="19" name="TextBox 18"/>
-          <p:cNvSpPr txBox="1"/>
-          <p:nvPr/>
-        </p:nvSpPr>
-        <p:spPr>
-          <a:xfrm>
-            <a:off x="8138160" y="2971800"/>
-            <a:ext cx="3154680" cy="822960"/>
+            <a:pPr algn="l">
+              <a:lnSpc>
+                <a:spcPct val="105000"/>
+              </a:lnSpc>
+            </a:pPr>
+            <a:r>
+              <a:rPr sz="1000" b="0" i="0">
+                <a:solidFill>
+                  <a:srgbClr val="93A9C2"/>
+                </a:solidFill>
+                <a:latin typeface="Segoe UI"/>
+              </a:rPr>
+              <a:t>SENTINEL  ·  Gujarat Police Innovation Hackathon 2026</a:t>
+            </a:r>
+          </a:p>
+        </p:txBody>
+      </p:sp>
+      <p:sp>
+        <p:nvSpPr>
+          <p:cNvPr id="22" name="TextBox 21"/>
+          <p:cNvSpPr txBox="1"/>
+          <p:nvPr/>
+        </p:nvSpPr>
+        <p:spPr>
+          <a:xfrm>
+            <a:off x="11430000" y="6419088"/>
+            <a:ext cx="548640" cy="320040"/>
           </a:xfrm>
           <a:prstGeom prst="rect">
             <a:avLst/>
@@ -7233,136 +7568,19 @@
           </a:bodyPr>
           <a:lstStyle/>
           <a:p>
-            <a:pPr algn="ctr">
-              <a:lnSpc>
-                <a:spcPct val="105000"/>
-              </a:lnSpc>
-            </a:pPr>
-            <a:r>
-              <a:rPr sz="1250" b="0" i="0">
+            <a:pPr algn="r">
+              <a:lnSpc>
+                <a:spcPct val="105000"/>
+              </a:lnSpc>
+            </a:pPr>
+            <a:r>
+              <a:rPr sz="1000" b="0" i="0">
                 <a:solidFill>
                   <a:srgbClr val="93A9C2"/>
                 </a:solidFill>
                 <a:latin typeface="Segoe UI"/>
               </a:rPr>
-              <a:t>Edge fleet, language search, IoT sensor fusion, SOC</a:t>
-            </a:r>
-          </a:p>
-        </p:txBody>
-      </p:sp>
-      <p:sp>
-        <p:nvSpPr>
-          <p:cNvPr id="20" name="TextBox 19"/>
-          <p:cNvSpPr txBox="1"/>
-          <p:nvPr/>
-        </p:nvSpPr>
-        <p:spPr>
-          <a:xfrm>
-            <a:off x="0" y="4343400"/>
-            <a:ext cx="12191695" cy="822960"/>
-          </a:xfrm>
-          <a:prstGeom prst="rect">
-            <a:avLst/>
-          </a:prstGeom>
-          <a:noFill/>
-        </p:spPr>
-        <p:txBody>
-          <a:bodyPr wrap="square" anchor="t">
-            <a:spAutoFit/>
-          </a:bodyPr>
-          <a:lstStyle/>
-          <a:p>
-            <a:pPr algn="ctr">
-              <a:lnSpc>
-                <a:spcPct val="105000"/>
-              </a:lnSpc>
-            </a:pPr>
-            <a:r>
-              <a:rPr sz="4000" b="1" i="0">
-                <a:solidFill>
-                  <a:srgbClr val="25D8F0"/>
-                </a:solidFill>
-                <a:latin typeface="Segoe UI"/>
-              </a:rPr>
-              <a:t>Protect What Matters.</a:t>
-            </a:r>
-          </a:p>
-        </p:txBody>
-      </p:sp>
-      <p:sp>
-        <p:nvSpPr>
-          <p:cNvPr id="21" name="TextBox 20"/>
-          <p:cNvSpPr txBox="1"/>
-          <p:nvPr/>
-        </p:nvSpPr>
-        <p:spPr>
-          <a:xfrm>
-            <a:off x="0" y="5212080"/>
-            <a:ext cx="12191695" cy="457200"/>
-          </a:xfrm>
-          <a:prstGeom prst="rect">
-            <a:avLst/>
-          </a:prstGeom>
-          <a:noFill/>
-        </p:spPr>
-        <p:txBody>
-          <a:bodyPr wrap="square" anchor="t">
-            <a:spAutoFit/>
-          </a:bodyPr>
-          <a:lstStyle/>
-          <a:p>
-            <a:pPr algn="ctr">
-              <a:lnSpc>
-                <a:spcPct val="105000"/>
-              </a:lnSpc>
-            </a:pPr>
-            <a:r>
-              <a:rPr sz="1800" b="0" i="0">
-                <a:solidFill>
-                  <a:srgbClr val="EAF1FA"/>
-                </a:solidFill>
-                <a:latin typeface="Segoe UI"/>
-              </a:rPr>
-              <a:t>Sentinel — built on the cameras Gujarat already owns.</a:t>
-            </a:r>
-          </a:p>
-        </p:txBody>
-      </p:sp>
-      <p:sp>
-        <p:nvSpPr>
-          <p:cNvPr id="22" name="TextBox 21"/>
-          <p:cNvSpPr txBox="1"/>
-          <p:nvPr/>
-        </p:nvSpPr>
-        <p:spPr>
-          <a:xfrm>
-            <a:off x="0" y="5806440"/>
-            <a:ext cx="12191695" cy="365760"/>
-          </a:xfrm>
-          <a:prstGeom prst="rect">
-            <a:avLst/>
-          </a:prstGeom>
-          <a:noFill/>
-        </p:spPr>
-        <p:txBody>
-          <a:bodyPr wrap="square" anchor="t">
-            <a:spAutoFit/>
-          </a:bodyPr>
-          <a:lstStyle/>
-          <a:p>
-            <a:pPr algn="ctr">
-              <a:lnSpc>
-                <a:spcPct val="105000"/>
-              </a:lnSpc>
-            </a:pPr>
-            <a:r>
-              <a:rPr sz="1400" b="1" i="0">
-                <a:solidFill>
-                  <a:srgbClr val="93A9C2"/>
-                </a:solidFill>
-                <a:latin typeface="Segoe UI"/>
-              </a:rPr>
-              <a:t>Project Author:  Nikunj Rameshbhai Maheshwari</a:t>
+              <a:t>14</a:t>
             </a:r>
           </a:p>
         </p:txBody>
@@ -7413,20 +7631,24 @@
           <a:noFill/>
         </p:spPr>
         <p:txBody>
-          <a:bodyPr wrap="square">
-            <a:spAutoFit/>
-          </a:bodyPr>
-          <a:lstStyle/>
-          <a:p>
-            <a:pPr algn="l"/>
-            <a:r>
-              <a:rPr sz="1300" b="1">
+          <a:bodyPr wrap="square" anchor="t">
+            <a:spAutoFit/>
+          </a:bodyPr>
+          <a:lstStyle/>
+          <a:p>
+            <a:pPr algn="l">
+              <a:lnSpc>
+                <a:spcPct val="105000"/>
+              </a:lnSpc>
+            </a:pPr>
+            <a:r>
+              <a:rPr sz="1300" b="1" i="0">
                 <a:solidFill>
                   <a:srgbClr val="25D8F0"/>
                 </a:solidFill>
                 <a:latin typeface="Segoe UI"/>
               </a:rPr>
-              <a:t>WANTED PERSON RECOGNITION</a:t>
+              <a:t>TECHNOLOGY &amp; INTEGRATION</a:t>
             </a:r>
           </a:p>
         </p:txBody>
@@ -7448,20 +7670,24 @@
           <a:noFill/>
         </p:spPr>
         <p:txBody>
-          <a:bodyPr wrap="square">
-            <a:spAutoFit/>
-          </a:bodyPr>
-          <a:lstStyle/>
-          <a:p>
-            <a:pPr algn="l"/>
-            <a:r>
-              <a:rPr sz="2600" b="1">
+          <a:bodyPr wrap="square" anchor="t">
+            <a:spAutoFit/>
+          </a:bodyPr>
+          <a:lstStyle/>
+          <a:p>
+            <a:pPr algn="l">
+              <a:lnSpc>
+                <a:spcPct val="105000"/>
+              </a:lnSpc>
+            </a:pPr>
+            <a:r>
+              <a:rPr sz="2600" b="1" i="0">
                 <a:solidFill>
                   <a:srgbClr val="EAF1FA"/>
                 </a:solidFill>
                 <a:latin typeface="Segoe UI"/>
               </a:rPr>
-              <a:t>Every face on camera, checked against the wanted &amp; missing list</a:t>
+              <a:t>Production-credible stack — easy camera integration</a:t>
             </a:r>
           </a:p>
         </p:txBody>
@@ -7474,18 +7700,18 @@
         </p:nvSpPr>
         <p:spPr>
           <a:xfrm>
-            <a:off x="868680" y="1874519"/>
-            <a:ext cx="5120640" cy="3931920"/>
+            <a:off x="777240" y="1920240"/>
+            <a:ext cx="5212080" cy="3840480"/>
           </a:xfrm>
           <a:prstGeom prst="roundRect">
             <a:avLst/>
           </a:prstGeom>
           <a:solidFill>
-            <a:srgbClr val="182C4C"/>
+            <a:srgbClr val="14223A"/>
           </a:solidFill>
           <a:ln w="12700">
             <a:solidFill>
-              <a:srgbClr val="FF3B5C"/>
+              <a:srgbClr val="182C4C"/>
             </a:solidFill>
           </a:ln>
           <a:effectLst/>
@@ -7520,29 +7746,33 @@
         </p:nvSpPr>
         <p:spPr>
           <a:xfrm>
-            <a:off x="1143000" y="2057399"/>
-            <a:ext cx="4572000" cy="365760"/>
-          </a:xfrm>
-          <a:prstGeom prst="rect">
-            <a:avLst/>
-          </a:prstGeom>
-          <a:noFill/>
-        </p:spPr>
-        <p:txBody>
-          <a:bodyPr wrap="square">
-            <a:spAutoFit/>
-          </a:bodyPr>
-          <a:lstStyle/>
-          <a:p>
-            <a:pPr algn="l"/>
-            <a:r>
-              <a:rPr sz="1400" b="1">
-                <a:solidFill>
-                  <a:srgbClr val="FF3B5C"/>
-                </a:solidFill>
-                <a:latin typeface="Segoe UI"/>
-              </a:rPr>
-              <a:t>FACE WATCHLIST MATCH</a:t>
+            <a:off x="1005840" y="2103120"/>
+            <a:ext cx="4754880" cy="365760"/>
+          </a:xfrm>
+          <a:prstGeom prst="rect">
+            <a:avLst/>
+          </a:prstGeom>
+          <a:noFill/>
+        </p:spPr>
+        <p:txBody>
+          <a:bodyPr wrap="square" anchor="t">
+            <a:spAutoFit/>
+          </a:bodyPr>
+          <a:lstStyle/>
+          <a:p>
+            <a:pPr algn="l">
+              <a:lnSpc>
+                <a:spcPct val="105000"/>
+              </a:lnSpc>
+            </a:pPr>
+            <a:r>
+              <a:rPr sz="1400" b="1" i="0">
+                <a:solidFill>
+                  <a:srgbClr val="25D8F0"/>
+                </a:solidFill>
+                <a:latin typeface="Segoe UI"/>
+              </a:rPr>
+              <a:t>TECHNOLOGY STACK</a:t>
             </a:r>
           </a:p>
         </p:txBody>
@@ -7555,81 +7785,129 @@
         </p:nvSpPr>
         <p:spPr>
           <a:xfrm>
-            <a:off x="1143000" y="2560319"/>
-            <a:ext cx="4572000" cy="3017520"/>
-          </a:xfrm>
-          <a:prstGeom prst="rect">
-            <a:avLst/>
-          </a:prstGeom>
-          <a:noFill/>
-        </p:spPr>
-        <p:txBody>
-          <a:bodyPr wrap="square">
-            <a:spAutoFit/>
-          </a:bodyPr>
-          <a:lstStyle/>
-          <a:p>
-            <a:pPr>
-              <a:spcAft>
-                <a:spcPts val="1000"/>
-              </a:spcAft>
-            </a:pPr>
-            <a:r>
-              <a:rPr sz="1450">
+            <a:off x="1005840" y="2560320"/>
+            <a:ext cx="4754880" cy="3017520"/>
+          </a:xfrm>
+          <a:prstGeom prst="rect">
+            <a:avLst/>
+          </a:prstGeom>
+          <a:noFill/>
+        </p:spPr>
+        <p:txBody>
+          <a:bodyPr wrap="square" anchor="t">
+            <a:spAutoFit/>
+          </a:bodyPr>
+          <a:lstStyle/>
+          <a:p>
+            <a:pPr algn="l">
+              <a:lnSpc>
+                <a:spcPct val="115000"/>
+              </a:lnSpc>
+            </a:pPr>
+            <a:r>
+              <a:rPr sz="1400" b="0" i="0">
                 <a:solidFill>
                   <a:srgbClr val="EAF1FA"/>
                 </a:solidFill>
                 <a:latin typeface="Segoe UI"/>
               </a:rPr>
-              <a:t>•  Every detected face is embedded and matched in real time against eGujCop wanted / missing-persons records</a:t>
-            </a:r>
-          </a:p>
-          <a:p>
-            <a:pPr>
-              <a:spcAft>
-                <a:spcPts val="1000"/>
-              </a:spcAft>
-            </a:pPr>
-            <a:r>
-              <a:rPr sz="1450">
+              <a:t>AI/Edge:  Intel OpenVINO · YOLOv8 · fast-plate-ocr · InsightFace · CLIP</a:t>
+            </a:r>
+          </a:p>
+          <a:p>
+            <a:pPr algn="l">
+              <a:lnSpc>
+                <a:spcPct val="115000"/>
+              </a:lnSpc>
+            </a:pPr>
+            <a:r>
+              <a:rPr sz="1400" b="0" i="0">
                 <a:solidFill>
                   <a:srgbClr val="EAF1FA"/>
                 </a:solidFill>
                 <a:latin typeface="Segoe UI"/>
               </a:rPr>
-              <a:t>•  Works on angled, partial or low-light faces using InsightFace embeddings + vector similarity search</a:t>
-            </a:r>
-          </a:p>
-          <a:p>
-            <a:pPr>
-              <a:spcAft>
-                <a:spcPts val="1000"/>
-              </a:spcAft>
-            </a:pPr>
-            <a:r>
-              <a:rPr sz="1450">
+              <a:t/>
+            </a:r>
+          </a:p>
+          <a:p>
+            <a:pPr algn="l">
+              <a:lnSpc>
+                <a:spcPct val="115000"/>
+              </a:lnSpc>
+            </a:pPr>
+            <a:r>
+              <a:rPr sz="1400" b="0" i="0">
                 <a:solidFill>
                   <a:srgbClr val="EAF1FA"/>
                 </a:solidFill>
                 <a:latin typeface="Segoe UI"/>
               </a:rPr>
-              <a:t>•  Configurable match threshold balances recall against false positives for field use</a:t>
-            </a:r>
-          </a:p>
-          <a:p>
-            <a:pPr>
-              <a:spcAft>
-                <a:spcPts val="1000"/>
-              </a:spcAft>
-            </a:pPr>
-            <a:r>
-              <a:rPr sz="1450">
+              <a:t>Data:  PostgreSQL + PostGIS · Qdrant (vector DB)</a:t>
+            </a:r>
+          </a:p>
+          <a:p>
+            <a:pPr algn="l">
+              <a:lnSpc>
+                <a:spcPct val="115000"/>
+              </a:lnSpc>
+            </a:pPr>
+            <a:r>
+              <a:rPr sz="1400" b="0" i="0">
                 <a:solidFill>
                   <a:srgbClr val="EAF1FA"/>
                 </a:solidFill>
                 <a:latin typeface="Segoe UI"/>
               </a:rPr>
-              <a:t>•  Instant alert with match confidence, camera ID and timestamp — same MQTT alert backbone as ANPR</a:t>
+              <a:t/>
+            </a:r>
+          </a:p>
+          <a:p>
+            <a:pPr algn="l">
+              <a:lnSpc>
+                <a:spcPct val="115000"/>
+              </a:lnSpc>
+            </a:pPr>
+            <a:r>
+              <a:rPr sz="1400" b="0" i="0">
+                <a:solidFill>
+                  <a:srgbClr val="EAF1FA"/>
+                </a:solidFill>
+                <a:latin typeface="Segoe UI"/>
+              </a:rPr>
+              <a:t>Backbone:  MQTT (Mosquitto) · MediaMTX · FFmpeg</a:t>
+            </a:r>
+          </a:p>
+          <a:p>
+            <a:pPr algn="l">
+              <a:lnSpc>
+                <a:spcPct val="115000"/>
+              </a:lnSpc>
+            </a:pPr>
+            <a:r>
+              <a:rPr sz="1400" b="0" i="0">
+                <a:solidFill>
+                  <a:srgbClr val="EAF1FA"/>
+                </a:solidFill>
+                <a:latin typeface="Segoe UI"/>
+              </a:rPr>
+              <a:t/>
+            </a:r>
+          </a:p>
+          <a:p>
+            <a:pPr algn="l">
+              <a:lnSpc>
+                <a:spcPct val="115000"/>
+              </a:lnSpc>
+            </a:pPr>
+            <a:r>
+              <a:rPr sz="1400" b="0" i="0">
+                <a:solidFill>
+                  <a:srgbClr val="EAF1FA"/>
+                </a:solidFill>
+                <a:latin typeface="Segoe UI"/>
+              </a:rPr>
+              <a:t>App:  FastAPI · Leaflet GIS · Docker</a:t>
             </a:r>
           </a:p>
         </p:txBody>
@@ -7642,8 +7920,8 @@
         </p:nvSpPr>
         <p:spPr>
           <a:xfrm>
-            <a:off x="6172200" y="1874519"/>
-            <a:ext cx="5120640" cy="3931920"/>
+            <a:off x="6172200" y="1920240"/>
+            <a:ext cx="5212080" cy="3840480"/>
           </a:xfrm>
           <a:prstGeom prst="roundRect">
             <a:avLst/>
@@ -7653,7 +7931,7 @@
           </a:solidFill>
           <a:ln w="12700">
             <a:solidFill>
-              <a:srgbClr val="2B8CFF"/>
+              <a:srgbClr val="182C4C"/>
             </a:solidFill>
           </a:ln>
           <a:effectLst/>
@@ -7680,30 +7958,45 @@
           </a:p>
         </p:txBody>
       </p:sp>
-      <p:pic>
-        <p:nvPicPr>
-          <p:cNvPr id="8" name="Picture 7" descr="face_clean_crop.png"/>
-          <p:cNvPicPr>
-            <a:picLocks noChangeAspect="1"/>
-          </p:cNvPicPr>
-          <p:nvPr/>
-        </p:nvPicPr>
-        <p:blipFill>
-          <a:blip r:embed="rId2"/>
-          <a:stretch>
-            <a:fillRect/>
-          </a:stretch>
-        </p:blipFill>
-        <p:spPr>
-          <a:xfrm>
-            <a:off x="6526155" y="2011679"/>
-            <a:ext cx="4412728" cy="3237600"/>
-          </a:xfrm>
-          <a:prstGeom prst="rect">
-            <a:avLst/>
-          </a:prstGeom>
-        </p:spPr>
-      </p:pic>
+      <p:sp>
+        <p:nvSpPr>
+          <p:cNvPr id="8" name="TextBox 7"/>
+          <p:cNvSpPr txBox="1"/>
+          <p:nvPr/>
+        </p:nvSpPr>
+        <p:spPr>
+          <a:xfrm>
+            <a:off x="6400800" y="2103120"/>
+            <a:ext cx="4754880" cy="365760"/>
+          </a:xfrm>
+          <a:prstGeom prst="rect">
+            <a:avLst/>
+          </a:prstGeom>
+          <a:noFill/>
+        </p:spPr>
+        <p:txBody>
+          <a:bodyPr wrap="square" anchor="t">
+            <a:spAutoFit/>
+          </a:bodyPr>
+          <a:lstStyle/>
+          <a:p>
+            <a:pPr algn="l">
+              <a:lnSpc>
+                <a:spcPct val="105000"/>
+              </a:lnSpc>
+            </a:pPr>
+            <a:r>
+              <a:rPr sz="1400" b="1" i="0">
+                <a:solidFill>
+                  <a:srgbClr val="2AD477"/>
+                </a:solidFill>
+                <a:latin typeface="Segoe UI"/>
+              </a:rPr>
+              <a:t>CAMERA INTEGRATION</a:t>
+            </a:r>
+          </a:p>
+        </p:txBody>
+      </p:sp>
       <p:sp>
         <p:nvSpPr>
           <p:cNvPr id="9" name="TextBox 8"/>
@@ -7712,117 +8005,136 @@
         </p:nvSpPr>
         <p:spPr>
           <a:xfrm>
-            <a:off x="6172200" y="5294999"/>
-            <a:ext cx="5120640" cy="374280"/>
-          </a:xfrm>
-          <a:prstGeom prst="rect">
-            <a:avLst/>
-          </a:prstGeom>
-          <a:noFill/>
-        </p:spPr>
-        <p:txBody>
-          <a:bodyPr wrap="square">
-            <a:spAutoFit/>
-          </a:bodyPr>
-          <a:lstStyle/>
-          <a:p>
-            <a:pPr algn="ctr"/>
-            <a:r>
-              <a:rPr sz="1250" b="1">
-                <a:solidFill>
-                  <a:srgbClr val="25D8F0"/>
-                </a:solidFill>
-                <a:latin typeface="Segoe UI"/>
-              </a:rPr>
-              <a:t>Live capture: webcam feed → instant “HIT” on a registered profile</a:t>
-            </a:r>
-          </a:p>
-        </p:txBody>
-      </p:sp>
-      <p:sp>
-        <p:nvSpPr>
-          <p:cNvPr id="10" name="Rounded Rectangle 9"/>
-          <p:cNvSpPr/>
-          <p:nvPr/>
-        </p:nvSpPr>
-        <p:spPr>
-          <a:xfrm>
-            <a:off x="868680" y="5931408"/>
-            <a:ext cx="10424160" cy="365760"/>
-          </a:xfrm>
-          <a:prstGeom prst="roundRect">
-            <a:avLst/>
-          </a:prstGeom>
-          <a:solidFill>
-            <a:srgbClr val="182C4C"/>
-          </a:solidFill>
-          <a:ln w="12700">
-            <a:solidFill>
-              <a:srgbClr val="F5B638"/>
-            </a:solidFill>
-          </a:ln>
-          <a:effectLst/>
-        </p:spPr>
-        <p:style>
-          <a:lnRef idx="1">
-            <a:schemeClr val="accent1"/>
-          </a:lnRef>
-          <a:fillRef idx="3">
-            <a:schemeClr val="accent1"/>
-          </a:fillRef>
-          <a:effectRef idx="2">
-            <a:schemeClr val="accent1"/>
-          </a:effectRef>
-          <a:fontRef idx="minor">
-            <a:schemeClr val="lt1"/>
-          </a:fontRef>
-        </p:style>
-        <p:txBody>
-          <a:bodyPr rtlCol="0" anchor="ctr"/>
-          <a:lstStyle/>
-          <a:p>
-            <a:pPr algn="ctr"/>
-          </a:p>
-        </p:txBody>
-      </p:sp>
-      <p:sp>
-        <p:nvSpPr>
-          <p:cNvPr id="11" name="TextBox 10"/>
-          <p:cNvSpPr txBox="1"/>
-          <p:nvPr/>
-        </p:nvSpPr>
-        <p:spPr>
-          <a:xfrm>
-            <a:off x="868680" y="5931408"/>
-            <a:ext cx="10424160" cy="365760"/>
-          </a:xfrm>
-          <a:prstGeom prst="rect">
-            <a:avLst/>
-          </a:prstGeom>
-          <a:noFill/>
-        </p:spPr>
-        <p:txBody>
-          <a:bodyPr wrap="square">
-            <a:spAutoFit/>
-          </a:bodyPr>
-          <a:lstStyle/>
-          <a:p>
-            <a:pPr algn="ctr"/>
-            <a:r>
-              <a:rPr sz="1300" b="1">
-                <a:solidFill>
-                  <a:srgbClr val="F5B638"/>
-                </a:solidFill>
-                <a:latin typeface="Segoe UI"/>
-              </a:rPr>
-              <a:t>★  Demonstrated live on an ordinary webcam — deployable on any existing camera the same way.</a:t>
-            </a:r>
-          </a:p>
-        </p:txBody>
-      </p:sp>
-      <p:sp>
-        <p:nvSpPr>
-          <p:cNvPr id="12" name="TextBox 11"/>
+            <a:off x="6400800" y="2560320"/>
+            <a:ext cx="4754880" cy="3017520"/>
+          </a:xfrm>
+          <a:prstGeom prst="rect">
+            <a:avLst/>
+          </a:prstGeom>
+          <a:noFill/>
+        </p:spPr>
+        <p:txBody>
+          <a:bodyPr wrap="square" anchor="t">
+            <a:spAutoFit/>
+          </a:bodyPr>
+          <a:lstStyle/>
+          <a:p>
+            <a:pPr algn="l">
+              <a:lnSpc>
+                <a:spcPct val="120000"/>
+              </a:lnSpc>
+            </a:pPr>
+            <a:r>
+              <a:rPr sz="1400" b="0" i="0">
+                <a:solidFill>
+                  <a:srgbClr val="EAF1FA"/>
+                </a:solidFill>
+                <a:latin typeface="Segoe UI"/>
+              </a:rPr>
+              <a:t>IP cameras — Easy:</a:t>
+            </a:r>
+          </a:p>
+          <a:p>
+            <a:pPr algn="l">
+              <a:lnSpc>
+                <a:spcPct val="120000"/>
+              </a:lnSpc>
+            </a:pPr>
+            <a:r>
+              <a:rPr sz="1400" b="0" i="0">
+                <a:solidFill>
+                  <a:srgbClr val="EAF1FA"/>
+                </a:solidFill>
+                <a:latin typeface="Segoe UI"/>
+              </a:rPr>
+              <a:t>Drop-in via RTSP / ONVIF. Point the gateway at the URL.</a:t>
+            </a:r>
+          </a:p>
+          <a:p>
+            <a:pPr algn="l">
+              <a:lnSpc>
+                <a:spcPct val="120000"/>
+              </a:lnSpc>
+            </a:pPr>
+            <a:r>
+              <a:rPr sz="1400" b="0" i="0">
+                <a:solidFill>
+                  <a:srgbClr val="EAF1FA"/>
+                </a:solidFill>
+                <a:latin typeface="Segoe UI"/>
+              </a:rPr>
+              <a:t/>
+            </a:r>
+          </a:p>
+          <a:p>
+            <a:pPr algn="l">
+              <a:lnSpc>
+                <a:spcPct val="120000"/>
+              </a:lnSpc>
+            </a:pPr>
+            <a:r>
+              <a:rPr sz="1400" b="0" i="0">
+                <a:solidFill>
+                  <a:srgbClr val="EAF1FA"/>
+                </a:solidFill>
+                <a:latin typeface="Segoe UI"/>
+              </a:rPr>
+              <a:t>Analog cameras — via DVR:</a:t>
+            </a:r>
+          </a:p>
+          <a:p>
+            <a:pPr algn="l">
+              <a:lnSpc>
+                <a:spcPct val="120000"/>
+              </a:lnSpc>
+            </a:pPr>
+            <a:r>
+              <a:rPr sz="1400" b="0" i="0">
+                <a:solidFill>
+                  <a:srgbClr val="EAF1FA"/>
+                </a:solidFill>
+                <a:latin typeface="Segoe UI"/>
+              </a:rPr>
+              <a:t>Use the DVR/NVR RTSP output, or an analog-to-IP encoder.</a:t>
+            </a:r>
+          </a:p>
+          <a:p>
+            <a:pPr algn="l">
+              <a:lnSpc>
+                <a:spcPct val="120000"/>
+              </a:lnSpc>
+            </a:pPr>
+            <a:r>
+              <a:rPr sz="1400" b="0" i="0">
+                <a:solidFill>
+                  <a:srgbClr val="EAF1FA"/>
+                </a:solidFill>
+                <a:latin typeface="Segoe UI"/>
+              </a:rPr>
+              <a:t/>
+            </a:r>
+          </a:p>
+          <a:p>
+            <a:pPr algn="l">
+              <a:lnSpc>
+                <a:spcPct val="120000"/>
+              </a:lnSpc>
+            </a:pPr>
+            <a:r>
+              <a:rPr sz="1400" b="0" i="0">
+                <a:solidFill>
+                  <a:srgbClr val="EAF1FA"/>
+                </a:solidFill>
+                <a:latin typeface="Segoe UI"/>
+              </a:rPr>
+              <a:t>Everything normalises to one RTSP URL per camera — exactly the hackathon feed model.</a:t>
+            </a:r>
+          </a:p>
+        </p:txBody>
+      </p:sp>
+      <p:sp>
+        <p:nvSpPr>
+          <p:cNvPr id="10" name="TextBox 9"/>
           <p:cNvSpPr txBox="1"/>
           <p:nvPr/>
         </p:nvSpPr>
@@ -7837,14 +8149,18 @@
           <a:noFill/>
         </p:spPr>
         <p:txBody>
-          <a:bodyPr wrap="square">
-            <a:spAutoFit/>
-          </a:bodyPr>
-          <a:lstStyle/>
-          <a:p>
-            <a:pPr algn="l"/>
-            <a:r>
-              <a:rPr sz="1000" b="0">
+          <a:bodyPr wrap="square" anchor="t">
+            <a:spAutoFit/>
+          </a:bodyPr>
+          <a:lstStyle/>
+          <a:p>
+            <a:pPr algn="l">
+              <a:lnSpc>
+                <a:spcPct val="105000"/>
+              </a:lnSpc>
+            </a:pPr>
+            <a:r>
+              <a:rPr sz="1000" b="0" i="0">
                 <a:solidFill>
                   <a:srgbClr val="93A9C2"/>
                 </a:solidFill>
@@ -7857,7 +8173,7 @@
       </p:sp>
       <p:sp>
         <p:nvSpPr>
-          <p:cNvPr id="13" name="TextBox 12"/>
+          <p:cNvPr id="11" name="TextBox 10"/>
           <p:cNvSpPr txBox="1"/>
           <p:nvPr/>
         </p:nvSpPr>
@@ -7872,20 +8188,24 @@
           <a:noFill/>
         </p:spPr>
         <p:txBody>
-          <a:bodyPr wrap="square">
-            <a:spAutoFit/>
-          </a:bodyPr>
-          <a:lstStyle/>
-          <a:p>
-            <a:pPr algn="r"/>
-            <a:r>
-              <a:rPr sz="1000" b="0">
+          <a:bodyPr wrap="square" anchor="t">
+            <a:spAutoFit/>
+          </a:bodyPr>
+          <a:lstStyle/>
+          <a:p>
+            <a:pPr algn="r">
+              <a:lnSpc>
+                <a:spcPct val="105000"/>
+              </a:lnSpc>
+            </a:pPr>
+            <a:r>
+              <a:rPr sz="1000" b="0" i="0">
                 <a:solidFill>
                   <a:srgbClr val="93A9C2"/>
                 </a:solidFill>
                 <a:latin typeface="Segoe UI"/>
               </a:rPr>
-              <a:t>8</a:t>
+              <a:t>15</a:t>
             </a:r>
           </a:p>
         </p:txBody>
@@ -7895,6 +8215,9 @@
   <p:clrMapOvr>
     <a:masterClrMapping/>
   </p:clrMapOvr>
+  <p:transition xmlns:p14="http://schemas.microsoft.com/office/powerpoint/2010/main" spd="med" p14:dur="900">
+    <p:fade/>
+  </p:transition>
 </p:sld>
 </file>
 
@@ -7918,95 +8241,23 @@
       <p:grpSpPr/>
       <p:sp>
         <p:nvSpPr>
-          <p:cNvPr id="2" name="TextBox 1"/>
-          <p:cNvSpPr txBox="1"/>
-          <p:nvPr/>
-        </p:nvSpPr>
-        <p:spPr>
-          <a:xfrm>
-            <a:off x="822960" y="502920"/>
-            <a:ext cx="10058400" cy="365760"/>
-          </a:xfrm>
-          <a:prstGeom prst="rect">
-            <a:avLst/>
-          </a:prstGeom>
-          <a:noFill/>
-        </p:spPr>
-        <p:txBody>
-          <a:bodyPr wrap="square">
-            <a:spAutoFit/>
-          </a:bodyPr>
-          <a:lstStyle/>
-          <a:p>
-            <a:pPr algn="l"/>
-            <a:r>
-              <a:rPr sz="1300" b="1">
-                <a:solidFill>
-                  <a:srgbClr val="25D8F0"/>
-                </a:solidFill>
-                <a:latin typeface="Segoe UI"/>
-              </a:rPr>
-              <a:t>AUTONOMOUS DRONE DISPATCH</a:t>
-            </a:r>
-          </a:p>
-        </p:txBody>
-      </p:sp>
-      <p:sp>
-        <p:nvSpPr>
-          <p:cNvPr id="3" name="TextBox 2"/>
-          <p:cNvSpPr txBox="1"/>
-          <p:nvPr/>
-        </p:nvSpPr>
-        <p:spPr>
-          <a:xfrm>
-            <a:off x="822960" y="914400"/>
-            <a:ext cx="10515600" cy="640080"/>
-          </a:xfrm>
-          <a:prstGeom prst="rect">
-            <a:avLst/>
-          </a:prstGeom>
-          <a:noFill/>
-        </p:spPr>
-        <p:txBody>
-          <a:bodyPr wrap="square">
-            <a:spAutoFit/>
-          </a:bodyPr>
-          <a:lstStyle/>
-          <a:p>
-            <a:pPr algn="l"/>
-            <a:r>
-              <a:rPr sz="2600" b="1">
-                <a:solidFill>
-                  <a:srgbClr val="EAF1FA"/>
-                </a:solidFill>
-                <a:latin typeface="Segoe UI"/>
-              </a:rPr>
-              <a:t>From alert to interception — a drone in the loop, not just a camera</a:t>
-            </a:r>
-          </a:p>
-        </p:txBody>
-      </p:sp>
-      <p:sp>
-        <p:nvSpPr>
-          <p:cNvPr id="4" name="Rounded Rectangle 3"/>
+          <p:cNvPr id="2" name="Rectangle 1"/>
           <p:cNvSpPr/>
           <p:nvPr/>
         </p:nvSpPr>
         <p:spPr>
           <a:xfrm>
-            <a:off x="1089507" y="2194560"/>
-            <a:ext cx="1783080" cy="1691640"/>
-          </a:xfrm>
-          <a:prstGeom prst="roundRect">
+            <a:off x="0" y="0"/>
+            <a:ext cx="12191695" cy="6858000"/>
+          </a:xfrm>
+          <a:prstGeom prst="rect">
             <a:avLst/>
           </a:prstGeom>
           <a:solidFill>
-            <a:srgbClr val="182C4C"/>
+            <a:srgbClr val="0F1A30"/>
           </a:solidFill>
-          <a:ln w="12700">
-            <a:solidFill>
-              <a:srgbClr val="FF3B5C"/>
-            </a:solidFill>
+          <a:ln>
+            <a:noFill/>
           </a:ln>
           <a:effectLst/>
         </p:spPr>
@@ -8034,121 +8285,16 @@
       </p:sp>
       <p:sp>
         <p:nvSpPr>
-          <p:cNvPr id="5" name="TextBox 4"/>
-          <p:cNvSpPr txBox="1"/>
-          <p:nvPr/>
-        </p:nvSpPr>
-        <p:spPr>
-          <a:xfrm>
-            <a:off x="1089507" y="2331720"/>
-            <a:ext cx="1783080" cy="502920"/>
-          </a:xfrm>
-          <a:prstGeom prst="rect">
-            <a:avLst/>
-          </a:prstGeom>
-          <a:noFill/>
-        </p:spPr>
-        <p:txBody>
-          <a:bodyPr wrap="square">
-            <a:spAutoFit/>
-          </a:bodyPr>
-          <a:lstStyle/>
-          <a:p>
-            <a:pPr algn="ctr"/>
-            <a:r>
-              <a:rPr sz="2600" b="0">
-                <a:solidFill>
-                  <a:srgbClr val="FF3B5C"/>
-                </a:solidFill>
-                <a:latin typeface="Segoe UI"/>
-              </a:rPr>
-              <a:t>🚨</a:t>
-            </a:r>
-          </a:p>
-        </p:txBody>
-      </p:sp>
-      <p:sp>
-        <p:nvSpPr>
-          <p:cNvPr id="6" name="TextBox 5"/>
-          <p:cNvSpPr txBox="1"/>
-          <p:nvPr/>
-        </p:nvSpPr>
-        <p:spPr>
-          <a:xfrm>
-            <a:off x="1180947" y="2926080"/>
-            <a:ext cx="1600200" cy="502920"/>
-          </a:xfrm>
-          <a:prstGeom prst="rect">
-            <a:avLst/>
-          </a:prstGeom>
-          <a:noFill/>
-        </p:spPr>
-        <p:txBody>
-          <a:bodyPr wrap="square">
-            <a:spAutoFit/>
-          </a:bodyPr>
-          <a:lstStyle/>
-          <a:p>
-            <a:pPr algn="ctr"/>
-            <a:r>
-              <a:rPr sz="1250" b="1">
-                <a:solidFill>
-                  <a:srgbClr val="EAF1FA"/>
-                </a:solidFill>
-                <a:latin typeface="Segoe UI"/>
-              </a:rPr>
-              <a:t>Alert Triggered</a:t>
-            </a:r>
-          </a:p>
-        </p:txBody>
-      </p:sp>
-      <p:sp>
-        <p:nvSpPr>
-          <p:cNvPr id="7" name="TextBox 6"/>
-          <p:cNvSpPr txBox="1"/>
-          <p:nvPr/>
-        </p:nvSpPr>
-        <p:spPr>
-          <a:xfrm>
-            <a:off x="1180947" y="3383280"/>
-            <a:ext cx="1600200" cy="411480"/>
-          </a:xfrm>
-          <a:prstGeom prst="rect">
-            <a:avLst/>
-          </a:prstGeom>
-          <a:noFill/>
-        </p:spPr>
-        <p:txBody>
-          <a:bodyPr wrap="square">
-            <a:spAutoFit/>
-          </a:bodyPr>
-          <a:lstStyle/>
-          <a:p>
-            <a:pPr algn="ctr"/>
-            <a:r>
-              <a:rPr sz="1050" b="0">
-                <a:solidFill>
-                  <a:srgbClr val="93A9C2"/>
-                </a:solidFill>
-                <a:latin typeface="Segoe UI"/>
-              </a:rPr>
-              <a:t>Stolen vehicle / wanted person</a:t>
-            </a:r>
-          </a:p>
-        </p:txBody>
-      </p:sp>
-      <p:sp>
-        <p:nvSpPr>
-          <p:cNvPr id="8" name="Right Arrow 7"/>
+          <p:cNvPr id="3" name="Rectangle 2"/>
           <p:cNvSpPr/>
           <p:nvPr/>
         </p:nvSpPr>
         <p:spPr>
           <a:xfrm>
-            <a:off x="2872587" y="2948940"/>
-            <a:ext cx="274320" cy="182880"/>
-          </a:xfrm>
-          <a:prstGeom prst="rightArrow">
+            <a:off x="0" y="0"/>
+            <a:ext cx="12191695" cy="146304"/>
+          </a:xfrm>
+          <a:prstGeom prst="rect">
             <a:avLst/>
           </a:prstGeom>
           <a:solidFill>
@@ -8183,24 +8329,102 @@
       </p:sp>
       <p:sp>
         <p:nvSpPr>
-          <p:cNvPr id="9" name="Rounded Rectangle 8"/>
+          <p:cNvPr id="4" name="TextBox 3"/>
+          <p:cNvSpPr txBox="1"/>
+          <p:nvPr/>
+        </p:nvSpPr>
+        <p:spPr>
+          <a:xfrm>
+            <a:off x="822960" y="457200"/>
+            <a:ext cx="10058400" cy="365760"/>
+          </a:xfrm>
+          <a:prstGeom prst="rect">
+            <a:avLst/>
+          </a:prstGeom>
+          <a:noFill/>
+        </p:spPr>
+        <p:txBody>
+          <a:bodyPr wrap="square" anchor="t">
+            <a:spAutoFit/>
+          </a:bodyPr>
+          <a:lstStyle/>
+          <a:p>
+            <a:pPr algn="l">
+              <a:lnSpc>
+                <a:spcPct val="105000"/>
+              </a:lnSpc>
+            </a:pPr>
+            <a:r>
+              <a:rPr sz="1300" b="1" i="0">
+                <a:solidFill>
+                  <a:srgbClr val="25D8F0"/>
+                </a:solidFill>
+                <a:latin typeface="Segoe UI"/>
+              </a:rPr>
+              <a:t>ROADMAP &amp; VISION</a:t>
+            </a:r>
+          </a:p>
+        </p:txBody>
+      </p:sp>
+      <p:sp>
+        <p:nvSpPr>
+          <p:cNvPr id="5" name="TextBox 4"/>
+          <p:cNvSpPr txBox="1"/>
+          <p:nvPr/>
+        </p:nvSpPr>
+        <p:spPr>
+          <a:xfrm>
+            <a:off x="822960" y="868680"/>
+            <a:ext cx="10515600" cy="640080"/>
+          </a:xfrm>
+          <a:prstGeom prst="rect">
+            <a:avLst/>
+          </a:prstGeom>
+          <a:noFill/>
+        </p:spPr>
+        <p:txBody>
+          <a:bodyPr wrap="square" anchor="t">
+            <a:spAutoFit/>
+          </a:bodyPr>
+          <a:lstStyle/>
+          <a:p>
+            <a:pPr algn="l">
+              <a:lnSpc>
+                <a:spcPct val="105000"/>
+              </a:lnSpc>
+            </a:pPr>
+            <a:r>
+              <a:rPr sz="2600" b="1" i="0">
+                <a:solidFill>
+                  <a:srgbClr val="EAF1FA"/>
+                </a:solidFill>
+                <a:latin typeface="Segoe UI"/>
+              </a:rPr>
+              <a:t>From working prototype to statewide deployment</a:t>
+            </a:r>
+          </a:p>
+        </p:txBody>
+      </p:sp>
+      <p:sp>
+        <p:nvSpPr>
+          <p:cNvPr id="6" name="Rounded Rectangle 5"/>
           <p:cNvSpPr/>
           <p:nvPr/>
         </p:nvSpPr>
         <p:spPr>
           <a:xfrm>
-            <a:off x="3146907" y="2194560"/>
-            <a:ext cx="1783080" cy="1691640"/>
+            <a:off x="777240" y="1874519"/>
+            <a:ext cx="3429000" cy="2011680"/>
           </a:xfrm>
           <a:prstGeom prst="roundRect">
             <a:avLst/>
           </a:prstGeom>
           <a:solidFill>
-            <a:srgbClr val="182C4C"/>
+            <a:srgbClr val="14223A"/>
           </a:solidFill>
           <a:ln w="12700">
             <a:solidFill>
-              <a:srgbClr val="F5B638"/>
+              <a:srgbClr val="2B8CFF"/>
             </a:solidFill>
           </a:ln>
           <a:effectLst/>
@@ -8229,119 +8453,338 @@
       </p:sp>
       <p:sp>
         <p:nvSpPr>
-          <p:cNvPr id="10" name="TextBox 9"/>
-          <p:cNvSpPr txBox="1"/>
-          <p:nvPr/>
-        </p:nvSpPr>
-        <p:spPr>
-          <a:xfrm>
-            <a:off x="3146907" y="2331720"/>
-            <a:ext cx="1783080" cy="502920"/>
-          </a:xfrm>
-          <a:prstGeom prst="rect">
-            <a:avLst/>
-          </a:prstGeom>
-          <a:noFill/>
-        </p:spPr>
-        <p:txBody>
-          <a:bodyPr wrap="square">
-            <a:spAutoFit/>
-          </a:bodyPr>
+          <p:cNvPr id="7" name="TextBox 6"/>
+          <p:cNvSpPr txBox="1"/>
+          <p:nvPr/>
+        </p:nvSpPr>
+        <p:spPr>
+          <a:xfrm>
+            <a:off x="777240" y="2057400"/>
+            <a:ext cx="3429000" cy="457200"/>
+          </a:xfrm>
+          <a:prstGeom prst="rect">
+            <a:avLst/>
+          </a:prstGeom>
+          <a:noFill/>
+        </p:spPr>
+        <p:txBody>
+          <a:bodyPr wrap="square" anchor="t">
+            <a:spAutoFit/>
+          </a:bodyPr>
+          <a:lstStyle/>
+          <a:p>
+            <a:pPr algn="ctr">
+              <a:lnSpc>
+                <a:spcPct val="105000"/>
+              </a:lnSpc>
+            </a:pPr>
+            <a:r>
+              <a:rPr sz="1700" b="1" i="0">
+                <a:solidFill>
+                  <a:srgbClr val="2B8CFF"/>
+                </a:solidFill>
+                <a:latin typeface="Segoe UI"/>
+              </a:rPr>
+              <a:t>PILOT</a:t>
+            </a:r>
+          </a:p>
+        </p:txBody>
+      </p:sp>
+      <p:sp>
+        <p:nvSpPr>
+          <p:cNvPr id="8" name="TextBox 7"/>
+          <p:cNvSpPr txBox="1"/>
+          <p:nvPr/>
+        </p:nvSpPr>
+        <p:spPr>
+          <a:xfrm>
+            <a:off x="777240" y="2514600"/>
+            <a:ext cx="3429000" cy="411480"/>
+          </a:xfrm>
+          <a:prstGeom prst="rect">
+            <a:avLst/>
+          </a:prstGeom>
+          <a:noFill/>
+        </p:spPr>
+        <p:txBody>
+          <a:bodyPr wrap="square" anchor="t">
+            <a:spAutoFit/>
+          </a:bodyPr>
+          <a:lstStyle/>
+          <a:p>
+            <a:pPr algn="ctr">
+              <a:lnSpc>
+                <a:spcPct val="105000"/>
+              </a:lnSpc>
+            </a:pPr>
+            <a:r>
+              <a:rPr sz="1400" b="1" i="0">
+                <a:solidFill>
+                  <a:srgbClr val="EAF1FA"/>
+                </a:solidFill>
+                <a:latin typeface="Segoe UI"/>
+              </a:rPr>
+              <a:t>1 district</a:t>
+            </a:r>
+          </a:p>
+        </p:txBody>
+      </p:sp>
+      <p:sp>
+        <p:nvSpPr>
+          <p:cNvPr id="9" name="TextBox 8"/>
+          <p:cNvSpPr txBox="1"/>
+          <p:nvPr/>
+        </p:nvSpPr>
+        <p:spPr>
+          <a:xfrm>
+            <a:off x="914400" y="2971800"/>
+            <a:ext cx="3154680" cy="822960"/>
+          </a:xfrm>
+          <a:prstGeom prst="rect">
+            <a:avLst/>
+          </a:prstGeom>
+          <a:noFill/>
+        </p:spPr>
+        <p:txBody>
+          <a:bodyPr wrap="square" anchor="t">
+            <a:spAutoFit/>
+          </a:bodyPr>
+          <a:lstStyle/>
+          <a:p>
+            <a:pPr algn="ctr">
+              <a:lnSpc>
+                <a:spcPct val="105000"/>
+              </a:lnSpc>
+            </a:pPr>
+            <a:r>
+              <a:rPr sz="1250" b="0" i="0">
+                <a:solidFill>
+                  <a:srgbClr val="93A9C2"/>
+                </a:solidFill>
+                <a:latin typeface="Segoe UI"/>
+              </a:rPr>
+              <a:t>Registry + GIS, ANPR + face, validate on real cameras</a:t>
+            </a:r>
+          </a:p>
+        </p:txBody>
+      </p:sp>
+      <p:sp>
+        <p:nvSpPr>
+          <p:cNvPr id="10" name="Right Arrow 9"/>
+          <p:cNvSpPr/>
+          <p:nvPr/>
+        </p:nvSpPr>
+        <p:spPr>
+          <a:xfrm>
+            <a:off x="4224527" y="2743200"/>
+            <a:ext cx="146304" cy="292608"/>
+          </a:xfrm>
+          <a:prstGeom prst="rightArrow">
+            <a:avLst/>
+          </a:prstGeom>
+          <a:solidFill>
+            <a:srgbClr val="2B8CFF"/>
+          </a:solidFill>
+          <a:ln>
+            <a:noFill/>
+          </a:ln>
+          <a:effectLst/>
+        </p:spPr>
+        <p:style>
+          <a:lnRef idx="1">
+            <a:schemeClr val="accent1"/>
+          </a:lnRef>
+          <a:fillRef idx="3">
+            <a:schemeClr val="accent1"/>
+          </a:fillRef>
+          <a:effectRef idx="2">
+            <a:schemeClr val="accent1"/>
+          </a:effectRef>
+          <a:fontRef idx="minor">
+            <a:schemeClr val="lt1"/>
+          </a:fontRef>
+        </p:style>
+        <p:txBody>
+          <a:bodyPr rtlCol="0" anchor="ctr"/>
           <a:lstStyle/>
           <a:p>
             <a:pPr algn="ctr"/>
-            <a:r>
-              <a:rPr sz="2600" b="0">
-                <a:solidFill>
-                  <a:srgbClr val="F5B638"/>
-                </a:solidFill>
-                <a:latin typeface="Segoe UI"/>
-              </a:rPr>
-              <a:t>🧭</a:t>
-            </a:r>
-          </a:p>
-        </p:txBody>
-      </p:sp>
-      <p:sp>
-        <p:nvSpPr>
-          <p:cNvPr id="11" name="TextBox 10"/>
-          <p:cNvSpPr txBox="1"/>
-          <p:nvPr/>
-        </p:nvSpPr>
-        <p:spPr>
-          <a:xfrm>
-            <a:off x="3238347" y="2926080"/>
-            <a:ext cx="1600200" cy="502920"/>
-          </a:xfrm>
-          <a:prstGeom prst="rect">
-            <a:avLst/>
-          </a:prstGeom>
-          <a:noFill/>
-        </p:spPr>
-        <p:txBody>
-          <a:bodyPr wrap="square">
-            <a:spAutoFit/>
-          </a:bodyPr>
+          </a:p>
+        </p:txBody>
+      </p:sp>
+      <p:sp>
+        <p:nvSpPr>
+          <p:cNvPr id="11" name="Rounded Rectangle 10"/>
+          <p:cNvSpPr/>
+          <p:nvPr/>
+        </p:nvSpPr>
+        <p:spPr>
+          <a:xfrm>
+            <a:off x="4389120" y="1874519"/>
+            <a:ext cx="3429000" cy="2011680"/>
+          </a:xfrm>
+          <a:prstGeom prst="roundRect">
+            <a:avLst/>
+          </a:prstGeom>
+          <a:solidFill>
+            <a:srgbClr val="14223A"/>
+          </a:solidFill>
+          <a:ln w="12700">
+            <a:solidFill>
+              <a:srgbClr val="25D8F0"/>
+            </a:solidFill>
+          </a:ln>
+          <a:effectLst/>
+        </p:spPr>
+        <p:style>
+          <a:lnRef idx="1">
+            <a:schemeClr val="accent1"/>
+          </a:lnRef>
+          <a:fillRef idx="3">
+            <a:schemeClr val="accent1"/>
+          </a:fillRef>
+          <a:effectRef idx="2">
+            <a:schemeClr val="accent1"/>
+          </a:effectRef>
+          <a:fontRef idx="minor">
+            <a:schemeClr val="lt1"/>
+          </a:fontRef>
+        </p:style>
+        <p:txBody>
+          <a:bodyPr rtlCol="0" anchor="ctr"/>
           <a:lstStyle/>
           <a:p>
             <a:pPr algn="ctr"/>
-            <a:r>
-              <a:rPr sz="1250" b="1">
+          </a:p>
+        </p:txBody>
+      </p:sp>
+      <p:sp>
+        <p:nvSpPr>
+          <p:cNvPr id="12" name="TextBox 11"/>
+          <p:cNvSpPr txBox="1"/>
+          <p:nvPr/>
+        </p:nvSpPr>
+        <p:spPr>
+          <a:xfrm>
+            <a:off x="4389120" y="2057400"/>
+            <a:ext cx="3429000" cy="457200"/>
+          </a:xfrm>
+          <a:prstGeom prst="rect">
+            <a:avLst/>
+          </a:prstGeom>
+          <a:noFill/>
+        </p:spPr>
+        <p:txBody>
+          <a:bodyPr wrap="square" anchor="t">
+            <a:spAutoFit/>
+          </a:bodyPr>
+          <a:lstStyle/>
+          <a:p>
+            <a:pPr algn="ctr">
+              <a:lnSpc>
+                <a:spcPct val="105000"/>
+              </a:lnSpc>
+            </a:pPr>
+            <a:r>
+              <a:rPr sz="1700" b="1" i="0">
+                <a:solidFill>
+                  <a:srgbClr val="25D8F0"/>
+                </a:solidFill>
+                <a:latin typeface="Segoe UI"/>
+              </a:rPr>
+              <a:t>REGIONAL</a:t>
+            </a:r>
+          </a:p>
+        </p:txBody>
+      </p:sp>
+      <p:sp>
+        <p:nvSpPr>
+          <p:cNvPr id="13" name="TextBox 12"/>
+          <p:cNvSpPr txBox="1"/>
+          <p:nvPr/>
+        </p:nvSpPr>
+        <p:spPr>
+          <a:xfrm>
+            <a:off x="4389120" y="2514600"/>
+            <a:ext cx="3429000" cy="411480"/>
+          </a:xfrm>
+          <a:prstGeom prst="rect">
+            <a:avLst/>
+          </a:prstGeom>
+          <a:noFill/>
+        </p:spPr>
+        <p:txBody>
+          <a:bodyPr wrap="square" anchor="t">
+            <a:spAutoFit/>
+          </a:bodyPr>
+          <a:lstStyle/>
+          <a:p>
+            <a:pPr algn="ctr">
+              <a:lnSpc>
+                <a:spcPct val="105000"/>
+              </a:lnSpc>
+            </a:pPr>
+            <a:r>
+              <a:rPr sz="1400" b="1" i="0">
                 <a:solidFill>
                   <a:srgbClr val="EAF1FA"/>
                 </a:solidFill>
                 <a:latin typeface="Segoe UI"/>
               </a:rPr>
-              <a:t>Next Camera Predicted</a:t>
-            </a:r>
-          </a:p>
-        </p:txBody>
-      </p:sp>
-      <p:sp>
-        <p:nvSpPr>
-          <p:cNvPr id="12" name="TextBox 11"/>
-          <p:cNvSpPr txBox="1"/>
-          <p:nvPr/>
-        </p:nvSpPr>
-        <p:spPr>
-          <a:xfrm>
-            <a:off x="3238347" y="3383280"/>
-            <a:ext cx="1600200" cy="411480"/>
-          </a:xfrm>
-          <a:prstGeom prst="rect">
-            <a:avLst/>
-          </a:prstGeom>
-          <a:noFill/>
-        </p:spPr>
-        <p:txBody>
-          <a:bodyPr wrap="square">
-            <a:spAutoFit/>
-          </a:bodyPr>
-          <a:lstStyle/>
-          <a:p>
-            <a:pPr algn="ctr"/>
-            <a:r>
-              <a:rPr sz="1050" b="0">
+              <a:t>1 zone</a:t>
+            </a:r>
+          </a:p>
+        </p:txBody>
+      </p:sp>
+      <p:sp>
+        <p:nvSpPr>
+          <p:cNvPr id="14" name="TextBox 13"/>
+          <p:cNvSpPr txBox="1"/>
+          <p:nvPr/>
+        </p:nvSpPr>
+        <p:spPr>
+          <a:xfrm>
+            <a:off x="4526280" y="2971800"/>
+            <a:ext cx="3154680" cy="822960"/>
+          </a:xfrm>
+          <a:prstGeom prst="rect">
+            <a:avLst/>
+          </a:prstGeom>
+          <a:noFill/>
+        </p:spPr>
+        <p:txBody>
+          <a:bodyPr wrap="square" anchor="t">
+            <a:spAutoFit/>
+          </a:bodyPr>
+          <a:lstStyle/>
+          <a:p>
+            <a:pPr algn="ctr">
+              <a:lnSpc>
+                <a:spcPct val="105000"/>
+              </a:lnSpc>
+            </a:pPr>
+            <a:r>
+              <a:rPr sz="1250" b="0" i="0">
                 <a:solidFill>
                   <a:srgbClr val="93A9C2"/>
                 </a:solidFill>
                 <a:latin typeface="Segoe UI"/>
               </a:rPr>
-              <a:t>Bearing + distance scoring</a:t>
-            </a:r>
-          </a:p>
-        </p:txBody>
-      </p:sp>
-      <p:sp>
-        <p:nvSpPr>
-          <p:cNvPr id="13" name="Right Arrow 12"/>
+              <a:t>HA/DR, live VAHAN &amp; eGujCop, production SSO + audit</a:t>
+            </a:r>
+          </a:p>
+        </p:txBody>
+      </p:sp>
+      <p:sp>
+        <p:nvSpPr>
+          <p:cNvPr id="15" name="Right Arrow 14"/>
           <p:cNvSpPr/>
           <p:nvPr/>
         </p:nvSpPr>
         <p:spPr>
           <a:xfrm>
-            <a:off x="4929987" y="2948940"/>
-            <a:ext cx="274320" cy="182880"/>
+            <a:off x="7836408" y="2743200"/>
+            <a:ext cx="146304" cy="292608"/>
           </a:xfrm>
           <a:prstGeom prst="rightArrow">
             <a:avLst/>
@@ -8378,20 +8821,20 @@
       </p:sp>
       <p:sp>
         <p:nvSpPr>
-          <p:cNvPr id="14" name="Rounded Rectangle 13"/>
+          <p:cNvPr id="16" name="Rounded Rectangle 15"/>
           <p:cNvSpPr/>
           <p:nvPr/>
         </p:nvSpPr>
         <p:spPr>
           <a:xfrm>
-            <a:off x="5204307" y="2194560"/>
-            <a:ext cx="1783080" cy="1691640"/>
+            <a:off x="8001000" y="1874519"/>
+            <a:ext cx="3429000" cy="2011680"/>
           </a:xfrm>
           <a:prstGeom prst="roundRect">
             <a:avLst/>
           </a:prstGeom>
           <a:solidFill>
-            <a:srgbClr val="182C4C"/>
+            <a:srgbClr val="14223A"/>
           </a:solidFill>
           <a:ln w="12700">
             <a:solidFill>
@@ -8424,196 +8867,118 @@
       </p:sp>
       <p:sp>
         <p:nvSpPr>
-          <p:cNvPr id="15" name="TextBox 14"/>
-          <p:cNvSpPr txBox="1"/>
-          <p:nvPr/>
-        </p:nvSpPr>
-        <p:spPr>
-          <a:xfrm>
-            <a:off x="5204307" y="2331720"/>
-            <a:ext cx="1783080" cy="502920"/>
-          </a:xfrm>
-          <a:prstGeom prst="rect">
-            <a:avLst/>
-          </a:prstGeom>
-          <a:noFill/>
-        </p:spPr>
-        <p:txBody>
-          <a:bodyPr wrap="square">
-            <a:spAutoFit/>
-          </a:bodyPr>
-          <a:lstStyle/>
-          <a:p>
-            <a:pPr algn="ctr"/>
-            <a:r>
-              <a:rPr sz="2600" b="0">
+          <p:cNvPr id="17" name="TextBox 16"/>
+          <p:cNvSpPr txBox="1"/>
+          <p:nvPr/>
+        </p:nvSpPr>
+        <p:spPr>
+          <a:xfrm>
+            <a:off x="8001000" y="2057400"/>
+            <a:ext cx="3429000" cy="457200"/>
+          </a:xfrm>
+          <a:prstGeom prst="rect">
+            <a:avLst/>
+          </a:prstGeom>
+          <a:noFill/>
+        </p:spPr>
+        <p:txBody>
+          <a:bodyPr wrap="square" anchor="t">
+            <a:spAutoFit/>
+          </a:bodyPr>
+          <a:lstStyle/>
+          <a:p>
+            <a:pPr algn="ctr">
+              <a:lnSpc>
+                <a:spcPct val="105000"/>
+              </a:lnSpc>
+            </a:pPr>
+            <a:r>
+              <a:rPr sz="1700" b="1" i="0">
                 <a:solidFill>
                   <a:srgbClr val="2AD477"/>
                 </a:solidFill>
                 <a:latin typeface="Segoe UI"/>
               </a:rPr>
-              <a:t>🚁</a:t>
-            </a:r>
-          </a:p>
-        </p:txBody>
-      </p:sp>
-      <p:sp>
-        <p:nvSpPr>
-          <p:cNvPr id="16" name="TextBox 15"/>
-          <p:cNvSpPr txBox="1"/>
-          <p:nvPr/>
-        </p:nvSpPr>
-        <p:spPr>
-          <a:xfrm>
-            <a:off x="5295747" y="2926080"/>
-            <a:ext cx="1600200" cy="502920"/>
-          </a:xfrm>
-          <a:prstGeom prst="rect">
-            <a:avLst/>
-          </a:prstGeom>
-          <a:noFill/>
-        </p:spPr>
-        <p:txBody>
-          <a:bodyPr wrap="square">
-            <a:spAutoFit/>
-          </a:bodyPr>
-          <a:lstStyle/>
-          <a:p>
-            <a:pPr algn="ctr"/>
-            <a:r>
-              <a:rPr sz="1250" b="1">
+              <a:t>STATEWIDE</a:t>
+            </a:r>
+          </a:p>
+        </p:txBody>
+      </p:sp>
+      <p:sp>
+        <p:nvSpPr>
+          <p:cNvPr id="18" name="TextBox 17"/>
+          <p:cNvSpPr txBox="1"/>
+          <p:nvPr/>
+        </p:nvSpPr>
+        <p:spPr>
+          <a:xfrm>
+            <a:off x="8001000" y="2514600"/>
+            <a:ext cx="3429000" cy="411480"/>
+          </a:xfrm>
+          <a:prstGeom prst="rect">
+            <a:avLst/>
+          </a:prstGeom>
+          <a:noFill/>
+        </p:spPr>
+        <p:txBody>
+          <a:bodyPr wrap="square" anchor="t">
+            <a:spAutoFit/>
+          </a:bodyPr>
+          <a:lstStyle/>
+          <a:p>
+            <a:pPr algn="ctr">
+              <a:lnSpc>
+                <a:spcPct val="105000"/>
+              </a:lnSpc>
+            </a:pPr>
+            <a:r>
+              <a:rPr sz="1400" b="1" i="0">
                 <a:solidFill>
                   <a:srgbClr val="EAF1FA"/>
                 </a:solidFill>
                 <a:latin typeface="Segoe UI"/>
               </a:rPr>
-              <a:t>Drone Dispatched</a:t>
-            </a:r>
-          </a:p>
-        </p:txBody>
-      </p:sp>
-      <p:sp>
-        <p:nvSpPr>
-          <p:cNvPr id="17" name="TextBox 16"/>
-          <p:cNvSpPr txBox="1"/>
-          <p:nvPr/>
-        </p:nvSpPr>
-        <p:spPr>
-          <a:xfrm>
-            <a:off x="5295747" y="3383280"/>
-            <a:ext cx="1600200" cy="411480"/>
-          </a:xfrm>
-          <a:prstGeom prst="rect">
-            <a:avLst/>
-          </a:prstGeom>
-          <a:noFill/>
-        </p:spPr>
-        <p:txBody>
-          <a:bodyPr wrap="square">
-            <a:spAutoFit/>
-          </a:bodyPr>
-          <a:lstStyle/>
-          <a:p>
-            <a:pPr algn="ctr"/>
-            <a:r>
-              <a:rPr sz="1050" b="0">
+              <a:t>~80,000 cams</a:t>
+            </a:r>
+          </a:p>
+        </p:txBody>
+      </p:sp>
+      <p:sp>
+        <p:nvSpPr>
+          <p:cNvPr id="19" name="TextBox 18"/>
+          <p:cNvSpPr txBox="1"/>
+          <p:nvPr/>
+        </p:nvSpPr>
+        <p:spPr>
+          <a:xfrm>
+            <a:off x="8138160" y="2971800"/>
+            <a:ext cx="3154680" cy="822960"/>
+          </a:xfrm>
+          <a:prstGeom prst="rect">
+            <a:avLst/>
+          </a:prstGeom>
+          <a:noFill/>
+        </p:spPr>
+        <p:txBody>
+          <a:bodyPr wrap="square" anchor="t">
+            <a:spAutoFit/>
+          </a:bodyPr>
+          <a:lstStyle/>
+          <a:p>
+            <a:pPr algn="ctr">
+              <a:lnSpc>
+                <a:spcPct val="105000"/>
+              </a:lnSpc>
+            </a:pPr>
+            <a:r>
+              <a:rPr sz="1250" b="0" i="0">
                 <a:solidFill>
                   <a:srgbClr val="93A9C2"/>
                 </a:solidFill>
                 <a:latin typeface="Segoe UI"/>
               </a:rPr>
-              <a:t>One click from the alert</a:t>
-            </a:r>
-          </a:p>
-        </p:txBody>
-      </p:sp>
-      <p:sp>
-        <p:nvSpPr>
-          <p:cNvPr id="18" name="Right Arrow 17"/>
-          <p:cNvSpPr/>
-          <p:nvPr/>
-        </p:nvSpPr>
-        <p:spPr>
-          <a:xfrm>
-            <a:off x="6987387" y="2948940"/>
-            <a:ext cx="274320" cy="182880"/>
-          </a:xfrm>
-          <a:prstGeom prst="rightArrow">
-            <a:avLst/>
-          </a:prstGeom>
-          <a:solidFill>
-            <a:srgbClr val="25D8F0"/>
-          </a:solidFill>
-          <a:ln>
-            <a:noFill/>
-          </a:ln>
-          <a:effectLst/>
-        </p:spPr>
-        <p:style>
-          <a:lnRef idx="1">
-            <a:schemeClr val="accent1"/>
-          </a:lnRef>
-          <a:fillRef idx="3">
-            <a:schemeClr val="accent1"/>
-          </a:fillRef>
-          <a:effectRef idx="2">
-            <a:schemeClr val="accent1"/>
-          </a:effectRef>
-          <a:fontRef idx="minor">
-            <a:schemeClr val="lt1"/>
-          </a:fontRef>
-        </p:style>
-        <p:txBody>
-          <a:bodyPr rtlCol="0" anchor="ctr"/>
-          <a:lstStyle/>
-          <a:p>
-            <a:pPr algn="ctr"/>
-          </a:p>
-        </p:txBody>
-      </p:sp>
-      <p:sp>
-        <p:nvSpPr>
-          <p:cNvPr id="19" name="Rounded Rectangle 18"/>
-          <p:cNvSpPr/>
-          <p:nvPr/>
-        </p:nvSpPr>
-        <p:spPr>
-          <a:xfrm>
-            <a:off x="7261707" y="2194560"/>
-            <a:ext cx="1783080" cy="1691640"/>
-          </a:xfrm>
-          <a:prstGeom prst="roundRect">
-            <a:avLst/>
-          </a:prstGeom>
-          <a:solidFill>
-            <a:srgbClr val="182C4C"/>
-          </a:solidFill>
-          <a:ln w="12700">
-            <a:solidFill>
-              <a:srgbClr val="2B8CFF"/>
-            </a:solidFill>
-          </a:ln>
-          <a:effectLst/>
-        </p:spPr>
-        <p:style>
-          <a:lnRef idx="1">
-            <a:schemeClr val="accent1"/>
-          </a:lnRef>
-          <a:fillRef idx="3">
-            <a:schemeClr val="accent1"/>
-          </a:fillRef>
-          <a:effectRef idx="2">
-            <a:schemeClr val="accent1"/>
-          </a:effectRef>
-          <a:fontRef idx="minor">
-            <a:schemeClr val="lt1"/>
-          </a:fontRef>
-        </p:style>
-        <p:txBody>
-          <a:bodyPr rtlCol="0" anchor="ctr"/>
-          <a:lstStyle/>
-          <a:p>
-            <a:pPr algn="ctr"/>
+              <a:t>Edge fleet, language search, IoT sensor fusion, SOC</a:t>
+            </a:r>
           </a:p>
         </p:txBody>
       </p:sp>
@@ -8625,29 +8990,33 @@
         </p:nvSpPr>
         <p:spPr>
           <a:xfrm>
-            <a:off x="7261707" y="2331720"/>
-            <a:ext cx="1783080" cy="502920"/>
-          </a:xfrm>
-          <a:prstGeom prst="rect">
-            <a:avLst/>
-          </a:prstGeom>
-          <a:noFill/>
-        </p:spPr>
-        <p:txBody>
-          <a:bodyPr wrap="square">
-            <a:spAutoFit/>
-          </a:bodyPr>
-          <a:lstStyle/>
-          <a:p>
-            <a:pPr algn="ctr"/>
-            <a:r>
-              <a:rPr sz="2600" b="0">
-                <a:solidFill>
-                  <a:srgbClr val="2B8CFF"/>
-                </a:solidFill>
-                <a:latin typeface="Segoe UI"/>
-              </a:rPr>
-              <a:t>📡</a:t>
+            <a:off x="0" y="4343400"/>
+            <a:ext cx="12191695" cy="822960"/>
+          </a:xfrm>
+          <a:prstGeom prst="rect">
+            <a:avLst/>
+          </a:prstGeom>
+          <a:noFill/>
+        </p:spPr>
+        <p:txBody>
+          <a:bodyPr wrap="square" anchor="t">
+            <a:spAutoFit/>
+          </a:bodyPr>
+          <a:lstStyle/>
+          <a:p>
+            <a:pPr algn="ctr">
+              <a:lnSpc>
+                <a:spcPct val="105000"/>
+              </a:lnSpc>
+            </a:pPr>
+            <a:r>
+              <a:rPr sz="4000" b="1" i="0">
+                <a:solidFill>
+                  <a:srgbClr val="25D8F0"/>
+                </a:solidFill>
+                <a:latin typeface="Segoe UI"/>
+              </a:rPr>
+              <a:t>Protect What Matters.</a:t>
             </a:r>
           </a:p>
         </p:txBody>
@@ -8660,29 +9029,33 @@
         </p:nvSpPr>
         <p:spPr>
           <a:xfrm>
-            <a:off x="7353147" y="2926080"/>
-            <a:ext cx="1600200" cy="502920"/>
-          </a:xfrm>
-          <a:prstGeom prst="rect">
-            <a:avLst/>
-          </a:prstGeom>
-          <a:noFill/>
-        </p:spPr>
-        <p:txBody>
-          <a:bodyPr wrap="square">
-            <a:spAutoFit/>
-          </a:bodyPr>
-          <a:lstStyle/>
-          <a:p>
-            <a:pPr algn="ctr"/>
-            <a:r>
-              <a:rPr sz="1250" b="1">
+            <a:off x="0" y="5212080"/>
+            <a:ext cx="12191695" cy="457200"/>
+          </a:xfrm>
+          <a:prstGeom prst="rect">
+            <a:avLst/>
+          </a:prstGeom>
+          <a:noFill/>
+        </p:spPr>
+        <p:txBody>
+          <a:bodyPr wrap="square" anchor="t">
+            <a:spAutoFit/>
+          </a:bodyPr>
+          <a:lstStyle/>
+          <a:p>
+            <a:pPr algn="ctr">
+              <a:lnSpc>
+                <a:spcPct val="105000"/>
+              </a:lnSpc>
+            </a:pPr>
+            <a:r>
+              <a:rPr sz="1800" b="0" i="0">
                 <a:solidFill>
                   <a:srgbClr val="EAF1FA"/>
                 </a:solidFill>
                 <a:latin typeface="Segoe UI"/>
               </a:rPr>
-              <a:t>Live Telemetry</a:t>
+              <a:t>Sentinel — built on the cameras Gujarat already owns.</a:t>
             </a:r>
           </a:p>
         </p:txBody>
@@ -8695,476 +9068,33 @@
         </p:nvSpPr>
         <p:spPr>
           <a:xfrm>
-            <a:off x="7353147" y="3383280"/>
-            <a:ext cx="1600200" cy="411480"/>
-          </a:xfrm>
-          <a:prstGeom prst="rect">
-            <a:avLst/>
-          </a:prstGeom>
-          <a:noFill/>
-        </p:spPr>
-        <p:txBody>
-          <a:bodyPr wrap="square">
-            <a:spAutoFit/>
-          </a:bodyPr>
-          <a:lstStyle/>
-          <a:p>
-            <a:pPr algn="ctr"/>
-            <a:r>
-              <a:rPr sz="1050" b="0">
+            <a:off x="0" y="5806440"/>
+            <a:ext cx="12191695" cy="365760"/>
+          </a:xfrm>
+          <a:prstGeom prst="rect">
+            <a:avLst/>
+          </a:prstGeom>
+          <a:noFill/>
+        </p:spPr>
+        <p:txBody>
+          <a:bodyPr wrap="square" anchor="t">
+            <a:spAutoFit/>
+          </a:bodyPr>
+          <a:lstStyle/>
+          <a:p>
+            <a:pPr algn="ctr">
+              <a:lnSpc>
+                <a:spcPct val="105000"/>
+              </a:lnSpc>
+            </a:pPr>
+            <a:r>
+              <a:rPr sz="1400" b="1" i="0">
                 <a:solidFill>
                   <a:srgbClr val="93A9C2"/>
                 </a:solidFill>
                 <a:latin typeface="Segoe UI"/>
               </a:rPr>
-              <a:t>ETA, waypoint, trailing route</a:t>
-            </a:r>
-          </a:p>
-        </p:txBody>
-      </p:sp>
-      <p:sp>
-        <p:nvSpPr>
-          <p:cNvPr id="23" name="Right Arrow 22"/>
-          <p:cNvSpPr/>
-          <p:nvPr/>
-        </p:nvSpPr>
-        <p:spPr>
-          <a:xfrm>
-            <a:off x="9044787" y="2948940"/>
-            <a:ext cx="274320" cy="182880"/>
-          </a:xfrm>
-          <a:prstGeom prst="rightArrow">
-            <a:avLst/>
-          </a:prstGeom>
-          <a:solidFill>
-            <a:srgbClr val="25D8F0"/>
-          </a:solidFill>
-          <a:ln>
-            <a:noFill/>
-          </a:ln>
-          <a:effectLst/>
-        </p:spPr>
-        <p:style>
-          <a:lnRef idx="1">
-            <a:schemeClr val="accent1"/>
-          </a:lnRef>
-          <a:fillRef idx="3">
-            <a:schemeClr val="accent1"/>
-          </a:fillRef>
-          <a:effectRef idx="2">
-            <a:schemeClr val="accent1"/>
-          </a:effectRef>
-          <a:fontRef idx="minor">
-            <a:schemeClr val="lt1"/>
-          </a:fontRef>
-        </p:style>
-        <p:txBody>
-          <a:bodyPr rtlCol="0" anchor="ctr"/>
-          <a:lstStyle/>
-          <a:p>
-            <a:pPr algn="ctr"/>
-          </a:p>
-        </p:txBody>
-      </p:sp>
-      <p:sp>
-        <p:nvSpPr>
-          <p:cNvPr id="24" name="Rounded Rectangle 23"/>
-          <p:cNvSpPr/>
-          <p:nvPr/>
-        </p:nvSpPr>
-        <p:spPr>
-          <a:xfrm>
-            <a:off x="9319107" y="2194560"/>
-            <a:ext cx="1783080" cy="1691640"/>
-          </a:xfrm>
-          <a:prstGeom prst="roundRect">
-            <a:avLst/>
-          </a:prstGeom>
-          <a:solidFill>
-            <a:srgbClr val="182C4C"/>
-          </a:solidFill>
-          <a:ln w="12700">
-            <a:solidFill>
-              <a:srgbClr val="25D8F0"/>
-            </a:solidFill>
-          </a:ln>
-          <a:effectLst/>
-        </p:spPr>
-        <p:style>
-          <a:lnRef idx="1">
-            <a:schemeClr val="accent1"/>
-          </a:lnRef>
-          <a:fillRef idx="3">
-            <a:schemeClr val="accent1"/>
-          </a:fillRef>
-          <a:effectRef idx="2">
-            <a:schemeClr val="accent1"/>
-          </a:effectRef>
-          <a:fontRef idx="minor">
-            <a:schemeClr val="lt1"/>
-          </a:fontRef>
-        </p:style>
-        <p:txBody>
-          <a:bodyPr rtlCol="0" anchor="ctr"/>
-          <a:lstStyle/>
-          <a:p>
-            <a:pPr algn="ctr"/>
-          </a:p>
-        </p:txBody>
-      </p:sp>
-      <p:sp>
-        <p:nvSpPr>
-          <p:cNvPr id="25" name="TextBox 24"/>
-          <p:cNvSpPr txBox="1"/>
-          <p:nvPr/>
-        </p:nvSpPr>
-        <p:spPr>
-          <a:xfrm>
-            <a:off x="9319107" y="2331720"/>
-            <a:ext cx="1783080" cy="502920"/>
-          </a:xfrm>
-          <a:prstGeom prst="rect">
-            <a:avLst/>
-          </a:prstGeom>
-          <a:noFill/>
-        </p:spPr>
-        <p:txBody>
-          <a:bodyPr wrap="square">
-            <a:spAutoFit/>
-          </a:bodyPr>
-          <a:lstStyle/>
-          <a:p>
-            <a:pPr algn="ctr"/>
-            <a:r>
-              <a:rPr sz="2600" b="0">
-                <a:solidFill>
-                  <a:srgbClr val="25D8F0"/>
-                </a:solidFill>
-                <a:latin typeface="Segoe UI"/>
-              </a:rPr>
-              <a:t>🎯</a:t>
-            </a:r>
-          </a:p>
-        </p:txBody>
-      </p:sp>
-      <p:sp>
-        <p:nvSpPr>
-          <p:cNvPr id="26" name="TextBox 25"/>
-          <p:cNvSpPr txBox="1"/>
-          <p:nvPr/>
-        </p:nvSpPr>
-        <p:spPr>
-          <a:xfrm>
-            <a:off x="9410547" y="2926080"/>
-            <a:ext cx="1600200" cy="502920"/>
-          </a:xfrm>
-          <a:prstGeom prst="rect">
-            <a:avLst/>
-          </a:prstGeom>
-          <a:noFill/>
-        </p:spPr>
-        <p:txBody>
-          <a:bodyPr wrap="square">
-            <a:spAutoFit/>
-          </a:bodyPr>
-          <a:lstStyle/>
-          <a:p>
-            <a:pPr algn="ctr"/>
-            <a:r>
-              <a:rPr sz="1250" b="1">
-                <a:solidFill>
-                  <a:srgbClr val="EAF1FA"/>
-                </a:solidFill>
-                <a:latin typeface="Segoe UI"/>
-              </a:rPr>
-              <a:t>Interception Point</a:t>
-            </a:r>
-          </a:p>
-        </p:txBody>
-      </p:sp>
-      <p:sp>
-        <p:nvSpPr>
-          <p:cNvPr id="27" name="TextBox 26"/>
-          <p:cNvSpPr txBox="1"/>
-          <p:nvPr/>
-        </p:nvSpPr>
-        <p:spPr>
-          <a:xfrm>
-            <a:off x="9410547" y="3383280"/>
-            <a:ext cx="1600200" cy="411480"/>
-          </a:xfrm>
-          <a:prstGeom prst="rect">
-            <a:avLst/>
-          </a:prstGeom>
-          <a:noFill/>
-        </p:spPr>
-        <p:txBody>
-          <a:bodyPr wrap="square">
-            <a:spAutoFit/>
-          </a:bodyPr>
-          <a:lstStyle/>
-          <a:p>
-            <a:pPr algn="ctr"/>
-            <a:r>
-              <a:rPr sz="1050" b="0">
-                <a:solidFill>
-                  <a:srgbClr val="93A9C2"/>
-                </a:solidFill>
-                <a:latin typeface="Segoe UI"/>
-              </a:rPr>
-              <a:t>Ground units guided in</a:t>
-            </a:r>
-          </a:p>
-        </p:txBody>
-      </p:sp>
-      <p:sp>
-        <p:nvSpPr>
-          <p:cNvPr id="28" name="Rounded Rectangle 27"/>
-          <p:cNvSpPr/>
-          <p:nvPr/>
-        </p:nvSpPr>
-        <p:spPr>
-          <a:xfrm>
-            <a:off x="868680" y="4206240"/>
-            <a:ext cx="10424160" cy="1005840"/>
-          </a:xfrm>
-          <a:prstGeom prst="roundRect">
-            <a:avLst/>
-          </a:prstGeom>
-          <a:solidFill>
-            <a:srgbClr val="182C4C"/>
-          </a:solidFill>
-          <a:ln w="12700">
-            <a:solidFill>
-              <a:srgbClr val="2B8CFF"/>
-            </a:solidFill>
-          </a:ln>
-          <a:effectLst/>
-        </p:spPr>
-        <p:style>
-          <a:lnRef idx="1">
-            <a:schemeClr val="accent1"/>
-          </a:lnRef>
-          <a:fillRef idx="3">
-            <a:schemeClr val="accent1"/>
-          </a:fillRef>
-          <a:effectRef idx="2">
-            <a:schemeClr val="accent1"/>
-          </a:effectRef>
-          <a:fontRef idx="minor">
-            <a:schemeClr val="lt1"/>
-          </a:fontRef>
-        </p:style>
-        <p:txBody>
-          <a:bodyPr rtlCol="0" anchor="ctr"/>
-          <a:lstStyle/>
-          <a:p>
-            <a:pPr algn="ctr"/>
-          </a:p>
-        </p:txBody>
-      </p:sp>
-      <p:sp>
-        <p:nvSpPr>
-          <p:cNvPr id="29" name="TextBox 28"/>
-          <p:cNvSpPr txBox="1"/>
-          <p:nvPr/>
-        </p:nvSpPr>
-        <p:spPr>
-          <a:xfrm>
-            <a:off x="1143000" y="4343400"/>
-            <a:ext cx="9875520" cy="731520"/>
-          </a:xfrm>
-          <a:prstGeom prst="rect">
-            <a:avLst/>
-          </a:prstGeom>
-          <a:noFill/>
-        </p:spPr>
-        <p:txBody>
-          <a:bodyPr wrap="square">
-            <a:spAutoFit/>
-          </a:bodyPr>
-          <a:lstStyle/>
-          <a:p>
-            <a:pPr>
-              <a:spcAft>
-                <a:spcPts val="1000"/>
-              </a:spcAft>
-            </a:pPr>
-            <a:r>
-              <a:rPr sz="1350">
-                <a:solidFill>
-                  <a:srgbClr val="EAF1FA"/>
-                </a:solidFill>
-                <a:latin typeface="Segoe UI"/>
-              </a:rPr>
-              <a:t>•  Animated flight path with a live trailing route and a status panel (next waypoint, ETA, one-click recall)</a:t>
-            </a:r>
-          </a:p>
-          <a:p>
-            <a:pPr>
-              <a:spcAft>
-                <a:spcPts val="1000"/>
-              </a:spcAft>
-            </a:pPr>
-            <a:r>
-              <a:rPr sz="1350">
-                <a:solidFill>
-                  <a:srgbClr val="EAF1FA"/>
-                </a:solidFill>
-                <a:latin typeface="Segoe UI"/>
-              </a:rPr>
-              <a:t>•  Fully simulated today on the same map used for ANPR and face alerts — integration-ready for real hardware via MAVLink / DJI SDK</a:t>
-            </a:r>
-          </a:p>
-        </p:txBody>
-      </p:sp>
-      <p:sp>
-        <p:nvSpPr>
-          <p:cNvPr id="30" name="Rounded Rectangle 29"/>
-          <p:cNvSpPr/>
-          <p:nvPr/>
-        </p:nvSpPr>
-        <p:spPr>
-          <a:xfrm>
-            <a:off x="868680" y="5440680"/>
-            <a:ext cx="10424160" cy="365760"/>
-          </a:xfrm>
-          <a:prstGeom prst="roundRect">
-            <a:avLst/>
-          </a:prstGeom>
-          <a:solidFill>
-            <a:srgbClr val="182C4C"/>
-          </a:solidFill>
-          <a:ln w="12700">
-            <a:solidFill>
-              <a:srgbClr val="F5B638"/>
-            </a:solidFill>
-          </a:ln>
-          <a:effectLst/>
-        </p:spPr>
-        <p:style>
-          <a:lnRef idx="1">
-            <a:schemeClr val="accent1"/>
-          </a:lnRef>
-          <a:fillRef idx="3">
-            <a:schemeClr val="accent1"/>
-          </a:fillRef>
-          <a:effectRef idx="2">
-            <a:schemeClr val="accent1"/>
-          </a:effectRef>
-          <a:fontRef idx="minor">
-            <a:schemeClr val="lt1"/>
-          </a:fontRef>
-        </p:style>
-        <p:txBody>
-          <a:bodyPr rtlCol="0" anchor="ctr"/>
-          <a:lstStyle/>
-          <a:p>
-            <a:pPr algn="ctr"/>
-          </a:p>
-        </p:txBody>
-      </p:sp>
-      <p:sp>
-        <p:nvSpPr>
-          <p:cNvPr id="31" name="TextBox 30"/>
-          <p:cNvSpPr txBox="1"/>
-          <p:nvPr/>
-        </p:nvSpPr>
-        <p:spPr>
-          <a:xfrm>
-            <a:off x="868680" y="5440680"/>
-            <a:ext cx="10424160" cy="365760"/>
-          </a:xfrm>
-          <a:prstGeom prst="rect">
-            <a:avLst/>
-          </a:prstGeom>
-          <a:noFill/>
-        </p:spPr>
-        <p:txBody>
-          <a:bodyPr wrap="square">
-            <a:spAutoFit/>
-          </a:bodyPr>
-          <a:lstStyle/>
-          <a:p>
-            <a:pPr algn="ctr"/>
-            <a:r>
-              <a:rPr sz="1300" b="1">
-                <a:solidFill>
-                  <a:srgbClr val="F5B638"/>
-                </a:solidFill>
-                <a:latin typeface="Segoe UI"/>
-              </a:rPr>
-              <a:t>★  Same pipeline, faster response: detect → predict → dispatch → intercept, in seconds.</a:t>
-            </a:r>
-          </a:p>
-        </p:txBody>
-      </p:sp>
-      <p:sp>
-        <p:nvSpPr>
-          <p:cNvPr id="32" name="TextBox 31"/>
-          <p:cNvSpPr txBox="1"/>
-          <p:nvPr/>
-        </p:nvSpPr>
-        <p:spPr>
-          <a:xfrm>
-            <a:off x="822960" y="6419088"/>
-            <a:ext cx="7315200" cy="320040"/>
-          </a:xfrm>
-          <a:prstGeom prst="rect">
-            <a:avLst/>
-          </a:prstGeom>
-          <a:noFill/>
-        </p:spPr>
-        <p:txBody>
-          <a:bodyPr wrap="square">
-            <a:spAutoFit/>
-          </a:bodyPr>
-          <a:lstStyle/>
-          <a:p>
-            <a:pPr algn="l"/>
-            <a:r>
-              <a:rPr sz="1000" b="0">
-                <a:solidFill>
-                  <a:srgbClr val="93A9C2"/>
-                </a:solidFill>
-                <a:latin typeface="Segoe UI"/>
-              </a:rPr>
-              <a:t>SENTINEL  ·  Gujarat Police Innovation Hackathon 2026</a:t>
-            </a:r>
-          </a:p>
-        </p:txBody>
-      </p:sp>
-      <p:sp>
-        <p:nvSpPr>
-          <p:cNvPr id="33" name="TextBox 32"/>
-          <p:cNvSpPr txBox="1"/>
-          <p:nvPr/>
-        </p:nvSpPr>
-        <p:spPr>
-          <a:xfrm>
-            <a:off x="11430000" y="6419088"/>
-            <a:ext cx="548640" cy="320040"/>
-          </a:xfrm>
-          <a:prstGeom prst="rect">
-            <a:avLst/>
-          </a:prstGeom>
-          <a:noFill/>
-        </p:spPr>
-        <p:txBody>
-          <a:bodyPr wrap="square">
-            <a:spAutoFit/>
-          </a:bodyPr>
-          <a:lstStyle/>
-          <a:p>
-            <a:pPr algn="r"/>
-            <a:r>
-              <a:rPr sz="1000" b="0">
-                <a:solidFill>
-                  <a:srgbClr val="93A9C2"/>
-                </a:solidFill>
-                <a:latin typeface="Segoe UI"/>
-              </a:rPr>
-              <a:t>10</a:t>
+              <a:t>Team:  Nikunj Maheshwari  ·  Dhurvi Thakkar</a:t>
             </a:r>
           </a:p>
         </p:txBody>
@@ -9174,6 +9104,9 @@
   <p:clrMapOvr>
     <a:masterClrMapping/>
   </p:clrMapOvr>
+  <p:transition xmlns:p14="http://schemas.microsoft.com/office/powerpoint/2010/main" spd="med" p14:dur="900">
+    <p:fade/>
+  </p:transition>
 </p:sld>
 </file>
 
@@ -15314,7 +15247,7 @@
                 </a:solidFill>
                 <a:latin typeface="Segoe UI"/>
               </a:rPr>
-              <a:t>PREDICTIVE POLICING &amp; AUTONOMOUS RESPONSE</a:t>
+              <a:t>WANTED PERSON RECOGNITION</a:t>
             </a:r>
           </a:p>
         </p:txBody>
@@ -15349,7 +15282,7 @@
                 </a:solidFill>
                 <a:latin typeface="Segoe UI"/>
               </a:rPr>
-              <a:t>From last-seen to intercepted — before it arrives</a:t>
+              <a:t>Every face on camera, checked against the wanted &amp; missing list</a:t>
             </a:r>
           </a:p>
         </p:txBody>
@@ -15370,6 +15303,174 @@
           </a:prstGeom>
           <a:solidFill>
             <a:srgbClr val="182C4C"/>
+          </a:solidFill>
+          <a:ln w="12700">
+            <a:solidFill>
+              <a:srgbClr val="FF3B5C"/>
+            </a:solidFill>
+          </a:ln>
+          <a:effectLst/>
+        </p:spPr>
+        <p:style>
+          <a:lnRef idx="1">
+            <a:schemeClr val="accent1"/>
+          </a:lnRef>
+          <a:fillRef idx="3">
+            <a:schemeClr val="accent1"/>
+          </a:fillRef>
+          <a:effectRef idx="2">
+            <a:schemeClr val="accent1"/>
+          </a:effectRef>
+          <a:fontRef idx="minor">
+            <a:schemeClr val="lt1"/>
+          </a:fontRef>
+        </p:style>
+        <p:txBody>
+          <a:bodyPr rtlCol="0" anchor="ctr"/>
+          <a:lstStyle/>
+          <a:p>
+            <a:pPr algn="ctr"/>
+          </a:p>
+        </p:txBody>
+      </p:sp>
+      <p:sp>
+        <p:nvSpPr>
+          <p:cNvPr id="5" name="TextBox 4"/>
+          <p:cNvSpPr txBox="1"/>
+          <p:nvPr/>
+        </p:nvSpPr>
+        <p:spPr>
+          <a:xfrm>
+            <a:off x="1143000" y="2057399"/>
+            <a:ext cx="4572000" cy="365760"/>
+          </a:xfrm>
+          <a:prstGeom prst="rect">
+            <a:avLst/>
+          </a:prstGeom>
+          <a:noFill/>
+        </p:spPr>
+        <p:txBody>
+          <a:bodyPr wrap="square">
+            <a:spAutoFit/>
+          </a:bodyPr>
+          <a:lstStyle/>
+          <a:p>
+            <a:pPr algn="l"/>
+            <a:r>
+              <a:rPr sz="1400" b="1">
+                <a:solidFill>
+                  <a:srgbClr val="FF3B5C"/>
+                </a:solidFill>
+                <a:latin typeface="Segoe UI"/>
+              </a:rPr>
+              <a:t>FACE WATCHLIST MATCH</a:t>
+            </a:r>
+          </a:p>
+        </p:txBody>
+      </p:sp>
+      <p:sp>
+        <p:nvSpPr>
+          <p:cNvPr id="6" name="TextBox 5"/>
+          <p:cNvSpPr txBox="1"/>
+          <p:nvPr/>
+        </p:nvSpPr>
+        <p:spPr>
+          <a:xfrm>
+            <a:off x="1143000" y="2560319"/>
+            <a:ext cx="4572000" cy="3017520"/>
+          </a:xfrm>
+          <a:prstGeom prst="rect">
+            <a:avLst/>
+          </a:prstGeom>
+          <a:noFill/>
+        </p:spPr>
+        <p:txBody>
+          <a:bodyPr wrap="square">
+            <a:spAutoFit/>
+          </a:bodyPr>
+          <a:lstStyle/>
+          <a:p>
+            <a:pPr>
+              <a:spcAft>
+                <a:spcPts val="1000"/>
+              </a:spcAft>
+            </a:pPr>
+            <a:r>
+              <a:rPr sz="1450">
+                <a:solidFill>
+                  <a:srgbClr val="EAF1FA"/>
+                </a:solidFill>
+                <a:latin typeface="Segoe UI"/>
+              </a:rPr>
+              <a:t>•  Every detected face is embedded and matched in real time against eGujCop wanted / missing-persons records</a:t>
+            </a:r>
+          </a:p>
+          <a:p>
+            <a:pPr>
+              <a:spcAft>
+                <a:spcPts val="1000"/>
+              </a:spcAft>
+            </a:pPr>
+            <a:r>
+              <a:rPr sz="1450">
+                <a:solidFill>
+                  <a:srgbClr val="EAF1FA"/>
+                </a:solidFill>
+                <a:latin typeface="Segoe UI"/>
+              </a:rPr>
+              <a:t>•  Works on angled, partial or low-light faces using InsightFace embeddings + vector similarity search</a:t>
+            </a:r>
+          </a:p>
+          <a:p>
+            <a:pPr>
+              <a:spcAft>
+                <a:spcPts val="1000"/>
+              </a:spcAft>
+            </a:pPr>
+            <a:r>
+              <a:rPr sz="1450">
+                <a:solidFill>
+                  <a:srgbClr val="EAF1FA"/>
+                </a:solidFill>
+                <a:latin typeface="Segoe UI"/>
+              </a:rPr>
+              <a:t>•  Configurable match threshold balances recall against false positives for field use</a:t>
+            </a:r>
+          </a:p>
+          <a:p>
+            <a:pPr>
+              <a:spcAft>
+                <a:spcPts val="1000"/>
+              </a:spcAft>
+            </a:pPr>
+            <a:r>
+              <a:rPr sz="1450">
+                <a:solidFill>
+                  <a:srgbClr val="EAF1FA"/>
+                </a:solidFill>
+                <a:latin typeface="Segoe UI"/>
+              </a:rPr>
+              <a:t>•  Instant alert with match confidence, camera ID and timestamp — same MQTT alert backbone as ANPR</a:t>
+            </a:r>
+          </a:p>
+        </p:txBody>
+      </p:sp>
+      <p:sp>
+        <p:nvSpPr>
+          <p:cNvPr id="7" name="Rounded Rectangle 6"/>
+          <p:cNvSpPr/>
+          <p:nvPr/>
+        </p:nvSpPr>
+        <p:spPr>
+          <a:xfrm>
+            <a:off x="6172200" y="1874519"/>
+            <a:ext cx="5120640" cy="3931920"/>
+          </a:xfrm>
+          <a:prstGeom prst="roundRect">
+            <a:avLst/>
+          </a:prstGeom>
+          <a:solidFill>
+            <a:srgbClr val="14223A"/>
           </a:solidFill>
           <a:ln w="12700">
             <a:solidFill>
@@ -15400,16 +15501,40 @@
           </a:p>
         </p:txBody>
       </p:sp>
-      <p:sp>
-        <p:nvSpPr>
-          <p:cNvPr id="5" name="TextBox 4"/>
-          <p:cNvSpPr txBox="1"/>
-          <p:nvPr/>
-        </p:nvSpPr>
-        <p:spPr>
-          <a:xfrm>
-            <a:off x="1143000" y="2057399"/>
-            <a:ext cx="4572000" cy="365760"/>
+      <p:pic>
+        <p:nvPicPr>
+          <p:cNvPr id="8" name="Picture 7" descr="face_clean_crop.png"/>
+          <p:cNvPicPr>
+            <a:picLocks noChangeAspect="1"/>
+          </p:cNvPicPr>
+          <p:nvPr/>
+        </p:nvPicPr>
+        <p:blipFill>
+          <a:blip r:embed="rId2"/>
+          <a:stretch>
+            <a:fillRect/>
+          </a:stretch>
+        </p:blipFill>
+        <p:spPr>
+          <a:xfrm>
+            <a:off x="6526155" y="2011679"/>
+            <a:ext cx="4412728" cy="3237600"/>
+          </a:xfrm>
+          <a:prstGeom prst="rect">
+            <a:avLst/>
+          </a:prstGeom>
+        </p:spPr>
+      </p:pic>
+      <p:sp>
+        <p:nvSpPr>
+          <p:cNvPr id="9" name="TextBox 8"/>
+          <p:cNvSpPr txBox="1"/>
+          <p:nvPr/>
+        </p:nvSpPr>
+        <p:spPr>
+          <a:xfrm>
+            <a:off x="6172200" y="5294999"/>
+            <a:ext cx="5120640" cy="374280"/>
           </a:xfrm>
           <a:prstGeom prst="rect">
             <a:avLst/>
@@ -15422,298 +15547,15 @@
           </a:bodyPr>
           <a:lstStyle/>
           <a:p>
-            <a:pPr algn="l"/>
-            <a:r>
-              <a:rPr sz="1400" b="1">
+            <a:pPr algn="ctr"/>
+            <a:r>
+              <a:rPr sz="1250" b="1">
                 <a:solidFill>
                   <a:srgbClr val="25D8F0"/>
                 </a:solidFill>
                 <a:latin typeface="Segoe UI"/>
               </a:rPr>
-              <a:t>PREDICTIVE NEXT-CAMERA</a:t>
-            </a:r>
-          </a:p>
-        </p:txBody>
-      </p:sp>
-      <p:sp>
-        <p:nvSpPr>
-          <p:cNvPr id="6" name="TextBox 5"/>
-          <p:cNvSpPr txBox="1"/>
-          <p:nvPr/>
-        </p:nvSpPr>
-        <p:spPr>
-          <a:xfrm>
-            <a:off x="1143000" y="2560319"/>
-            <a:ext cx="4572000" cy="3017520"/>
-          </a:xfrm>
-          <a:prstGeom prst="rect">
-            <a:avLst/>
-          </a:prstGeom>
-          <a:noFill/>
-        </p:spPr>
-        <p:txBody>
-          <a:bodyPr wrap="square">
-            <a:spAutoFit/>
-          </a:bodyPr>
-          <a:lstStyle/>
-          <a:p>
-            <a:pPr algn="l"/>
-            <a:r>
-              <a:rPr sz="1500" b="0">
-                <a:solidFill>
-                  <a:srgbClr val="EAF1FA"/>
-                </a:solidFill>
-                <a:latin typeface="Segoe UI"/>
-              </a:rPr>
-              <a:t>•  Scores every camera in range by direction + distance from the vehicle's last sighting</a:t>
-            </a:r>
-          </a:p>
-          <a:p>
-            <a:r>
-              <a:rPr sz="1500">
-                <a:solidFill>
-                  <a:srgbClr val="EAF1FA"/>
-                </a:solidFill>
-                <a:latin typeface="Segoe UI"/>
-              </a:rPr>
-              <a:t/>
-            </a:r>
-          </a:p>
-          <a:p>
-            <a:r>
-              <a:rPr sz="1500">
-                <a:solidFill>
-                  <a:srgbClr val="EAF1FA"/>
-                </a:solidFill>
-                <a:latin typeface="Segoe UI"/>
-              </a:rPr>
-              <a:t>•  score = 0.6 × bearing alignment + 0.4 × proximity  (haversine distance + compass bearing)</a:t>
-            </a:r>
-          </a:p>
-          <a:p>
-            <a:r>
-              <a:rPr sz="1500">
-                <a:solidFill>
-                  <a:srgbClr val="EAF1FA"/>
-                </a:solidFill>
-                <a:latin typeface="Segoe UI"/>
-              </a:rPr>
-              <a:t/>
-            </a:r>
-          </a:p>
-          <a:p>
-            <a:r>
-              <a:rPr sz="1500">
-                <a:solidFill>
-                  <a:srgbClr val="EAF1FA"/>
-                </a:solidFill>
-                <a:latin typeface="Segoe UI"/>
-              </a:rPr>
-              <a:t>•  Predicted camera and ETA appear instantly on the live map — an amber marker + dotted path</a:t>
-            </a:r>
-          </a:p>
-          <a:p>
-            <a:r>
-              <a:rPr sz="1500">
-                <a:solidFill>
-                  <a:srgbClr val="EAF1FA"/>
-                </a:solidFill>
-                <a:latin typeface="Segoe UI"/>
-              </a:rPr>
-              <a:t/>
-            </a:r>
-          </a:p>
-          <a:p>
-            <a:r>
-              <a:rPr sz="1500">
-                <a:solidFill>
-                  <a:srgbClr val="EAF1FA"/>
-                </a:solidFill>
-                <a:latin typeface="Segoe UI"/>
-              </a:rPr>
-              <a:t>•  No manual guesswork: patrol units know exactly where to look next</a:t>
-            </a:r>
-          </a:p>
-        </p:txBody>
-      </p:sp>
-      <p:sp>
-        <p:nvSpPr>
-          <p:cNvPr id="7" name="Rounded Rectangle 6"/>
-          <p:cNvSpPr/>
-          <p:nvPr/>
-        </p:nvSpPr>
-        <p:spPr>
-          <a:xfrm>
-            <a:off x="6172200" y="1874519"/>
-            <a:ext cx="5120640" cy="3931920"/>
-          </a:xfrm>
-          <a:prstGeom prst="roundRect">
-            <a:avLst/>
-          </a:prstGeom>
-          <a:solidFill>
-            <a:srgbClr val="182C4C"/>
-          </a:solidFill>
-          <a:ln w="12700">
-            <a:solidFill>
-              <a:srgbClr val="2AD477"/>
-            </a:solidFill>
-          </a:ln>
-          <a:effectLst/>
-        </p:spPr>
-        <p:style>
-          <a:lnRef idx="1">
-            <a:schemeClr val="accent1"/>
-          </a:lnRef>
-          <a:fillRef idx="3">
-            <a:schemeClr val="accent1"/>
-          </a:fillRef>
-          <a:effectRef idx="2">
-            <a:schemeClr val="accent1"/>
-          </a:effectRef>
-          <a:fontRef idx="minor">
-            <a:schemeClr val="lt1"/>
-          </a:fontRef>
-        </p:style>
-        <p:txBody>
-          <a:bodyPr rtlCol="0" anchor="ctr"/>
-          <a:lstStyle/>
-          <a:p>
-            <a:pPr algn="ctr"/>
-          </a:p>
-        </p:txBody>
-      </p:sp>
-      <p:sp>
-        <p:nvSpPr>
-          <p:cNvPr id="8" name="TextBox 7"/>
-          <p:cNvSpPr txBox="1"/>
-          <p:nvPr/>
-        </p:nvSpPr>
-        <p:spPr>
-          <a:xfrm>
-            <a:off x="6446520" y="2057399"/>
-            <a:ext cx="4572000" cy="365760"/>
-          </a:xfrm>
-          <a:prstGeom prst="rect">
-            <a:avLst/>
-          </a:prstGeom>
-          <a:noFill/>
-        </p:spPr>
-        <p:txBody>
-          <a:bodyPr wrap="square">
-            <a:spAutoFit/>
-          </a:bodyPr>
-          <a:lstStyle/>
-          <a:p>
-            <a:pPr algn="l"/>
-            <a:r>
-              <a:rPr sz="1400" b="1">
-                <a:solidFill>
-                  <a:srgbClr val="2AD477"/>
-                </a:solidFill>
-                <a:latin typeface="Segoe UI"/>
-              </a:rPr>
-              <a:t>AUTONOMOUS DRONE DISPATCH</a:t>
-            </a:r>
-          </a:p>
-        </p:txBody>
-      </p:sp>
-      <p:sp>
-        <p:nvSpPr>
-          <p:cNvPr id="9" name="TextBox 8"/>
-          <p:cNvSpPr txBox="1"/>
-          <p:nvPr/>
-        </p:nvSpPr>
-        <p:spPr>
-          <a:xfrm>
-            <a:off x="6446520" y="2560319"/>
-            <a:ext cx="4572000" cy="3017520"/>
-          </a:xfrm>
-          <a:prstGeom prst="rect">
-            <a:avLst/>
-          </a:prstGeom>
-          <a:noFill/>
-        </p:spPr>
-        <p:txBody>
-          <a:bodyPr wrap="square">
-            <a:spAutoFit/>
-          </a:bodyPr>
-          <a:lstStyle/>
-          <a:p>
-            <a:pPr algn="l"/>
-            <a:r>
-              <a:rPr sz="1500" b="0">
-                <a:solidFill>
-                  <a:srgbClr val="EAF1FA"/>
-                </a:solidFill>
-                <a:latin typeface="Segoe UI"/>
-              </a:rPr>
-              <a:t>•  One click on any alert dispatches a drone toward the interception point</a:t>
-            </a:r>
-          </a:p>
-          <a:p>
-            <a:r>
-              <a:rPr sz="1500">
-                <a:solidFill>
-                  <a:srgbClr val="EAF1FA"/>
-                </a:solidFill>
-                <a:latin typeface="Segoe UI"/>
-              </a:rPr>
-              <a:t/>
-            </a:r>
-          </a:p>
-          <a:p>
-            <a:r>
-              <a:rPr sz="1500">
-                <a:solidFill>
-                  <a:srgbClr val="EAF1FA"/>
-                </a:solidFill>
-                <a:latin typeface="Segoe UI"/>
-              </a:rPr>
-              <a:t>•  Simulated flight path animates in real time, with a live trailing route on the map</a:t>
-            </a:r>
-          </a:p>
-          <a:p>
-            <a:r>
-              <a:rPr sz="1500">
-                <a:solidFill>
-                  <a:srgbClr val="EAF1FA"/>
-                </a:solidFill>
-                <a:latin typeface="Segoe UI"/>
-              </a:rPr>
-              <a:t/>
-            </a:r>
-          </a:p>
-          <a:p>
-            <a:r>
-              <a:rPr sz="1500">
-                <a:solidFill>
-                  <a:srgbClr val="EAF1FA"/>
-                </a:solidFill>
-                <a:latin typeface="Segoe UI"/>
-              </a:rPr>
-              <a:t>•  Status panel shows next waypoint, live ETA and a one-click recall</a:t>
-            </a:r>
-          </a:p>
-          <a:p>
-            <a:r>
-              <a:rPr sz="1500">
-                <a:solidFill>
-                  <a:srgbClr val="EAF1FA"/>
-                </a:solidFill>
-                <a:latin typeface="Segoe UI"/>
-              </a:rPr>
-              <a:t/>
-            </a:r>
-          </a:p>
-          <a:p>
-            <a:r>
-              <a:rPr sz="1500">
-                <a:solidFill>
-                  <a:srgbClr val="EAF1FA"/>
-                </a:solidFill>
-                <a:latin typeface="Segoe UI"/>
-              </a:rPr>
-              <a:t>•  Integration-ready for real hardware via MAVLink / DJI SDK</a:t>
+              <a:t>Live capture: webcam feed → instant “HIT” on a registered profile</a:t>
             </a:r>
           </a:p>
         </p:txBody>
@@ -15794,7 +15636,7 @@
                 </a:solidFill>
                 <a:latin typeface="Segoe UI"/>
               </a:rPr>
-              <a:t>★  Sentinel doesn't just alert — it predicts where the target is going, and can act on it.</a:t>
+              <a:t>★  Demonstrated live on an ordinary webcam — deployable on any existing camera the same way.</a:t>
             </a:r>
           </a:p>
         </p:txBody>
@@ -15864,7 +15706,7 @@
                 </a:solidFill>
                 <a:latin typeface="Segoe UI"/>
               </a:rPr>
-              <a:t>9</a:t>
+              <a:t>8</a:t>
             </a:r>
           </a:p>
         </p:txBody>
@@ -15925,7 +15767,7 @@
                 </a:solidFill>
                 <a:latin typeface="Segoe UI"/>
               </a:rPr>
-              <a:t>PRODUCT IN ACTION</a:t>
+              <a:t>PREDICTIVE POLICING &amp; AUTONOMOUS RESPONSE</a:t>
             </a:r>
           </a:p>
         </p:txBody>
@@ -15960,29 +15802,31 @@
                 </a:solidFill>
                 <a:latin typeface="Segoe UI"/>
               </a:rPr>
-              <a:t>Real screens, real detections — captured from the running system</a:t>
-            </a:r>
-          </a:p>
-        </p:txBody>
-      </p:sp>
-      <p:sp>
-        <p:nvSpPr>
-          <p:cNvPr id="4" name="Rectangle 3"/>
+              <a:t>From last-seen to intercepted — before it arrives</a:t>
+            </a:r>
+          </a:p>
+        </p:txBody>
+      </p:sp>
+      <p:sp>
+        <p:nvSpPr>
+          <p:cNvPr id="4" name="Rounded Rectangle 3"/>
           <p:cNvSpPr/>
           <p:nvPr/>
         </p:nvSpPr>
         <p:spPr>
           <a:xfrm>
-            <a:off x="1261888" y="1628328"/>
-            <a:ext cx="4754864" cy="3579864"/>
-          </a:xfrm>
-          <a:prstGeom prst="rect">
-            <a:avLst/>
-          </a:prstGeom>
-          <a:noFill/>
+            <a:off x="868680" y="1874519"/>
+            <a:ext cx="5120640" cy="3931920"/>
+          </a:xfrm>
+          <a:prstGeom prst="roundRect">
+            <a:avLst/>
+          </a:prstGeom>
+          <a:solidFill>
+            <a:srgbClr val="182C4C"/>
+          </a:solidFill>
           <a:ln w="12700">
             <a:solidFill>
-              <a:srgbClr val="182C4C"/>
+              <a:srgbClr val="2B8CFF"/>
             </a:solidFill>
           </a:ln>
           <a:effectLst/>
@@ -16011,176 +15855,150 @@
       </p:sp>
       <p:sp>
         <p:nvSpPr>
-          <p:cNvPr id="5" name="Rectangle 4"/>
+          <p:cNvPr id="5" name="TextBox 4"/>
+          <p:cNvSpPr txBox="1"/>
+          <p:nvPr/>
+        </p:nvSpPr>
+        <p:spPr>
+          <a:xfrm>
+            <a:off x="1143000" y="2057399"/>
+            <a:ext cx="4572000" cy="365760"/>
+          </a:xfrm>
+          <a:prstGeom prst="rect">
+            <a:avLst/>
+          </a:prstGeom>
+          <a:noFill/>
+        </p:spPr>
+        <p:txBody>
+          <a:bodyPr wrap="square">
+            <a:spAutoFit/>
+          </a:bodyPr>
+          <a:lstStyle/>
+          <a:p>
+            <a:pPr algn="l"/>
+            <a:r>
+              <a:rPr sz="1400" b="1">
+                <a:solidFill>
+                  <a:srgbClr val="25D8F0"/>
+                </a:solidFill>
+                <a:latin typeface="Segoe UI"/>
+              </a:rPr>
+              <a:t>PREDICTIVE NEXT-CAMERA</a:t>
+            </a:r>
+          </a:p>
+        </p:txBody>
+      </p:sp>
+      <p:sp>
+        <p:nvSpPr>
+          <p:cNvPr id="6" name="TextBox 5"/>
+          <p:cNvSpPr txBox="1"/>
+          <p:nvPr/>
+        </p:nvSpPr>
+        <p:spPr>
+          <a:xfrm>
+            <a:off x="1143000" y="2560319"/>
+            <a:ext cx="4572000" cy="3017520"/>
+          </a:xfrm>
+          <a:prstGeom prst="rect">
+            <a:avLst/>
+          </a:prstGeom>
+          <a:noFill/>
+        </p:spPr>
+        <p:txBody>
+          <a:bodyPr wrap="square">
+            <a:spAutoFit/>
+          </a:bodyPr>
+          <a:lstStyle/>
+          <a:p>
+            <a:pPr algn="l"/>
+            <a:r>
+              <a:rPr sz="1500" b="0">
+                <a:solidFill>
+                  <a:srgbClr val="EAF1FA"/>
+                </a:solidFill>
+                <a:latin typeface="Segoe UI"/>
+              </a:rPr>
+              <a:t>•  Scores every camera in range by direction + distance from the vehicle's last sighting</a:t>
+            </a:r>
+          </a:p>
+          <a:p>
+            <a:r>
+              <a:rPr sz="1500">
+                <a:solidFill>
+                  <a:srgbClr val="EAF1FA"/>
+                </a:solidFill>
+                <a:latin typeface="Segoe UI"/>
+              </a:rPr>
+              <a:t/>
+            </a:r>
+          </a:p>
+          <a:p>
+            <a:r>
+              <a:rPr sz="1500">
+                <a:solidFill>
+                  <a:srgbClr val="EAF1FA"/>
+                </a:solidFill>
+                <a:latin typeface="Segoe UI"/>
+              </a:rPr>
+              <a:t>•  score = 0.6 × bearing alignment + 0.4 × proximity  (haversine distance + compass bearing)</a:t>
+            </a:r>
+          </a:p>
+          <a:p>
+            <a:r>
+              <a:rPr sz="1500">
+                <a:solidFill>
+                  <a:srgbClr val="EAF1FA"/>
+                </a:solidFill>
+                <a:latin typeface="Segoe UI"/>
+              </a:rPr>
+              <a:t/>
+            </a:r>
+          </a:p>
+          <a:p>
+            <a:r>
+              <a:rPr sz="1500">
+                <a:solidFill>
+                  <a:srgbClr val="EAF1FA"/>
+                </a:solidFill>
+                <a:latin typeface="Segoe UI"/>
+              </a:rPr>
+              <a:t>•  Predicted camera and ETA appear instantly on the live map — an amber marker + dotted path</a:t>
+            </a:r>
+          </a:p>
+          <a:p>
+            <a:r>
+              <a:rPr sz="1500">
+                <a:solidFill>
+                  <a:srgbClr val="EAF1FA"/>
+                </a:solidFill>
+                <a:latin typeface="Segoe UI"/>
+              </a:rPr>
+              <a:t/>
+            </a:r>
+          </a:p>
+          <a:p>
+            <a:r>
+              <a:rPr sz="1500">
+                <a:solidFill>
+                  <a:srgbClr val="EAF1FA"/>
+                </a:solidFill>
+                <a:latin typeface="Segoe UI"/>
+              </a:rPr>
+              <a:t>•  No manual guesswork: patrol units know exactly where to look next</a:t>
+            </a:r>
+          </a:p>
+        </p:txBody>
+      </p:sp>
+      <p:sp>
+        <p:nvSpPr>
+          <p:cNvPr id="7" name="Rounded Rectangle 6"/>
           <p:cNvSpPr/>
           <p:nvPr/>
         </p:nvSpPr>
         <p:spPr>
           <a:xfrm>
-            <a:off x="6144768" y="1628328"/>
-            <a:ext cx="4754864" cy="3579864"/>
-          </a:xfrm>
-          <a:prstGeom prst="rect">
-            <a:avLst/>
-          </a:prstGeom>
-          <a:noFill/>
-          <a:ln w="12700">
-            <a:solidFill>
-              <a:srgbClr val="182C4C"/>
-            </a:solidFill>
-          </a:ln>
-          <a:effectLst/>
-        </p:spPr>
-        <p:style>
-          <a:lnRef idx="1">
-            <a:schemeClr val="accent1"/>
-          </a:lnRef>
-          <a:fillRef idx="3">
-            <a:schemeClr val="accent1"/>
-          </a:fillRef>
-          <a:effectRef idx="2">
-            <a:schemeClr val="accent1"/>
-          </a:effectRef>
-          <a:fontRef idx="minor">
-            <a:schemeClr val="lt1"/>
-          </a:fontRef>
-        </p:style>
-        <p:txBody>
-          <a:bodyPr rtlCol="0" anchor="ctr"/>
-          <a:lstStyle/>
-          <a:p>
-            <a:pPr algn="ctr"/>
-          </a:p>
-        </p:txBody>
-      </p:sp>
-      <p:pic>
-        <p:nvPicPr>
-          <p:cNvPr id="6" name="Picture 5" descr="gis_route_crop.png"/>
-          <p:cNvPicPr>
-            <a:picLocks noChangeAspect="1"/>
-          </p:cNvPicPr>
-          <p:nvPr/>
-        </p:nvPicPr>
-        <p:blipFill>
-          <a:blip r:embed="rId2"/>
-          <a:stretch>
-            <a:fillRect/>
-          </a:stretch>
-        </p:blipFill>
-        <p:spPr>
-          <a:xfrm>
-            <a:off x="1289320" y="1655760"/>
-            <a:ext cx="4700000" cy="3525000"/>
-          </a:xfrm>
-          <a:prstGeom prst="rect">
-            <a:avLst/>
-          </a:prstGeom>
-        </p:spPr>
-      </p:pic>
-      <p:pic>
-        <p:nvPicPr>
-          <p:cNvPr id="7" name="Picture 6" descr="predict_drone_crop.png"/>
-          <p:cNvPicPr>
-            <a:picLocks noChangeAspect="1"/>
-          </p:cNvPicPr>
-          <p:nvPr/>
-        </p:nvPicPr>
-        <p:blipFill>
-          <a:blip r:embed="rId3"/>
-          <a:stretch>
-            <a:fillRect/>
-          </a:stretch>
-        </p:blipFill>
-        <p:spPr>
-          <a:xfrm>
-            <a:off x="6172200" y="1655760"/>
-            <a:ext cx="4700000" cy="3525000"/>
-          </a:xfrm>
-          <a:prstGeom prst="rect">
-            <a:avLst/>
-          </a:prstGeom>
-        </p:spPr>
-      </p:pic>
-      <p:sp>
-        <p:nvSpPr>
-          <p:cNvPr id="8" name="TextBox 7"/>
-          <p:cNvSpPr txBox="1"/>
-          <p:nvPr/>
-        </p:nvSpPr>
-        <p:spPr>
-          <a:xfrm>
-            <a:off x="1289320" y="5272200"/>
-            <a:ext cx="4700000" cy="365760"/>
-          </a:xfrm>
-          <a:prstGeom prst="rect">
-            <a:avLst/>
-          </a:prstGeom>
-          <a:noFill/>
-        </p:spPr>
-        <p:txBody>
-          <a:bodyPr wrap="square">
-            <a:spAutoFit/>
-          </a:bodyPr>
-          <a:lstStyle/>
-          <a:p>
-            <a:pPr algn="ctr"/>
-            <a:r>
-              <a:rPr sz="1300" b="1">
-                <a:solidFill>
-                  <a:srgbClr val="25D8F0"/>
-                </a:solidFill>
-                <a:latin typeface="Segoe UI"/>
-              </a:rPr>
-              <a:t>Cross-camera alert + automatic route reconstruction</a:t>
-            </a:r>
-          </a:p>
-        </p:txBody>
-      </p:sp>
-      <p:sp>
-        <p:nvSpPr>
-          <p:cNvPr id="9" name="TextBox 8"/>
-          <p:cNvSpPr txBox="1"/>
-          <p:nvPr/>
-        </p:nvSpPr>
-        <p:spPr>
-          <a:xfrm>
-            <a:off x="6172200" y="5272200"/>
-            <a:ext cx="4700000" cy="365760"/>
-          </a:xfrm>
-          <a:prstGeom prst="rect">
-            <a:avLst/>
-          </a:prstGeom>
-          <a:noFill/>
-        </p:spPr>
-        <p:txBody>
-          <a:bodyPr wrap="square">
-            <a:spAutoFit/>
-          </a:bodyPr>
-          <a:lstStyle/>
-          <a:p>
-            <a:pPr algn="ctr"/>
-            <a:r>
-              <a:rPr sz="1300" b="1">
-                <a:solidFill>
-                  <a:srgbClr val="25D8F0"/>
-                </a:solidFill>
-                <a:latin typeface="Segoe UI"/>
-              </a:rPr>
-              <a:t>Predictive next-camera + one-click drone dispatch</a:t>
-            </a:r>
-          </a:p>
-        </p:txBody>
-      </p:sp>
-      <p:sp>
-        <p:nvSpPr>
-          <p:cNvPr id="10" name="Rounded Rectangle 9"/>
-          <p:cNvSpPr/>
-          <p:nvPr/>
-        </p:nvSpPr>
-        <p:spPr>
-          <a:xfrm>
-            <a:off x="868680" y="5775120"/>
-            <a:ext cx="10424160" cy="548640"/>
+            <a:off x="6172200" y="1874519"/>
+            <a:ext cx="5120640" cy="3931920"/>
           </a:xfrm>
           <a:prstGeom prst="roundRect">
             <a:avLst/>
@@ -16219,14 +16037,196 @@
       </p:sp>
       <p:sp>
         <p:nvSpPr>
+          <p:cNvPr id="8" name="TextBox 7"/>
+          <p:cNvSpPr txBox="1"/>
+          <p:nvPr/>
+        </p:nvSpPr>
+        <p:spPr>
+          <a:xfrm>
+            <a:off x="6446520" y="2057399"/>
+            <a:ext cx="4572000" cy="365760"/>
+          </a:xfrm>
+          <a:prstGeom prst="rect">
+            <a:avLst/>
+          </a:prstGeom>
+          <a:noFill/>
+        </p:spPr>
+        <p:txBody>
+          <a:bodyPr wrap="square">
+            <a:spAutoFit/>
+          </a:bodyPr>
+          <a:lstStyle/>
+          <a:p>
+            <a:pPr algn="l"/>
+            <a:r>
+              <a:rPr sz="1400" b="1">
+                <a:solidFill>
+                  <a:srgbClr val="2AD477"/>
+                </a:solidFill>
+                <a:latin typeface="Segoe UI"/>
+              </a:rPr>
+              <a:t>AUTONOMOUS DRONE DISPATCH</a:t>
+            </a:r>
+          </a:p>
+        </p:txBody>
+      </p:sp>
+      <p:sp>
+        <p:nvSpPr>
+          <p:cNvPr id="9" name="TextBox 8"/>
+          <p:cNvSpPr txBox="1"/>
+          <p:nvPr/>
+        </p:nvSpPr>
+        <p:spPr>
+          <a:xfrm>
+            <a:off x="6446520" y="2560319"/>
+            <a:ext cx="4572000" cy="3017520"/>
+          </a:xfrm>
+          <a:prstGeom prst="rect">
+            <a:avLst/>
+          </a:prstGeom>
+          <a:noFill/>
+        </p:spPr>
+        <p:txBody>
+          <a:bodyPr wrap="square">
+            <a:spAutoFit/>
+          </a:bodyPr>
+          <a:lstStyle/>
+          <a:p>
+            <a:pPr algn="l"/>
+            <a:r>
+              <a:rPr sz="1500" b="0">
+                <a:solidFill>
+                  <a:srgbClr val="EAF1FA"/>
+                </a:solidFill>
+                <a:latin typeface="Segoe UI"/>
+              </a:rPr>
+              <a:t>•  One click on any alert dispatches a drone toward the interception point</a:t>
+            </a:r>
+          </a:p>
+          <a:p>
+            <a:r>
+              <a:rPr sz="1500">
+                <a:solidFill>
+                  <a:srgbClr val="EAF1FA"/>
+                </a:solidFill>
+                <a:latin typeface="Segoe UI"/>
+              </a:rPr>
+              <a:t/>
+            </a:r>
+          </a:p>
+          <a:p>
+            <a:r>
+              <a:rPr sz="1500">
+                <a:solidFill>
+                  <a:srgbClr val="EAF1FA"/>
+                </a:solidFill>
+                <a:latin typeface="Segoe UI"/>
+              </a:rPr>
+              <a:t>•  Simulated flight path animates in real time, with a live trailing route on the map</a:t>
+            </a:r>
+          </a:p>
+          <a:p>
+            <a:r>
+              <a:rPr sz="1500">
+                <a:solidFill>
+                  <a:srgbClr val="EAF1FA"/>
+                </a:solidFill>
+                <a:latin typeface="Segoe UI"/>
+              </a:rPr>
+              <a:t/>
+            </a:r>
+          </a:p>
+          <a:p>
+            <a:r>
+              <a:rPr sz="1500">
+                <a:solidFill>
+                  <a:srgbClr val="EAF1FA"/>
+                </a:solidFill>
+                <a:latin typeface="Segoe UI"/>
+              </a:rPr>
+              <a:t>•  Status panel shows next waypoint, live ETA and a one-click recall</a:t>
+            </a:r>
+          </a:p>
+          <a:p>
+            <a:r>
+              <a:rPr sz="1500">
+                <a:solidFill>
+                  <a:srgbClr val="EAF1FA"/>
+                </a:solidFill>
+                <a:latin typeface="Segoe UI"/>
+              </a:rPr>
+              <a:t/>
+            </a:r>
+          </a:p>
+          <a:p>
+            <a:r>
+              <a:rPr sz="1500">
+                <a:solidFill>
+                  <a:srgbClr val="EAF1FA"/>
+                </a:solidFill>
+                <a:latin typeface="Segoe UI"/>
+              </a:rPr>
+              <a:t>•  Integration-ready for real hardware via MAVLink / DJI SDK</a:t>
+            </a:r>
+          </a:p>
+        </p:txBody>
+      </p:sp>
+      <p:sp>
+        <p:nvSpPr>
+          <p:cNvPr id="10" name="Rounded Rectangle 9"/>
+          <p:cNvSpPr/>
+          <p:nvPr/>
+        </p:nvSpPr>
+        <p:spPr>
+          <a:xfrm>
+            <a:off x="868680" y="5931408"/>
+            <a:ext cx="10424160" cy="365760"/>
+          </a:xfrm>
+          <a:prstGeom prst="roundRect">
+            <a:avLst/>
+          </a:prstGeom>
+          <a:solidFill>
+            <a:srgbClr val="182C4C"/>
+          </a:solidFill>
+          <a:ln w="12700">
+            <a:solidFill>
+              <a:srgbClr val="F5B638"/>
+            </a:solidFill>
+          </a:ln>
+          <a:effectLst/>
+        </p:spPr>
+        <p:style>
+          <a:lnRef idx="1">
+            <a:schemeClr val="accent1"/>
+          </a:lnRef>
+          <a:fillRef idx="3">
+            <a:schemeClr val="accent1"/>
+          </a:fillRef>
+          <a:effectRef idx="2">
+            <a:schemeClr val="accent1"/>
+          </a:effectRef>
+          <a:fontRef idx="minor">
+            <a:schemeClr val="lt1"/>
+          </a:fontRef>
+        </p:style>
+        <p:txBody>
+          <a:bodyPr rtlCol="0" anchor="ctr"/>
+          <a:lstStyle/>
+          <a:p>
+            <a:pPr algn="ctr"/>
+          </a:p>
+        </p:txBody>
+      </p:sp>
+      <p:sp>
+        <p:nvSpPr>
           <p:cNvPr id="11" name="TextBox 10"/>
           <p:cNvSpPr txBox="1"/>
           <p:nvPr/>
         </p:nvSpPr>
         <p:spPr>
           <a:xfrm>
-            <a:off x="868680" y="5775120"/>
-            <a:ext cx="10424160" cy="548640"/>
+            <a:off x="868680" y="5931408"/>
+            <a:ext cx="10424160" cy="365760"/>
           </a:xfrm>
           <a:prstGeom prst="rect">
             <a:avLst/>
@@ -16243,11 +16243,11 @@
             <a:r>
               <a:rPr sz="1300" b="1">
                 <a:solidFill>
-                  <a:srgbClr val="2AD477"/>
-                </a:solidFill>
-                <a:latin typeface="Segoe UI"/>
-              </a:rPr>
-              <a:t>Also live on the same dashboard: natural-language video search across every camera, and a full camera registry with live health status.</a:t>
+                  <a:srgbClr val="F5B638"/>
+                </a:solidFill>
+                <a:latin typeface="Segoe UI"/>
+              </a:rPr>
+              <a:t>★  Sentinel doesn't just alert — it predicts where the target is going, and can act on it.</a:t>
             </a:r>
           </a:p>
         </p:txBody>
@@ -16317,7 +16317,7 @@
                 </a:solidFill>
                 <a:latin typeface="Segoe UI"/>
               </a:rPr>
-              <a:t>11</a:t>
+              <a:t>9</a:t>
             </a:r>
           </a:p>
         </p:txBody>
